--- a/lectures/week4/latex/figures/latent_variable_path_diagrams.pptx
+++ b/lectures/week4/latex/figures/latent_variable_path_diagrams.pptx
@@ -15,13 +15,19 @@
     <p:sldMasterId id="2147483668" r:id="rId11"/>
   </p:sldMasterIdLst>
   <p:notesMasterIdLst>
-    <p:notesMasterId r:id="rId16"/>
+    <p:notesMasterId r:id="rId22"/>
   </p:notesMasterIdLst>
   <p:sldIdLst>
     <p:sldId id="256" r:id="rId12"/>
     <p:sldId id="257" r:id="rId13"/>
     <p:sldId id="258" r:id="rId14"/>
     <p:sldId id="259" r:id="rId15"/>
+    <p:sldId id="261" r:id="rId16"/>
+    <p:sldId id="262" r:id="rId17"/>
+    <p:sldId id="265" r:id="rId18"/>
+    <p:sldId id="260" r:id="rId19"/>
+    <p:sldId id="264" r:id="rId20"/>
+    <p:sldId id="263" r:id="rId21"/>
   </p:sldIdLst>
   <p:sldSz cx="12192000" cy="6858000"/>
   <p:notesSz cx="6858000" cy="9144000"/>
@@ -120,7 +126,180 @@
       </a:defRPr>
     </a:lvl9pPr>
   </p:defaultTextStyle>
+  <p:extLst>
+    <p:ext uri="{EFAFB233-063F-42B5-8137-9DF3F51BA10A}">
+      <p15:sldGuideLst xmlns:p15="http://schemas.microsoft.com/office/powerpoint/2012/main"/>
+    </p:ext>
+  </p:extLst>
 </p:presentation>
+</file>
+
+<file path=ppt/ink/ink1.xml><?xml version="1.0" encoding="utf-8"?>
+<inkml:ink xmlns:inkml="http://www.w3.org/2003/InkML">
+  <inkml:definitions>
+    <inkml:context xml:id="ctx0">
+      <inkml:inkSource xml:id="inkSrc0">
+        <inkml:traceFormat>
+          <inkml:channel name="X" type="integer" min="-2.14748E9" max="2.14748E9" units="cm"/>
+          <inkml:channel name="Y" type="integer" min="-2.14748E9" max="2.14748E9" units="cm"/>
+        </inkml:traceFormat>
+        <inkml:channelProperties>
+          <inkml:channelProperty channel="X" name="resolution" value="1000" units="1/cm"/>
+          <inkml:channelProperty channel="Y" name="resolution" value="1000" units="1/cm"/>
+        </inkml:channelProperties>
+      </inkml:inkSource>
+      <inkml:timestamp xml:id="ts0" timeString="2025-09-24T08:18:18.146"/>
+    </inkml:context>
+    <inkml:brush xml:id="br0">
+      <inkml:brushProperty name="width" value="0.1" units="cm"/>
+      <inkml:brushProperty name="height" value="0.6" units="cm"/>
+      <inkml:brushProperty name="color" value="#849398"/>
+      <inkml:brushProperty name="ignorePressure" value="1"/>
+      <inkml:brushProperty name="inkEffects" value="pencil"/>
+    </inkml:brush>
+  </inkml:definitions>
+  <inkml:trace contextRef="#ctx0" brushRef="#br0">1 21,'4'0,"5"-4,4-1,5 0,3 2,-3 0</inkml:trace>
+</inkml:ink>
+</file>
+
+<file path=ppt/ink/ink2.xml><?xml version="1.0" encoding="utf-8"?>
+<inkml:ink xmlns:inkml="http://www.w3.org/2003/InkML">
+  <inkml:definitions>
+    <inkml:context xml:id="ctx0">
+      <inkml:inkSource xml:id="inkSrc0">
+        <inkml:traceFormat>
+          <inkml:channel name="X" type="integer" min="-2.14748E9" max="2.14748E9" units="cm"/>
+          <inkml:channel name="Y" type="integer" min="-2.14748E9" max="2.14748E9" units="cm"/>
+        </inkml:traceFormat>
+        <inkml:channelProperties>
+          <inkml:channelProperty channel="X" name="resolution" value="1000" units="1/cm"/>
+          <inkml:channelProperty channel="Y" name="resolution" value="1000" units="1/cm"/>
+        </inkml:channelProperties>
+      </inkml:inkSource>
+      <inkml:timestamp xml:id="ts0" timeString="2025-09-24T08:20:15.352"/>
+    </inkml:context>
+    <inkml:brush xml:id="br0">
+      <inkml:brushProperty name="width" value="0.1" units="cm"/>
+      <inkml:brushProperty name="height" value="0.6" units="cm"/>
+      <inkml:brushProperty name="color" value="#849398"/>
+      <inkml:brushProperty name="ignorePressure" value="1"/>
+      <inkml:brushProperty name="inkEffects" value="pencil"/>
+    </inkml:brush>
+  </inkml:definitions>
+  <inkml:trace contextRef="#ctx0" brushRef="#br0">0 0,'0'0</inkml:trace>
+</inkml:ink>
+</file>
+
+<file path=ppt/ink/ink3.xml><?xml version="1.0" encoding="utf-8"?>
+<inkml:ink xmlns:inkml="http://www.w3.org/2003/InkML">
+  <inkml:definitions>
+    <inkml:context xml:id="ctx0">
+      <inkml:inkSource xml:id="inkSrc0">
+        <inkml:traceFormat>
+          <inkml:channel name="X" type="integer" min="-2.14748E9" max="2.14748E9" units="cm"/>
+          <inkml:channel name="Y" type="integer" min="-2.14748E9" max="2.14748E9" units="cm"/>
+        </inkml:traceFormat>
+        <inkml:channelProperties>
+          <inkml:channelProperty channel="X" name="resolution" value="1000" units="1/cm"/>
+          <inkml:channelProperty channel="Y" name="resolution" value="1000" units="1/cm"/>
+        </inkml:channelProperties>
+      </inkml:inkSource>
+      <inkml:timestamp xml:id="ts0" timeString="2025-09-24T08:20:07.864"/>
+    </inkml:context>
+    <inkml:brush xml:id="br0">
+      <inkml:brushProperty name="width" value="0.10583" units="cm"/>
+      <inkml:brushProperty name="height" value="0.10583" units="cm"/>
+      <inkml:brushProperty name="color" value="#849398"/>
+      <inkml:brushProperty name="ignorePressure" value="1"/>
+      <inkml:brushProperty name="inkEffects" value="pencil"/>
+    </inkml:brush>
+  </inkml:definitions>
+  <inkml:trace contextRef="#ctx0" brushRef="#br0">0 0,'0'0</inkml:trace>
+</inkml:ink>
+</file>
+
+<file path=ppt/ink/ink4.xml><?xml version="1.0" encoding="utf-8"?>
+<inkml:ink xmlns:inkml="http://www.w3.org/2003/InkML">
+  <inkml:definitions>
+    <inkml:context xml:id="ctx0">
+      <inkml:inkSource xml:id="inkSrc0">
+        <inkml:traceFormat>
+          <inkml:channel name="X" type="integer" min="-2.14748E9" max="2.14748E9" units="cm"/>
+          <inkml:channel name="Y" type="integer" min="-2.14748E9" max="2.14748E9" units="cm"/>
+        </inkml:traceFormat>
+        <inkml:channelProperties>
+          <inkml:channelProperty channel="X" name="resolution" value="1000" units="1/cm"/>
+          <inkml:channelProperty channel="Y" name="resolution" value="1000" units="1/cm"/>
+        </inkml:channelProperties>
+      </inkml:inkSource>
+      <inkml:timestamp xml:id="ts0" timeString="2025-09-24T08:18:18.146"/>
+    </inkml:context>
+    <inkml:brush xml:id="br0">
+      <inkml:brushProperty name="width" value="0.1" units="cm"/>
+      <inkml:brushProperty name="height" value="0.6" units="cm"/>
+      <inkml:brushProperty name="color" value="#849398"/>
+      <inkml:brushProperty name="ignorePressure" value="1"/>
+      <inkml:brushProperty name="inkEffects" value="pencil"/>
+    </inkml:brush>
+  </inkml:definitions>
+  <inkml:trace contextRef="#ctx0" brushRef="#br0">1 21,'4'0,"5"-4,4-1,5 0,3 2,-3 0</inkml:trace>
+</inkml:ink>
+</file>
+
+<file path=ppt/ink/ink5.xml><?xml version="1.0" encoding="utf-8"?>
+<inkml:ink xmlns:inkml="http://www.w3.org/2003/InkML">
+  <inkml:definitions>
+    <inkml:context xml:id="ctx0">
+      <inkml:inkSource xml:id="inkSrc0">
+        <inkml:traceFormat>
+          <inkml:channel name="X" type="integer" min="-2.14748E9" max="2.14748E9" units="cm"/>
+          <inkml:channel name="Y" type="integer" min="-2.14748E9" max="2.14748E9" units="cm"/>
+        </inkml:traceFormat>
+        <inkml:channelProperties>
+          <inkml:channelProperty channel="X" name="resolution" value="1000" units="1/cm"/>
+          <inkml:channelProperty channel="Y" name="resolution" value="1000" units="1/cm"/>
+        </inkml:channelProperties>
+      </inkml:inkSource>
+      <inkml:timestamp xml:id="ts0" timeString="2025-09-24T08:20:15.352"/>
+    </inkml:context>
+    <inkml:brush xml:id="br0">
+      <inkml:brushProperty name="width" value="0.1" units="cm"/>
+      <inkml:brushProperty name="height" value="0.6" units="cm"/>
+      <inkml:brushProperty name="color" value="#849398"/>
+      <inkml:brushProperty name="ignorePressure" value="1"/>
+      <inkml:brushProperty name="inkEffects" value="pencil"/>
+    </inkml:brush>
+  </inkml:definitions>
+  <inkml:trace contextRef="#ctx0" brushRef="#br0">0 0,'0'0</inkml:trace>
+</inkml:ink>
+</file>
+
+<file path=ppt/ink/ink6.xml><?xml version="1.0" encoding="utf-8"?>
+<inkml:ink xmlns:inkml="http://www.w3.org/2003/InkML">
+  <inkml:definitions>
+    <inkml:context xml:id="ctx0">
+      <inkml:inkSource xml:id="inkSrc0">
+        <inkml:traceFormat>
+          <inkml:channel name="X" type="integer" min="-2.14748E9" max="2.14748E9" units="cm"/>
+          <inkml:channel name="Y" type="integer" min="-2.14748E9" max="2.14748E9" units="cm"/>
+        </inkml:traceFormat>
+        <inkml:channelProperties>
+          <inkml:channelProperty channel="X" name="resolution" value="1000" units="1/cm"/>
+          <inkml:channelProperty channel="Y" name="resolution" value="1000" units="1/cm"/>
+        </inkml:channelProperties>
+      </inkml:inkSource>
+      <inkml:timestamp xml:id="ts0" timeString="2025-09-24T08:20:07.864"/>
+    </inkml:context>
+    <inkml:brush xml:id="br0">
+      <inkml:brushProperty name="width" value="0.10583" units="cm"/>
+      <inkml:brushProperty name="height" value="0.10583" units="cm"/>
+      <inkml:brushProperty name="color" value="#849398"/>
+      <inkml:brushProperty name="ignorePressure" value="1"/>
+      <inkml:brushProperty name="inkEffects" value="pencil"/>
+    </inkml:brush>
+  </inkml:definitions>
+  <inkml:trace contextRef="#ctx0" brushRef="#br0">0 0,'0'0</inkml:trace>
+</inkml:ink>
 </file>
 
 <file path=ppt/notesMasters/notesMaster1.xml><?xml version="1.0" encoding="utf-8"?>
@@ -1023,6 +1202,582 @@
         </p:txBody>
       </p:sp>
     </p:spTree>
+  </p:cSld>
+  <p:clrMapOvr>
+    <a:masterClrMapping/>
+  </p:clrMapOvr>
+</p:notes>
+</file>
+
+<file path=ppt/notesSlides/notesSlide4.xml><?xml version="1.0" encoding="utf-8"?>
+<p:notes xmlns:a="http://schemas.openxmlformats.org/drawingml/2006/main" xmlns:r="http://schemas.openxmlformats.org/officeDocument/2006/relationships" xmlns:p="http://schemas.openxmlformats.org/presentationml/2006/main">
+  <p:cSld>
+    <p:spTree>
+      <p:nvGrpSpPr>
+        <p:cNvPr id="1" name="">
+          <a:extLst>
+            <a:ext uri="{FF2B5EF4-FFF2-40B4-BE49-F238E27FC236}">
+              <a16:creationId xmlns:a16="http://schemas.microsoft.com/office/drawing/2014/main" id="{1C6E8352-0A79-3B18-5653-3A2CA0D3D3A3}"/>
+            </a:ext>
+          </a:extLst>
+        </p:cNvPr>
+        <p:cNvGrpSpPr/>
+        <p:nvPr/>
+      </p:nvGrpSpPr>
+      <p:grpSpPr>
+        <a:xfrm>
+          <a:off x="0" y="0"/>
+          <a:ext cx="0" cy="0"/>
+          <a:chOff x="0" y="0"/>
+          <a:chExt cx="0" cy="0"/>
+        </a:xfrm>
+      </p:grpSpPr>
+      <p:sp>
+        <p:nvSpPr>
+          <p:cNvPr id="234" name="PlaceHolder 1">
+            <a:extLst>
+              <a:ext uri="{FF2B5EF4-FFF2-40B4-BE49-F238E27FC236}">
+                <a16:creationId xmlns:a16="http://schemas.microsoft.com/office/drawing/2014/main" id="{BD168C97-5BF1-4060-2563-219D39DB2B1C}"/>
+              </a:ext>
+            </a:extLst>
+          </p:cNvPr>
+          <p:cNvSpPr>
+            <a:spLocks noGrp="1" noRot="1" noChangeAspect="1"/>
+          </p:cNvSpPr>
+          <p:nvPr>
+            <p:ph type="sldImg"/>
+          </p:nvPr>
+        </p:nvSpPr>
+        <p:spPr>
+          <a:xfrm>
+            <a:off x="685800" y="1143000"/>
+            <a:ext cx="5486400" cy="3086100"/>
+          </a:xfrm>
+          <a:prstGeom prst="rect">
+            <a:avLst/>
+          </a:prstGeom>
+          <a:ln w="0">
+            <a:noFill/>
+          </a:ln>
+        </p:spPr>
+      </p:sp>
+      <p:sp>
+        <p:nvSpPr>
+          <p:cNvPr id="235" name="PlaceHolder 2">
+            <a:extLst>
+              <a:ext uri="{FF2B5EF4-FFF2-40B4-BE49-F238E27FC236}">
+                <a16:creationId xmlns:a16="http://schemas.microsoft.com/office/drawing/2014/main" id="{117B3D7F-4977-8F97-E208-126EB7092E28}"/>
+              </a:ext>
+            </a:extLst>
+          </p:cNvPr>
+          <p:cNvSpPr>
+            <a:spLocks noGrp="1"/>
+          </p:cNvSpPr>
+          <p:nvPr>
+            <p:ph type="body"/>
+          </p:nvPr>
+        </p:nvSpPr>
+        <p:spPr>
+          <a:xfrm>
+            <a:off x="685800" y="4400640"/>
+            <a:ext cx="5485680" cy="3599640"/>
+          </a:xfrm>
+          <a:prstGeom prst="rect">
+            <a:avLst/>
+          </a:prstGeom>
+          <a:noFill/>
+          <a:ln w="0">
+            <a:noFill/>
+          </a:ln>
+        </p:spPr>
+        <p:txBody>
+          <a:bodyPr lIns="91440" tIns="45720" rIns="91440" bIns="45720" anchor="t">
+            <a:noAutofit/>
+          </a:bodyPr>
+          <a:lstStyle/>
+          <a:p>
+            <a:pPr marL="216000" indent="-216000">
+              <a:buNone/>
+            </a:pPr>
+            <a:endParaRPr lang="en-DK" sz="1800" b="0" strike="noStrike" spc="-1">
+              <a:solidFill>
+                <a:srgbClr val="000000"/>
+              </a:solidFill>
+              <a:latin typeface="Arial"/>
+            </a:endParaRPr>
+          </a:p>
+        </p:txBody>
+      </p:sp>
+      <p:sp>
+        <p:nvSpPr>
+          <p:cNvPr id="236" name="PlaceHolder 3">
+            <a:extLst>
+              <a:ext uri="{FF2B5EF4-FFF2-40B4-BE49-F238E27FC236}">
+                <a16:creationId xmlns:a16="http://schemas.microsoft.com/office/drawing/2014/main" id="{6EBC04AF-2792-A851-A7AF-BAE347F621F1}"/>
+              </a:ext>
+            </a:extLst>
+          </p:cNvPr>
+          <p:cNvSpPr>
+            <a:spLocks noGrp="1"/>
+          </p:cNvSpPr>
+          <p:nvPr>
+            <p:ph type="sldNum" idx="39"/>
+          </p:nvPr>
+        </p:nvSpPr>
+        <p:spPr>
+          <a:xfrm>
+            <a:off x="3884760" y="8685360"/>
+            <a:ext cx="2971080" cy="457920"/>
+          </a:xfrm>
+          <a:prstGeom prst="rect">
+            <a:avLst/>
+          </a:prstGeom>
+          <a:noFill/>
+          <a:ln w="0">
+            <a:noFill/>
+          </a:ln>
+        </p:spPr>
+        <p:txBody>
+          <a:bodyPr lIns="91440" tIns="45720" rIns="91440" bIns="45720" anchor="b">
+            <a:noAutofit/>
+          </a:bodyPr>
+          <a:lstStyle>
+            <a:lvl1pPr indent="0" algn="r" defTabSz="914400">
+              <a:lnSpc>
+                <a:spcPct val="100000"/>
+              </a:lnSpc>
+              <a:buNone/>
+              <a:tabLst>
+                <a:tab pos="0" algn="l"/>
+              </a:tabLst>
+              <a:defRPr lang="en-US" sz="1200" b="0" strike="noStrike" spc="-1">
+                <a:solidFill>
+                  <a:schemeClr val="dk1"/>
+                </a:solidFill>
+                <a:latin typeface="+mn-lt"/>
+                <a:ea typeface="+mn-ea"/>
+              </a:defRPr>
+            </a:lvl1pPr>
+          </a:lstStyle>
+          <a:p>
+            <a:pPr indent="0" algn="r" defTabSz="914400">
+              <a:lnSpc>
+                <a:spcPct val="100000"/>
+              </a:lnSpc>
+              <a:buNone/>
+              <a:tabLst>
+                <a:tab pos="0" algn="l"/>
+              </a:tabLst>
+            </a:pPr>
+            <a:fld id="{CD8F6B00-EB08-42BD-94A6-317331421A85}" type="slidenum">
+              <a:rPr lang="en-US" sz="1200" b="0" strike="noStrike" spc="-1">
+                <a:solidFill>
+                  <a:schemeClr val="dk1"/>
+                </a:solidFill>
+                <a:latin typeface="+mn-lt"/>
+                <a:ea typeface="+mn-ea"/>
+              </a:rPr>
+              <a:t>5</a:t>
+            </a:fld>
+            <a:endParaRPr lang="en-DK" sz="1200" b="0" strike="noStrike" spc="-1">
+              <a:solidFill>
+                <a:srgbClr val="000000"/>
+              </a:solidFill>
+              <a:latin typeface="Times New Roman"/>
+            </a:endParaRPr>
+          </a:p>
+        </p:txBody>
+      </p:sp>
+    </p:spTree>
+    <p:extLst>
+      <p:ext uri="{BB962C8B-B14F-4D97-AF65-F5344CB8AC3E}">
+        <p14:creationId xmlns:p14="http://schemas.microsoft.com/office/powerpoint/2010/main" val="3149212447"/>
+      </p:ext>
+    </p:extLst>
+  </p:cSld>
+  <p:clrMapOvr>
+    <a:masterClrMapping/>
+  </p:clrMapOvr>
+</p:notes>
+</file>
+
+<file path=ppt/notesSlides/notesSlide5.xml><?xml version="1.0" encoding="utf-8"?>
+<p:notes xmlns:a="http://schemas.openxmlformats.org/drawingml/2006/main" xmlns:r="http://schemas.openxmlformats.org/officeDocument/2006/relationships" xmlns:p="http://schemas.openxmlformats.org/presentationml/2006/main">
+  <p:cSld>
+    <p:spTree>
+      <p:nvGrpSpPr>
+        <p:cNvPr id="1" name="">
+          <a:extLst>
+            <a:ext uri="{FF2B5EF4-FFF2-40B4-BE49-F238E27FC236}">
+              <a16:creationId xmlns:a16="http://schemas.microsoft.com/office/drawing/2014/main" id="{01C89B41-5ACE-E472-1AF6-71C2511448B4}"/>
+            </a:ext>
+          </a:extLst>
+        </p:cNvPr>
+        <p:cNvGrpSpPr/>
+        <p:nvPr/>
+      </p:nvGrpSpPr>
+      <p:grpSpPr>
+        <a:xfrm>
+          <a:off x="0" y="0"/>
+          <a:ext cx="0" cy="0"/>
+          <a:chOff x="0" y="0"/>
+          <a:chExt cx="0" cy="0"/>
+        </a:xfrm>
+      </p:grpSpPr>
+      <p:sp>
+        <p:nvSpPr>
+          <p:cNvPr id="234" name="PlaceHolder 1">
+            <a:extLst>
+              <a:ext uri="{FF2B5EF4-FFF2-40B4-BE49-F238E27FC236}">
+                <a16:creationId xmlns:a16="http://schemas.microsoft.com/office/drawing/2014/main" id="{92F71FE6-2EF3-5901-41A3-A93F0BBB5094}"/>
+              </a:ext>
+            </a:extLst>
+          </p:cNvPr>
+          <p:cNvSpPr>
+            <a:spLocks noGrp="1" noRot="1" noChangeAspect="1"/>
+          </p:cNvSpPr>
+          <p:nvPr>
+            <p:ph type="sldImg"/>
+          </p:nvPr>
+        </p:nvSpPr>
+        <p:spPr>
+          <a:xfrm>
+            <a:off x="685800" y="1143000"/>
+            <a:ext cx="5486400" cy="3086100"/>
+          </a:xfrm>
+          <a:prstGeom prst="rect">
+            <a:avLst/>
+          </a:prstGeom>
+          <a:ln w="0">
+            <a:noFill/>
+          </a:ln>
+        </p:spPr>
+      </p:sp>
+      <p:sp>
+        <p:nvSpPr>
+          <p:cNvPr id="235" name="PlaceHolder 2">
+            <a:extLst>
+              <a:ext uri="{FF2B5EF4-FFF2-40B4-BE49-F238E27FC236}">
+                <a16:creationId xmlns:a16="http://schemas.microsoft.com/office/drawing/2014/main" id="{E8A15C83-70FE-E0FE-86B0-4E20BE942FC4}"/>
+              </a:ext>
+            </a:extLst>
+          </p:cNvPr>
+          <p:cNvSpPr>
+            <a:spLocks noGrp="1"/>
+          </p:cNvSpPr>
+          <p:nvPr>
+            <p:ph type="body"/>
+          </p:nvPr>
+        </p:nvSpPr>
+        <p:spPr>
+          <a:xfrm>
+            <a:off x="685800" y="4400640"/>
+            <a:ext cx="5485680" cy="3599640"/>
+          </a:xfrm>
+          <a:prstGeom prst="rect">
+            <a:avLst/>
+          </a:prstGeom>
+          <a:noFill/>
+          <a:ln w="0">
+            <a:noFill/>
+          </a:ln>
+        </p:spPr>
+        <p:txBody>
+          <a:bodyPr lIns="91440" tIns="45720" rIns="91440" bIns="45720" anchor="t">
+            <a:noAutofit/>
+          </a:bodyPr>
+          <a:lstStyle/>
+          <a:p>
+            <a:pPr marL="216000" indent="-216000">
+              <a:buNone/>
+            </a:pPr>
+            <a:endParaRPr lang="en-DK" sz="1800" b="0" strike="noStrike" spc="-1">
+              <a:solidFill>
+                <a:srgbClr val="000000"/>
+              </a:solidFill>
+              <a:latin typeface="Arial"/>
+            </a:endParaRPr>
+          </a:p>
+        </p:txBody>
+      </p:sp>
+      <p:sp>
+        <p:nvSpPr>
+          <p:cNvPr id="236" name="PlaceHolder 3">
+            <a:extLst>
+              <a:ext uri="{FF2B5EF4-FFF2-40B4-BE49-F238E27FC236}">
+                <a16:creationId xmlns:a16="http://schemas.microsoft.com/office/drawing/2014/main" id="{505445FD-9AA0-B92A-DDE9-27C253E326C5}"/>
+              </a:ext>
+            </a:extLst>
+          </p:cNvPr>
+          <p:cNvSpPr>
+            <a:spLocks noGrp="1"/>
+          </p:cNvSpPr>
+          <p:nvPr>
+            <p:ph type="sldNum" idx="39"/>
+          </p:nvPr>
+        </p:nvSpPr>
+        <p:spPr>
+          <a:xfrm>
+            <a:off x="3884760" y="8685360"/>
+            <a:ext cx="2971080" cy="457920"/>
+          </a:xfrm>
+          <a:prstGeom prst="rect">
+            <a:avLst/>
+          </a:prstGeom>
+          <a:noFill/>
+          <a:ln w="0">
+            <a:noFill/>
+          </a:ln>
+        </p:spPr>
+        <p:txBody>
+          <a:bodyPr lIns="91440" tIns="45720" rIns="91440" bIns="45720" anchor="b">
+            <a:noAutofit/>
+          </a:bodyPr>
+          <a:lstStyle>
+            <a:lvl1pPr indent="0" algn="r" defTabSz="914400">
+              <a:lnSpc>
+                <a:spcPct val="100000"/>
+              </a:lnSpc>
+              <a:buNone/>
+              <a:tabLst>
+                <a:tab pos="0" algn="l"/>
+              </a:tabLst>
+              <a:defRPr lang="en-US" sz="1200" b="0" strike="noStrike" spc="-1">
+                <a:solidFill>
+                  <a:schemeClr val="dk1"/>
+                </a:solidFill>
+                <a:latin typeface="+mn-lt"/>
+                <a:ea typeface="+mn-ea"/>
+              </a:defRPr>
+            </a:lvl1pPr>
+          </a:lstStyle>
+          <a:p>
+            <a:pPr indent="0" algn="r" defTabSz="914400">
+              <a:lnSpc>
+                <a:spcPct val="100000"/>
+              </a:lnSpc>
+              <a:buNone/>
+              <a:tabLst>
+                <a:tab pos="0" algn="l"/>
+              </a:tabLst>
+            </a:pPr>
+            <a:fld id="{CD8F6B00-EB08-42BD-94A6-317331421A85}" type="slidenum">
+              <a:rPr lang="en-US" sz="1200" b="0" strike="noStrike" spc="-1">
+                <a:solidFill>
+                  <a:schemeClr val="dk1"/>
+                </a:solidFill>
+                <a:latin typeface="+mn-lt"/>
+                <a:ea typeface="+mn-ea"/>
+              </a:rPr>
+              <a:t>6</a:t>
+            </a:fld>
+            <a:endParaRPr lang="en-DK" sz="1200" b="0" strike="noStrike" spc="-1">
+              <a:solidFill>
+                <a:srgbClr val="000000"/>
+              </a:solidFill>
+              <a:latin typeface="Times New Roman"/>
+            </a:endParaRPr>
+          </a:p>
+        </p:txBody>
+      </p:sp>
+    </p:spTree>
+    <p:extLst>
+      <p:ext uri="{BB962C8B-B14F-4D97-AF65-F5344CB8AC3E}">
+        <p14:creationId xmlns:p14="http://schemas.microsoft.com/office/powerpoint/2010/main" val="282093612"/>
+      </p:ext>
+    </p:extLst>
+  </p:cSld>
+  <p:clrMapOvr>
+    <a:masterClrMapping/>
+  </p:clrMapOvr>
+</p:notes>
+</file>
+
+<file path=ppt/notesSlides/notesSlide6.xml><?xml version="1.0" encoding="utf-8"?>
+<p:notes xmlns:a="http://schemas.openxmlformats.org/drawingml/2006/main" xmlns:r="http://schemas.openxmlformats.org/officeDocument/2006/relationships" xmlns:p="http://schemas.openxmlformats.org/presentationml/2006/main">
+  <p:cSld>
+    <p:spTree>
+      <p:nvGrpSpPr>
+        <p:cNvPr id="1" name="">
+          <a:extLst>
+            <a:ext uri="{FF2B5EF4-FFF2-40B4-BE49-F238E27FC236}">
+              <a16:creationId xmlns:a16="http://schemas.microsoft.com/office/drawing/2014/main" id="{16B962BC-3F36-12E8-A187-95E6C3DEB680}"/>
+            </a:ext>
+          </a:extLst>
+        </p:cNvPr>
+        <p:cNvGrpSpPr/>
+        <p:nvPr/>
+      </p:nvGrpSpPr>
+      <p:grpSpPr>
+        <a:xfrm>
+          <a:off x="0" y="0"/>
+          <a:ext cx="0" cy="0"/>
+          <a:chOff x="0" y="0"/>
+          <a:chExt cx="0" cy="0"/>
+        </a:xfrm>
+      </p:grpSpPr>
+      <p:sp>
+        <p:nvSpPr>
+          <p:cNvPr id="234" name="PlaceHolder 1">
+            <a:extLst>
+              <a:ext uri="{FF2B5EF4-FFF2-40B4-BE49-F238E27FC236}">
+                <a16:creationId xmlns:a16="http://schemas.microsoft.com/office/drawing/2014/main" id="{1201095A-82A3-CE07-E8C1-1C811D750339}"/>
+              </a:ext>
+            </a:extLst>
+          </p:cNvPr>
+          <p:cNvSpPr>
+            <a:spLocks noGrp="1" noRot="1" noChangeAspect="1"/>
+          </p:cNvSpPr>
+          <p:nvPr>
+            <p:ph type="sldImg"/>
+          </p:nvPr>
+        </p:nvSpPr>
+        <p:spPr>
+          <a:xfrm>
+            <a:off x="685800" y="1143000"/>
+            <a:ext cx="5486400" cy="3086100"/>
+          </a:xfrm>
+          <a:prstGeom prst="rect">
+            <a:avLst/>
+          </a:prstGeom>
+          <a:ln w="0">
+            <a:noFill/>
+          </a:ln>
+        </p:spPr>
+      </p:sp>
+      <p:sp>
+        <p:nvSpPr>
+          <p:cNvPr id="235" name="PlaceHolder 2">
+            <a:extLst>
+              <a:ext uri="{FF2B5EF4-FFF2-40B4-BE49-F238E27FC236}">
+                <a16:creationId xmlns:a16="http://schemas.microsoft.com/office/drawing/2014/main" id="{47C665B8-47F9-32E6-FD34-40505B74EC4E}"/>
+              </a:ext>
+            </a:extLst>
+          </p:cNvPr>
+          <p:cNvSpPr>
+            <a:spLocks noGrp="1"/>
+          </p:cNvSpPr>
+          <p:nvPr>
+            <p:ph type="body"/>
+          </p:nvPr>
+        </p:nvSpPr>
+        <p:spPr>
+          <a:xfrm>
+            <a:off x="685800" y="4400640"/>
+            <a:ext cx="5485680" cy="3599640"/>
+          </a:xfrm>
+          <a:prstGeom prst="rect">
+            <a:avLst/>
+          </a:prstGeom>
+          <a:noFill/>
+          <a:ln w="0">
+            <a:noFill/>
+          </a:ln>
+        </p:spPr>
+        <p:txBody>
+          <a:bodyPr lIns="91440" tIns="45720" rIns="91440" bIns="45720" anchor="t">
+            <a:noAutofit/>
+          </a:bodyPr>
+          <a:lstStyle/>
+          <a:p>
+            <a:pPr marL="216000" indent="-216000">
+              <a:buNone/>
+            </a:pPr>
+            <a:endParaRPr lang="en-DK" sz="1800" b="0" strike="noStrike" spc="-1" dirty="0">
+              <a:solidFill>
+                <a:srgbClr val="000000"/>
+              </a:solidFill>
+              <a:latin typeface="Arial"/>
+            </a:endParaRPr>
+          </a:p>
+        </p:txBody>
+      </p:sp>
+      <p:sp>
+        <p:nvSpPr>
+          <p:cNvPr id="236" name="PlaceHolder 3">
+            <a:extLst>
+              <a:ext uri="{FF2B5EF4-FFF2-40B4-BE49-F238E27FC236}">
+                <a16:creationId xmlns:a16="http://schemas.microsoft.com/office/drawing/2014/main" id="{E90CD7A6-0337-C7E8-86E1-DC304F72278C}"/>
+              </a:ext>
+            </a:extLst>
+          </p:cNvPr>
+          <p:cNvSpPr>
+            <a:spLocks noGrp="1"/>
+          </p:cNvSpPr>
+          <p:nvPr>
+            <p:ph type="sldNum" idx="39"/>
+          </p:nvPr>
+        </p:nvSpPr>
+        <p:spPr>
+          <a:xfrm>
+            <a:off x="3884760" y="8685360"/>
+            <a:ext cx="2971080" cy="457920"/>
+          </a:xfrm>
+          <a:prstGeom prst="rect">
+            <a:avLst/>
+          </a:prstGeom>
+          <a:noFill/>
+          <a:ln w="0">
+            <a:noFill/>
+          </a:ln>
+        </p:spPr>
+        <p:txBody>
+          <a:bodyPr lIns="91440" tIns="45720" rIns="91440" bIns="45720" anchor="b">
+            <a:noAutofit/>
+          </a:bodyPr>
+          <a:lstStyle>
+            <a:lvl1pPr indent="0" algn="r" defTabSz="914400">
+              <a:lnSpc>
+                <a:spcPct val="100000"/>
+              </a:lnSpc>
+              <a:buNone/>
+              <a:tabLst>
+                <a:tab pos="0" algn="l"/>
+              </a:tabLst>
+              <a:defRPr lang="en-US" sz="1200" b="0" strike="noStrike" spc="-1">
+                <a:solidFill>
+                  <a:schemeClr val="dk1"/>
+                </a:solidFill>
+                <a:latin typeface="+mn-lt"/>
+                <a:ea typeface="+mn-ea"/>
+              </a:defRPr>
+            </a:lvl1pPr>
+          </a:lstStyle>
+          <a:p>
+            <a:pPr indent="0" algn="r" defTabSz="914400">
+              <a:lnSpc>
+                <a:spcPct val="100000"/>
+              </a:lnSpc>
+              <a:buNone/>
+              <a:tabLst>
+                <a:tab pos="0" algn="l"/>
+              </a:tabLst>
+            </a:pPr>
+            <a:fld id="{CD8F6B00-EB08-42BD-94A6-317331421A85}" type="slidenum">
+              <a:rPr lang="en-US" sz="1200" b="0" strike="noStrike" spc="-1">
+                <a:solidFill>
+                  <a:schemeClr val="dk1"/>
+                </a:solidFill>
+                <a:latin typeface="+mn-lt"/>
+                <a:ea typeface="+mn-ea"/>
+              </a:rPr>
+              <a:t>7</a:t>
+            </a:fld>
+            <a:endParaRPr lang="en-DK" sz="1200" b="0" strike="noStrike" spc="-1">
+              <a:solidFill>
+                <a:srgbClr val="000000"/>
+              </a:solidFill>
+              <a:latin typeface="Times New Roman"/>
+            </a:endParaRPr>
+          </a:p>
+        </p:txBody>
+      </p:sp>
+    </p:spTree>
+    <p:extLst>
+      <p:ext uri="{BB962C8B-B14F-4D97-AF65-F5344CB8AC3E}">
+        <p14:creationId xmlns:p14="http://schemas.microsoft.com/office/powerpoint/2010/main" val="703437299"/>
+      </p:ext>
+    </p:extLst>
   </p:cSld>
   <p:clrMapOvr>
     <a:masterClrMapping/>
@@ -10717,6 +11472,1185 @@
 </p:sld>
 </file>
 
+<file path=ppt/slides/slide10.xml><?xml version="1.0" encoding="utf-8"?>
+<p:sld xmlns:a="http://schemas.openxmlformats.org/drawingml/2006/main" xmlns:r="http://schemas.openxmlformats.org/officeDocument/2006/relationships" xmlns:p="http://schemas.openxmlformats.org/presentationml/2006/main">
+  <p:cSld>
+    <p:spTree>
+      <p:nvGrpSpPr>
+        <p:cNvPr id="1" name=""/>
+        <p:cNvGrpSpPr/>
+        <p:nvPr/>
+      </p:nvGrpSpPr>
+      <p:grpSpPr>
+        <a:xfrm>
+          <a:off x="0" y="0"/>
+          <a:ext cx="0" cy="0"/>
+          <a:chOff x="0" y="0"/>
+          <a:chExt cx="0" cy="0"/>
+        </a:xfrm>
+      </p:grpSpPr>
+      <p:sp>
+        <p:nvSpPr>
+          <p:cNvPr id="6" name="Rectangle 5">
+            <a:extLst>
+              <a:ext uri="{FF2B5EF4-FFF2-40B4-BE49-F238E27FC236}">
+                <a16:creationId xmlns:a16="http://schemas.microsoft.com/office/drawing/2014/main" id="{E2A25133-ABE4-C908-2ECA-91ABD619D7C5}"/>
+              </a:ext>
+            </a:extLst>
+          </p:cNvPr>
+          <p:cNvSpPr>
+            <a:spLocks/>
+          </p:cNvSpPr>
+          <p:nvPr/>
+        </p:nvSpPr>
+        <p:spPr>
+          <a:xfrm>
+            <a:off x="3705280" y="2078999"/>
+            <a:ext cx="1800000" cy="1800000"/>
+          </a:xfrm>
+          <a:prstGeom prst="rect">
+            <a:avLst/>
+          </a:prstGeom>
+          <a:noFill/>
+          <a:ln w="28575">
+            <a:solidFill>
+              <a:schemeClr val="tx1"/>
+            </a:solidFill>
+          </a:ln>
+        </p:spPr>
+        <p:style>
+          <a:lnRef idx="2">
+            <a:schemeClr val="accent1">
+              <a:shade val="15000"/>
+            </a:schemeClr>
+          </a:lnRef>
+          <a:fillRef idx="1">
+            <a:schemeClr val="accent1"/>
+          </a:fillRef>
+          <a:effectRef idx="0">
+            <a:schemeClr val="accent1"/>
+          </a:effectRef>
+          <a:fontRef idx="minor">
+            <a:schemeClr val="lt1"/>
+          </a:fontRef>
+        </p:style>
+        <p:txBody>
+          <a:bodyPr rtlCol="0" anchor="ctr"/>
+          <a:lstStyle/>
+          <a:p>
+            <a:pPr algn="ctr"/>
+            <a:endParaRPr lang="nl-NL"/>
+          </a:p>
+        </p:txBody>
+      </p:sp>
+      <p:sp>
+        <p:nvSpPr>
+          <p:cNvPr id="7" name="Rectangle 6">
+            <a:extLst>
+              <a:ext uri="{FF2B5EF4-FFF2-40B4-BE49-F238E27FC236}">
+                <a16:creationId xmlns:a16="http://schemas.microsoft.com/office/drawing/2014/main" id="{372B6164-DD46-304B-00FE-C7281D1B6172}"/>
+              </a:ext>
+            </a:extLst>
+          </p:cNvPr>
+          <p:cNvSpPr>
+            <a:spLocks/>
+          </p:cNvSpPr>
+          <p:nvPr/>
+        </p:nvSpPr>
+        <p:spPr>
+          <a:xfrm>
+            <a:off x="3695868" y="4075082"/>
+            <a:ext cx="1800000" cy="1800000"/>
+          </a:xfrm>
+          <a:prstGeom prst="rect">
+            <a:avLst/>
+          </a:prstGeom>
+          <a:noFill/>
+          <a:ln w="28575">
+            <a:solidFill>
+              <a:schemeClr val="tx1"/>
+            </a:solidFill>
+          </a:ln>
+        </p:spPr>
+        <p:style>
+          <a:lnRef idx="2">
+            <a:schemeClr val="accent1">
+              <a:shade val="15000"/>
+            </a:schemeClr>
+          </a:lnRef>
+          <a:fillRef idx="1">
+            <a:schemeClr val="accent1"/>
+          </a:fillRef>
+          <a:effectRef idx="0">
+            <a:schemeClr val="accent1"/>
+          </a:effectRef>
+          <a:fontRef idx="minor">
+            <a:schemeClr val="lt1"/>
+          </a:fontRef>
+        </p:style>
+        <p:txBody>
+          <a:bodyPr rtlCol="0" anchor="ctr"/>
+          <a:lstStyle/>
+          <a:p>
+            <a:pPr algn="ctr"/>
+            <a:endParaRPr lang="nl-NL"/>
+          </a:p>
+        </p:txBody>
+      </p:sp>
+      <p:grpSp>
+        <p:nvGrpSpPr>
+          <p:cNvPr id="54" name="Group 53">
+            <a:extLst>
+              <a:ext uri="{FF2B5EF4-FFF2-40B4-BE49-F238E27FC236}">
+                <a16:creationId xmlns:a16="http://schemas.microsoft.com/office/drawing/2014/main" id="{4FFF02C0-7020-0A96-DCE9-E456D13B0192}"/>
+              </a:ext>
+            </a:extLst>
+          </p:cNvPr>
+          <p:cNvGrpSpPr/>
+          <p:nvPr/>
+        </p:nvGrpSpPr>
+        <p:grpSpPr>
+          <a:xfrm>
+            <a:off x="3695868" y="82916"/>
+            <a:ext cx="1800000" cy="1800000"/>
+            <a:chOff x="3905701" y="82916"/>
+            <a:chExt cx="1800000" cy="1800000"/>
+          </a:xfrm>
+        </p:grpSpPr>
+        <p:grpSp>
+          <p:nvGrpSpPr>
+            <p:cNvPr id="26" name="Group 25">
+              <a:extLst>
+                <a:ext uri="{FF2B5EF4-FFF2-40B4-BE49-F238E27FC236}">
+                  <a16:creationId xmlns:a16="http://schemas.microsoft.com/office/drawing/2014/main" id="{76C3F060-89A8-6030-878A-052C03652E62}"/>
+                </a:ext>
+              </a:extLst>
+            </p:cNvPr>
+            <p:cNvGrpSpPr/>
+            <p:nvPr/>
+          </p:nvGrpSpPr>
+          <p:grpSpPr>
+            <a:xfrm>
+              <a:off x="3905701" y="82916"/>
+              <a:ext cx="1800000" cy="1800000"/>
+              <a:chOff x="2189017" y="1062181"/>
+              <a:chExt cx="1800000" cy="1800000"/>
+            </a:xfrm>
+          </p:grpSpPr>
+          <p:sp>
+            <p:nvSpPr>
+              <p:cNvPr id="5" name="Rectangle 4">
+                <a:extLst>
+                  <a:ext uri="{FF2B5EF4-FFF2-40B4-BE49-F238E27FC236}">
+                    <a16:creationId xmlns:a16="http://schemas.microsoft.com/office/drawing/2014/main" id="{1C347A5F-9BD6-8F0C-D4EB-B3F4248E75C5}"/>
+                  </a:ext>
+                </a:extLst>
+              </p:cNvPr>
+              <p:cNvSpPr>
+                <a:spLocks/>
+              </p:cNvSpPr>
+              <p:nvPr/>
+            </p:nvSpPr>
+            <p:spPr>
+              <a:xfrm>
+                <a:off x="2189017" y="1062181"/>
+                <a:ext cx="1800000" cy="1800000"/>
+              </a:xfrm>
+              <a:prstGeom prst="rect">
+                <a:avLst/>
+              </a:prstGeom>
+              <a:noFill/>
+              <a:ln w="28575">
+                <a:solidFill>
+                  <a:schemeClr val="tx1"/>
+                </a:solidFill>
+              </a:ln>
+            </p:spPr>
+            <p:style>
+              <a:lnRef idx="2">
+                <a:schemeClr val="accent1">
+                  <a:shade val="15000"/>
+                </a:schemeClr>
+              </a:lnRef>
+              <a:fillRef idx="1">
+                <a:schemeClr val="accent1"/>
+              </a:fillRef>
+              <a:effectRef idx="0">
+                <a:schemeClr val="accent1"/>
+              </a:effectRef>
+              <a:fontRef idx="minor">
+                <a:schemeClr val="lt1"/>
+              </a:fontRef>
+            </p:style>
+            <p:txBody>
+              <a:bodyPr rtlCol="0" anchor="ctr"/>
+              <a:lstStyle/>
+              <a:p>
+                <a:pPr algn="ctr"/>
+                <a:endParaRPr lang="nl-NL"/>
+              </a:p>
+            </p:txBody>
+          </p:sp>
+          <p:cxnSp>
+            <p:nvCxnSpPr>
+              <p:cNvPr id="12" name="Straight Connector 11">
+                <a:extLst>
+                  <a:ext uri="{FF2B5EF4-FFF2-40B4-BE49-F238E27FC236}">
+                    <a16:creationId xmlns:a16="http://schemas.microsoft.com/office/drawing/2014/main" id="{E1490284-5C98-E9BD-452F-2FBF97E04600}"/>
+                  </a:ext>
+                </a:extLst>
+              </p:cNvPr>
+              <p:cNvCxnSpPr>
+                <a:cxnSpLocks/>
+                <a:stCxn id="5" idx="1"/>
+                <a:endCxn id="5" idx="3"/>
+              </p:cNvCxnSpPr>
+              <p:nvPr/>
+            </p:nvCxnSpPr>
+            <p:spPr>
+              <a:xfrm>
+                <a:off x="2189017" y="1962181"/>
+                <a:ext cx="1800000" cy="0"/>
+              </a:xfrm>
+              <a:prstGeom prst="line">
+                <a:avLst/>
+              </a:prstGeom>
+              <a:ln>
+                <a:solidFill>
+                  <a:schemeClr val="tx1"/>
+                </a:solidFill>
+              </a:ln>
+            </p:spPr>
+            <p:style>
+              <a:lnRef idx="1">
+                <a:schemeClr val="accent1"/>
+              </a:lnRef>
+              <a:fillRef idx="0">
+                <a:schemeClr val="accent1"/>
+              </a:fillRef>
+              <a:effectRef idx="0">
+                <a:schemeClr val="accent1"/>
+              </a:effectRef>
+              <a:fontRef idx="minor">
+                <a:schemeClr val="tx1"/>
+              </a:fontRef>
+            </p:style>
+          </p:cxnSp>
+        </p:grpSp>
+        <p:cxnSp>
+          <p:nvCxnSpPr>
+            <p:cNvPr id="35" name="Straight Connector 34">
+              <a:extLst>
+                <a:ext uri="{FF2B5EF4-FFF2-40B4-BE49-F238E27FC236}">
+                  <a16:creationId xmlns:a16="http://schemas.microsoft.com/office/drawing/2014/main" id="{A6B33D01-02B2-382B-C7E8-17C0523ECF7D}"/>
+                </a:ext>
+              </a:extLst>
+            </p:cNvPr>
+            <p:cNvCxnSpPr>
+              <a:cxnSpLocks/>
+              <a:stCxn id="5" idx="0"/>
+              <a:endCxn id="5" idx="2"/>
+            </p:cNvCxnSpPr>
+            <p:nvPr/>
+          </p:nvCxnSpPr>
+          <p:spPr>
+            <a:xfrm>
+              <a:off x="4805701" y="82916"/>
+              <a:ext cx="0" cy="1800000"/>
+            </a:xfrm>
+            <a:prstGeom prst="line">
+              <a:avLst/>
+            </a:prstGeom>
+            <a:ln>
+              <a:solidFill>
+                <a:schemeClr val="tx1"/>
+              </a:solidFill>
+            </a:ln>
+          </p:spPr>
+          <p:style>
+            <a:lnRef idx="1">
+              <a:schemeClr val="accent1"/>
+            </a:lnRef>
+            <a:fillRef idx="0">
+              <a:schemeClr val="accent1"/>
+            </a:fillRef>
+            <a:effectRef idx="0">
+              <a:schemeClr val="accent1"/>
+            </a:effectRef>
+            <a:fontRef idx="minor">
+              <a:schemeClr val="tx1"/>
+            </a:fontRef>
+          </p:style>
+        </p:cxnSp>
+      </p:grpSp>
+      <p:sp>
+        <p:nvSpPr>
+          <p:cNvPr id="45" name="TextBox 44">
+            <a:extLst>
+              <a:ext uri="{FF2B5EF4-FFF2-40B4-BE49-F238E27FC236}">
+                <a16:creationId xmlns:a16="http://schemas.microsoft.com/office/drawing/2014/main" id="{61A262C5-44B6-B1C9-4D1D-3A7808E92E7C}"/>
+              </a:ext>
+            </a:extLst>
+          </p:cNvPr>
+          <p:cNvSpPr txBox="1"/>
+          <p:nvPr/>
+        </p:nvSpPr>
+        <p:spPr>
+          <a:xfrm>
+            <a:off x="2667054" y="475084"/>
+            <a:ext cx="1038226" cy="1015663"/>
+          </a:xfrm>
+          <a:prstGeom prst="rect">
+            <a:avLst/>
+          </a:prstGeom>
+          <a:noFill/>
+        </p:spPr>
+        <p:txBody>
+          <a:bodyPr wrap="square" rtlCol="0" anchor="ctr">
+            <a:spAutoFit/>
+          </a:bodyPr>
+          <a:lstStyle/>
+          <a:p>
+            <a:pPr algn="ctr"/>
+            <a:r>
+              <a:rPr lang="nl-NL" sz="6000" dirty="0">
+                <a:latin typeface="Times New Roman" panose="02020603050405020304" pitchFamily="18" charset="0"/>
+                <a:cs typeface="Times New Roman" panose="02020603050405020304" pitchFamily="18" charset="0"/>
+              </a:rPr>
+              <a:t>Y</a:t>
+            </a:r>
+            <a:r>
+              <a:rPr lang="nl-NL" sz="6000" baseline="-25000" dirty="0">
+                <a:latin typeface="Times New Roman" panose="02020603050405020304" pitchFamily="18" charset="0"/>
+                <a:cs typeface="Times New Roman" panose="02020603050405020304" pitchFamily="18" charset="0"/>
+              </a:rPr>
+              <a:t>1</a:t>
+            </a:r>
+            <a:endParaRPr lang="nl-NL" sz="6000" dirty="0">
+              <a:latin typeface="Times New Roman" panose="02020603050405020304" pitchFamily="18" charset="0"/>
+              <a:cs typeface="Times New Roman" panose="02020603050405020304" pitchFamily="18" charset="0"/>
+            </a:endParaRPr>
+          </a:p>
+        </p:txBody>
+      </p:sp>
+      <p:sp>
+        <p:nvSpPr>
+          <p:cNvPr id="46" name="TextBox 45">
+            <a:extLst>
+              <a:ext uri="{FF2B5EF4-FFF2-40B4-BE49-F238E27FC236}">
+                <a16:creationId xmlns:a16="http://schemas.microsoft.com/office/drawing/2014/main" id="{5A623ECD-677B-B160-DBBA-AAC17539D71C}"/>
+              </a:ext>
+            </a:extLst>
+          </p:cNvPr>
+          <p:cNvSpPr txBox="1"/>
+          <p:nvPr/>
+        </p:nvSpPr>
+        <p:spPr>
+          <a:xfrm>
+            <a:off x="2667054" y="2471167"/>
+            <a:ext cx="1038226" cy="1015663"/>
+          </a:xfrm>
+          <a:prstGeom prst="rect">
+            <a:avLst/>
+          </a:prstGeom>
+          <a:noFill/>
+        </p:spPr>
+        <p:txBody>
+          <a:bodyPr wrap="square" rtlCol="0" anchor="ctr">
+            <a:spAutoFit/>
+          </a:bodyPr>
+          <a:lstStyle/>
+          <a:p>
+            <a:pPr algn="ctr"/>
+            <a:r>
+              <a:rPr lang="nl-NL" sz="6000" dirty="0">
+                <a:latin typeface="Times New Roman" panose="02020603050405020304" pitchFamily="18" charset="0"/>
+                <a:cs typeface="Times New Roman" panose="02020603050405020304" pitchFamily="18" charset="0"/>
+              </a:rPr>
+              <a:t>Y</a:t>
+            </a:r>
+            <a:r>
+              <a:rPr lang="nl-NL" sz="6000" baseline="-25000" dirty="0">
+                <a:latin typeface="Times New Roman" panose="02020603050405020304" pitchFamily="18" charset="0"/>
+                <a:cs typeface="Times New Roman" panose="02020603050405020304" pitchFamily="18" charset="0"/>
+              </a:rPr>
+              <a:t>2</a:t>
+            </a:r>
+            <a:endParaRPr lang="nl-NL" sz="6000" dirty="0">
+              <a:latin typeface="Times New Roman" panose="02020603050405020304" pitchFamily="18" charset="0"/>
+              <a:cs typeface="Times New Roman" panose="02020603050405020304" pitchFamily="18" charset="0"/>
+            </a:endParaRPr>
+          </a:p>
+        </p:txBody>
+      </p:sp>
+      <p:sp>
+        <p:nvSpPr>
+          <p:cNvPr id="47" name="TextBox 46">
+            <a:extLst>
+              <a:ext uri="{FF2B5EF4-FFF2-40B4-BE49-F238E27FC236}">
+                <a16:creationId xmlns:a16="http://schemas.microsoft.com/office/drawing/2014/main" id="{83DB0C3F-A6D4-0878-BBB3-9D97D3DDC514}"/>
+              </a:ext>
+            </a:extLst>
+          </p:cNvPr>
+          <p:cNvSpPr txBox="1"/>
+          <p:nvPr/>
+        </p:nvSpPr>
+        <p:spPr>
+          <a:xfrm>
+            <a:off x="2667054" y="4467249"/>
+            <a:ext cx="1038226" cy="1015663"/>
+          </a:xfrm>
+          <a:prstGeom prst="rect">
+            <a:avLst/>
+          </a:prstGeom>
+          <a:noFill/>
+        </p:spPr>
+        <p:txBody>
+          <a:bodyPr wrap="square" rtlCol="0" anchor="ctr">
+            <a:spAutoFit/>
+          </a:bodyPr>
+          <a:lstStyle/>
+          <a:p>
+            <a:pPr algn="ctr"/>
+            <a:r>
+              <a:rPr lang="nl-NL" sz="6000" dirty="0">
+                <a:latin typeface="Times New Roman" panose="02020603050405020304" pitchFamily="18" charset="0"/>
+                <a:cs typeface="Times New Roman" panose="02020603050405020304" pitchFamily="18" charset="0"/>
+              </a:rPr>
+              <a:t>Y</a:t>
+            </a:r>
+            <a:r>
+              <a:rPr lang="nl-NL" sz="6000" baseline="-25000" dirty="0">
+                <a:latin typeface="Times New Roman" panose="02020603050405020304" pitchFamily="18" charset="0"/>
+                <a:cs typeface="Times New Roman" panose="02020603050405020304" pitchFamily="18" charset="0"/>
+              </a:rPr>
+              <a:t>3</a:t>
+            </a:r>
+            <a:endParaRPr lang="nl-NL" sz="6000" dirty="0">
+              <a:latin typeface="Times New Roman" panose="02020603050405020304" pitchFamily="18" charset="0"/>
+              <a:cs typeface="Times New Roman" panose="02020603050405020304" pitchFamily="18" charset="0"/>
+            </a:endParaRPr>
+          </a:p>
+        </p:txBody>
+      </p:sp>
+      <p:sp>
+        <p:nvSpPr>
+          <p:cNvPr id="48" name="TextBox 47">
+            <a:extLst>
+              <a:ext uri="{FF2B5EF4-FFF2-40B4-BE49-F238E27FC236}">
+                <a16:creationId xmlns:a16="http://schemas.microsoft.com/office/drawing/2014/main" id="{13D10202-FE85-3AC5-FF54-86D03BEBA246}"/>
+              </a:ext>
+            </a:extLst>
+          </p:cNvPr>
+          <p:cNvSpPr txBox="1"/>
+          <p:nvPr/>
+        </p:nvSpPr>
+        <p:spPr>
+          <a:xfrm>
+            <a:off x="4086167" y="5759421"/>
+            <a:ext cx="1038226" cy="1015663"/>
+          </a:xfrm>
+          <a:prstGeom prst="rect">
+            <a:avLst/>
+          </a:prstGeom>
+          <a:noFill/>
+        </p:spPr>
+        <p:txBody>
+          <a:bodyPr wrap="square" rtlCol="0" anchor="ctr">
+            <a:spAutoFit/>
+          </a:bodyPr>
+          <a:lstStyle/>
+          <a:p>
+            <a:pPr algn="ctr"/>
+            <a:r>
+              <a:rPr lang="nl-NL" sz="6000" dirty="0">
+                <a:latin typeface="Times New Roman" panose="02020603050405020304" pitchFamily="18" charset="0"/>
+                <a:cs typeface="Times New Roman" panose="02020603050405020304" pitchFamily="18" charset="0"/>
+              </a:rPr>
+              <a:t>Y</a:t>
+            </a:r>
+            <a:r>
+              <a:rPr lang="nl-NL" sz="6000" baseline="-25000" dirty="0">
+                <a:latin typeface="Times New Roman" panose="02020603050405020304" pitchFamily="18" charset="0"/>
+                <a:cs typeface="Times New Roman" panose="02020603050405020304" pitchFamily="18" charset="0"/>
+              </a:rPr>
+              <a:t>1</a:t>
+            </a:r>
+            <a:endParaRPr lang="nl-NL" sz="6000" dirty="0">
+              <a:latin typeface="Times New Roman" panose="02020603050405020304" pitchFamily="18" charset="0"/>
+              <a:cs typeface="Times New Roman" panose="02020603050405020304" pitchFamily="18" charset="0"/>
+            </a:endParaRPr>
+          </a:p>
+        </p:txBody>
+      </p:sp>
+      <p:sp>
+        <p:nvSpPr>
+          <p:cNvPr id="49" name="TextBox 48">
+            <a:extLst>
+              <a:ext uri="{FF2B5EF4-FFF2-40B4-BE49-F238E27FC236}">
+                <a16:creationId xmlns:a16="http://schemas.microsoft.com/office/drawing/2014/main" id="{9FBC69CB-9187-AB92-F5FF-08FB6E4C386C}"/>
+              </a:ext>
+            </a:extLst>
+          </p:cNvPr>
+          <p:cNvSpPr txBox="1"/>
+          <p:nvPr/>
+        </p:nvSpPr>
+        <p:spPr>
+          <a:xfrm>
+            <a:off x="6091294" y="5759420"/>
+            <a:ext cx="1038226" cy="1015663"/>
+          </a:xfrm>
+          <a:prstGeom prst="rect">
+            <a:avLst/>
+          </a:prstGeom>
+          <a:noFill/>
+        </p:spPr>
+        <p:txBody>
+          <a:bodyPr wrap="square" rtlCol="0" anchor="ctr">
+            <a:spAutoFit/>
+          </a:bodyPr>
+          <a:lstStyle/>
+          <a:p>
+            <a:pPr algn="ctr"/>
+            <a:r>
+              <a:rPr lang="nl-NL" sz="6000" dirty="0">
+                <a:latin typeface="Times New Roman" panose="02020603050405020304" pitchFamily="18" charset="0"/>
+                <a:cs typeface="Times New Roman" panose="02020603050405020304" pitchFamily="18" charset="0"/>
+              </a:rPr>
+              <a:t>Y</a:t>
+            </a:r>
+            <a:r>
+              <a:rPr lang="nl-NL" sz="6000" baseline="-25000" dirty="0">
+                <a:latin typeface="Times New Roman" panose="02020603050405020304" pitchFamily="18" charset="0"/>
+                <a:cs typeface="Times New Roman" panose="02020603050405020304" pitchFamily="18" charset="0"/>
+              </a:rPr>
+              <a:t>2</a:t>
+            </a:r>
+            <a:endParaRPr lang="nl-NL" sz="6000" dirty="0">
+              <a:latin typeface="Times New Roman" panose="02020603050405020304" pitchFamily="18" charset="0"/>
+              <a:cs typeface="Times New Roman" panose="02020603050405020304" pitchFamily="18" charset="0"/>
+            </a:endParaRPr>
+          </a:p>
+        </p:txBody>
+      </p:sp>
+      <p:sp>
+        <p:nvSpPr>
+          <p:cNvPr id="50" name="TextBox 49">
+            <a:extLst>
+              <a:ext uri="{FF2B5EF4-FFF2-40B4-BE49-F238E27FC236}">
+                <a16:creationId xmlns:a16="http://schemas.microsoft.com/office/drawing/2014/main" id="{A5F53F4D-2C00-6BE3-3D65-5DA37C41687B}"/>
+              </a:ext>
+            </a:extLst>
+          </p:cNvPr>
+          <p:cNvSpPr txBox="1"/>
+          <p:nvPr/>
+        </p:nvSpPr>
+        <p:spPr>
+          <a:xfrm>
+            <a:off x="8105833" y="5759419"/>
+            <a:ext cx="1038226" cy="1015663"/>
+          </a:xfrm>
+          <a:prstGeom prst="rect">
+            <a:avLst/>
+          </a:prstGeom>
+          <a:noFill/>
+        </p:spPr>
+        <p:txBody>
+          <a:bodyPr wrap="square" rtlCol="0" anchor="ctr">
+            <a:spAutoFit/>
+          </a:bodyPr>
+          <a:lstStyle/>
+          <a:p>
+            <a:pPr algn="ctr"/>
+            <a:r>
+              <a:rPr lang="nl-NL" sz="6000" dirty="0">
+                <a:latin typeface="Times New Roman" panose="02020603050405020304" pitchFamily="18" charset="0"/>
+                <a:cs typeface="Times New Roman" panose="02020603050405020304" pitchFamily="18" charset="0"/>
+              </a:rPr>
+              <a:t>Y</a:t>
+            </a:r>
+            <a:r>
+              <a:rPr lang="nl-NL" sz="6000" baseline="-25000" dirty="0">
+                <a:latin typeface="Times New Roman" panose="02020603050405020304" pitchFamily="18" charset="0"/>
+                <a:cs typeface="Times New Roman" panose="02020603050405020304" pitchFamily="18" charset="0"/>
+              </a:rPr>
+              <a:t>3</a:t>
+            </a:r>
+            <a:endParaRPr lang="nl-NL" sz="6000" dirty="0">
+              <a:latin typeface="Times New Roman" panose="02020603050405020304" pitchFamily="18" charset="0"/>
+              <a:cs typeface="Times New Roman" panose="02020603050405020304" pitchFamily="18" charset="0"/>
+            </a:endParaRPr>
+          </a:p>
+        </p:txBody>
+      </p:sp>
+      <p:sp>
+        <p:nvSpPr>
+          <p:cNvPr id="53" name="Rectangle 52">
+            <a:extLst>
+              <a:ext uri="{FF2B5EF4-FFF2-40B4-BE49-F238E27FC236}">
+                <a16:creationId xmlns:a16="http://schemas.microsoft.com/office/drawing/2014/main" id="{F072C7C0-C554-CB02-3C8C-6A1D94AFCE4F}"/>
+              </a:ext>
+            </a:extLst>
+          </p:cNvPr>
+          <p:cNvSpPr>
+            <a:spLocks/>
+          </p:cNvSpPr>
+          <p:nvPr/>
+        </p:nvSpPr>
+        <p:spPr>
+          <a:xfrm>
+            <a:off x="5710407" y="4075082"/>
+            <a:ext cx="1800000" cy="1800000"/>
+          </a:xfrm>
+          <a:prstGeom prst="rect">
+            <a:avLst/>
+          </a:prstGeom>
+          <a:noFill/>
+          <a:ln w="28575">
+            <a:solidFill>
+              <a:schemeClr val="tx1"/>
+            </a:solidFill>
+          </a:ln>
+        </p:spPr>
+        <p:style>
+          <a:lnRef idx="2">
+            <a:schemeClr val="accent1">
+              <a:shade val="15000"/>
+            </a:schemeClr>
+          </a:lnRef>
+          <a:fillRef idx="1">
+            <a:schemeClr val="accent1"/>
+          </a:fillRef>
+          <a:effectRef idx="0">
+            <a:schemeClr val="accent1"/>
+          </a:effectRef>
+          <a:fontRef idx="minor">
+            <a:schemeClr val="lt1"/>
+          </a:fontRef>
+        </p:style>
+        <p:txBody>
+          <a:bodyPr rtlCol="0" anchor="ctr"/>
+          <a:lstStyle/>
+          <a:p>
+            <a:pPr algn="ctr"/>
+            <a:endParaRPr lang="nl-NL"/>
+          </a:p>
+        </p:txBody>
+      </p:sp>
+      <p:grpSp>
+        <p:nvGrpSpPr>
+          <p:cNvPr id="55" name="Group 54">
+            <a:extLst>
+              <a:ext uri="{FF2B5EF4-FFF2-40B4-BE49-F238E27FC236}">
+                <a16:creationId xmlns:a16="http://schemas.microsoft.com/office/drawing/2014/main" id="{72173963-EFB0-F665-394A-7251110315E4}"/>
+              </a:ext>
+            </a:extLst>
+          </p:cNvPr>
+          <p:cNvGrpSpPr/>
+          <p:nvPr/>
+        </p:nvGrpSpPr>
+        <p:grpSpPr>
+          <a:xfrm>
+            <a:off x="5710407" y="2078999"/>
+            <a:ext cx="1800000" cy="1800000"/>
+            <a:chOff x="3905701" y="82916"/>
+            <a:chExt cx="1800000" cy="1800000"/>
+          </a:xfrm>
+        </p:grpSpPr>
+        <p:grpSp>
+          <p:nvGrpSpPr>
+            <p:cNvPr id="56" name="Group 55">
+              <a:extLst>
+                <a:ext uri="{FF2B5EF4-FFF2-40B4-BE49-F238E27FC236}">
+                  <a16:creationId xmlns:a16="http://schemas.microsoft.com/office/drawing/2014/main" id="{5D8CF131-6DC7-1C3E-6C1E-4D9BFE4D1C4B}"/>
+                </a:ext>
+              </a:extLst>
+            </p:cNvPr>
+            <p:cNvGrpSpPr/>
+            <p:nvPr/>
+          </p:nvGrpSpPr>
+          <p:grpSpPr>
+            <a:xfrm>
+              <a:off x="3905701" y="82916"/>
+              <a:ext cx="1800000" cy="1800000"/>
+              <a:chOff x="2189017" y="1062181"/>
+              <a:chExt cx="1800000" cy="1800000"/>
+            </a:xfrm>
+          </p:grpSpPr>
+          <p:sp>
+            <p:nvSpPr>
+              <p:cNvPr id="58" name="Rectangle 57">
+                <a:extLst>
+                  <a:ext uri="{FF2B5EF4-FFF2-40B4-BE49-F238E27FC236}">
+                    <a16:creationId xmlns:a16="http://schemas.microsoft.com/office/drawing/2014/main" id="{5134FF66-FE7D-B32E-544C-0D4CF33F0458}"/>
+                  </a:ext>
+                </a:extLst>
+              </p:cNvPr>
+              <p:cNvSpPr>
+                <a:spLocks/>
+              </p:cNvSpPr>
+              <p:nvPr/>
+            </p:nvSpPr>
+            <p:spPr>
+              <a:xfrm>
+                <a:off x="2189017" y="1062181"/>
+                <a:ext cx="1800000" cy="1800000"/>
+              </a:xfrm>
+              <a:prstGeom prst="rect">
+                <a:avLst/>
+              </a:prstGeom>
+              <a:noFill/>
+              <a:ln w="28575">
+                <a:solidFill>
+                  <a:schemeClr val="tx1"/>
+                </a:solidFill>
+              </a:ln>
+            </p:spPr>
+            <p:style>
+              <a:lnRef idx="2">
+                <a:schemeClr val="accent1">
+                  <a:shade val="15000"/>
+                </a:schemeClr>
+              </a:lnRef>
+              <a:fillRef idx="1">
+                <a:schemeClr val="accent1"/>
+              </a:fillRef>
+              <a:effectRef idx="0">
+                <a:schemeClr val="accent1"/>
+              </a:effectRef>
+              <a:fontRef idx="minor">
+                <a:schemeClr val="lt1"/>
+              </a:fontRef>
+            </p:style>
+            <p:txBody>
+              <a:bodyPr rtlCol="0" anchor="ctr"/>
+              <a:lstStyle/>
+              <a:p>
+                <a:pPr algn="ctr"/>
+                <a:endParaRPr lang="nl-NL"/>
+              </a:p>
+            </p:txBody>
+          </p:sp>
+          <p:cxnSp>
+            <p:nvCxnSpPr>
+              <p:cNvPr id="59" name="Straight Connector 58">
+                <a:extLst>
+                  <a:ext uri="{FF2B5EF4-FFF2-40B4-BE49-F238E27FC236}">
+                    <a16:creationId xmlns:a16="http://schemas.microsoft.com/office/drawing/2014/main" id="{8EA58EA0-4774-57C9-60FE-0396C07FC8FC}"/>
+                  </a:ext>
+                </a:extLst>
+              </p:cNvPr>
+              <p:cNvCxnSpPr>
+                <a:cxnSpLocks/>
+                <a:stCxn id="58" idx="1"/>
+                <a:endCxn id="58" idx="3"/>
+              </p:cNvCxnSpPr>
+              <p:nvPr/>
+            </p:nvCxnSpPr>
+            <p:spPr>
+              <a:xfrm>
+                <a:off x="2189017" y="1962181"/>
+                <a:ext cx="1800000" cy="0"/>
+              </a:xfrm>
+              <a:prstGeom prst="line">
+                <a:avLst/>
+              </a:prstGeom>
+              <a:ln>
+                <a:solidFill>
+                  <a:schemeClr val="tx1"/>
+                </a:solidFill>
+              </a:ln>
+            </p:spPr>
+            <p:style>
+              <a:lnRef idx="1">
+                <a:schemeClr val="accent1"/>
+              </a:lnRef>
+              <a:fillRef idx="0">
+                <a:schemeClr val="accent1"/>
+              </a:fillRef>
+              <a:effectRef idx="0">
+                <a:schemeClr val="accent1"/>
+              </a:effectRef>
+              <a:fontRef idx="minor">
+                <a:schemeClr val="tx1"/>
+              </a:fontRef>
+            </p:style>
+          </p:cxnSp>
+        </p:grpSp>
+        <p:cxnSp>
+          <p:nvCxnSpPr>
+            <p:cNvPr id="57" name="Straight Connector 56">
+              <a:extLst>
+                <a:ext uri="{FF2B5EF4-FFF2-40B4-BE49-F238E27FC236}">
+                  <a16:creationId xmlns:a16="http://schemas.microsoft.com/office/drawing/2014/main" id="{89CB1C7B-A0CF-B6E9-592E-E7B19A546D79}"/>
+                </a:ext>
+              </a:extLst>
+            </p:cNvPr>
+            <p:cNvCxnSpPr>
+              <a:cxnSpLocks/>
+              <a:stCxn id="58" idx="0"/>
+              <a:endCxn id="58" idx="2"/>
+            </p:cNvCxnSpPr>
+            <p:nvPr/>
+          </p:nvCxnSpPr>
+          <p:spPr>
+            <a:xfrm>
+              <a:off x="4805701" y="82916"/>
+              <a:ext cx="0" cy="1800000"/>
+            </a:xfrm>
+            <a:prstGeom prst="line">
+              <a:avLst/>
+            </a:prstGeom>
+            <a:ln>
+              <a:solidFill>
+                <a:schemeClr val="tx1"/>
+              </a:solidFill>
+            </a:ln>
+          </p:spPr>
+          <p:style>
+            <a:lnRef idx="1">
+              <a:schemeClr val="accent1"/>
+            </a:lnRef>
+            <a:fillRef idx="0">
+              <a:schemeClr val="accent1"/>
+            </a:fillRef>
+            <a:effectRef idx="0">
+              <a:schemeClr val="accent1"/>
+            </a:effectRef>
+            <a:fontRef idx="minor">
+              <a:schemeClr val="tx1"/>
+            </a:fontRef>
+          </p:style>
+        </p:cxnSp>
+      </p:grpSp>
+      <p:grpSp>
+        <p:nvGrpSpPr>
+          <p:cNvPr id="60" name="Group 59">
+            <a:extLst>
+              <a:ext uri="{FF2B5EF4-FFF2-40B4-BE49-F238E27FC236}">
+                <a16:creationId xmlns:a16="http://schemas.microsoft.com/office/drawing/2014/main" id="{4F1ECFF0-615F-32F5-E6A8-014954BED1A8}"/>
+              </a:ext>
+            </a:extLst>
+          </p:cNvPr>
+          <p:cNvGrpSpPr/>
+          <p:nvPr/>
+        </p:nvGrpSpPr>
+        <p:grpSpPr>
+          <a:xfrm>
+            <a:off x="7724946" y="4075082"/>
+            <a:ext cx="1800000" cy="1800000"/>
+            <a:chOff x="3905701" y="82916"/>
+            <a:chExt cx="1800000" cy="1800000"/>
+          </a:xfrm>
+        </p:grpSpPr>
+        <p:grpSp>
+          <p:nvGrpSpPr>
+            <p:cNvPr id="61" name="Group 60">
+              <a:extLst>
+                <a:ext uri="{FF2B5EF4-FFF2-40B4-BE49-F238E27FC236}">
+                  <a16:creationId xmlns:a16="http://schemas.microsoft.com/office/drawing/2014/main" id="{5FF4F1B6-AD2A-8836-18BF-6EDE662F4ABD}"/>
+                </a:ext>
+              </a:extLst>
+            </p:cNvPr>
+            <p:cNvGrpSpPr/>
+            <p:nvPr/>
+          </p:nvGrpSpPr>
+          <p:grpSpPr>
+            <a:xfrm>
+              <a:off x="3905701" y="82916"/>
+              <a:ext cx="1800000" cy="1800000"/>
+              <a:chOff x="2189017" y="1062181"/>
+              <a:chExt cx="1800000" cy="1800000"/>
+            </a:xfrm>
+          </p:grpSpPr>
+          <p:sp>
+            <p:nvSpPr>
+              <p:cNvPr id="63" name="Rectangle 62">
+                <a:extLst>
+                  <a:ext uri="{FF2B5EF4-FFF2-40B4-BE49-F238E27FC236}">
+                    <a16:creationId xmlns:a16="http://schemas.microsoft.com/office/drawing/2014/main" id="{E56FDC8C-B6E0-54A7-50D6-D9BA0481A7C0}"/>
+                  </a:ext>
+                </a:extLst>
+              </p:cNvPr>
+              <p:cNvSpPr>
+                <a:spLocks/>
+              </p:cNvSpPr>
+              <p:nvPr/>
+            </p:nvSpPr>
+            <p:spPr>
+              <a:xfrm>
+                <a:off x="2189017" y="1062181"/>
+                <a:ext cx="1800000" cy="1800000"/>
+              </a:xfrm>
+              <a:prstGeom prst="rect">
+                <a:avLst/>
+              </a:prstGeom>
+              <a:noFill/>
+              <a:ln w="28575">
+                <a:solidFill>
+                  <a:schemeClr val="tx1"/>
+                </a:solidFill>
+              </a:ln>
+            </p:spPr>
+            <p:style>
+              <a:lnRef idx="2">
+                <a:schemeClr val="accent1">
+                  <a:shade val="15000"/>
+                </a:schemeClr>
+              </a:lnRef>
+              <a:fillRef idx="1">
+                <a:schemeClr val="accent1"/>
+              </a:fillRef>
+              <a:effectRef idx="0">
+                <a:schemeClr val="accent1"/>
+              </a:effectRef>
+              <a:fontRef idx="minor">
+                <a:schemeClr val="lt1"/>
+              </a:fontRef>
+            </p:style>
+            <p:txBody>
+              <a:bodyPr rtlCol="0" anchor="ctr"/>
+              <a:lstStyle/>
+              <a:p>
+                <a:pPr algn="ctr"/>
+                <a:endParaRPr lang="nl-NL"/>
+              </a:p>
+            </p:txBody>
+          </p:sp>
+          <p:cxnSp>
+            <p:nvCxnSpPr>
+              <p:cNvPr id="64" name="Straight Connector 63">
+                <a:extLst>
+                  <a:ext uri="{FF2B5EF4-FFF2-40B4-BE49-F238E27FC236}">
+                    <a16:creationId xmlns:a16="http://schemas.microsoft.com/office/drawing/2014/main" id="{3C845F8C-B568-827F-F042-02FD14EEE762}"/>
+                  </a:ext>
+                </a:extLst>
+              </p:cNvPr>
+              <p:cNvCxnSpPr>
+                <a:cxnSpLocks/>
+                <a:stCxn id="63" idx="1"/>
+                <a:endCxn id="63" idx="3"/>
+              </p:cNvCxnSpPr>
+              <p:nvPr/>
+            </p:nvCxnSpPr>
+            <p:spPr>
+              <a:xfrm>
+                <a:off x="2189017" y="1962181"/>
+                <a:ext cx="1800000" cy="0"/>
+              </a:xfrm>
+              <a:prstGeom prst="line">
+                <a:avLst/>
+              </a:prstGeom>
+              <a:ln>
+                <a:solidFill>
+                  <a:schemeClr val="tx1"/>
+                </a:solidFill>
+              </a:ln>
+            </p:spPr>
+            <p:style>
+              <a:lnRef idx="1">
+                <a:schemeClr val="accent1"/>
+              </a:lnRef>
+              <a:fillRef idx="0">
+                <a:schemeClr val="accent1"/>
+              </a:fillRef>
+              <a:effectRef idx="0">
+                <a:schemeClr val="accent1"/>
+              </a:effectRef>
+              <a:fontRef idx="minor">
+                <a:schemeClr val="tx1"/>
+              </a:fontRef>
+            </p:style>
+          </p:cxnSp>
+        </p:grpSp>
+        <p:cxnSp>
+          <p:nvCxnSpPr>
+            <p:cNvPr id="62" name="Straight Connector 61">
+              <a:extLst>
+                <a:ext uri="{FF2B5EF4-FFF2-40B4-BE49-F238E27FC236}">
+                  <a16:creationId xmlns:a16="http://schemas.microsoft.com/office/drawing/2014/main" id="{4E4B7675-3DD7-EDE8-5C15-62280307AAD8}"/>
+                </a:ext>
+              </a:extLst>
+            </p:cNvPr>
+            <p:cNvCxnSpPr>
+              <a:cxnSpLocks/>
+              <a:stCxn id="63" idx="0"/>
+              <a:endCxn id="63" idx="2"/>
+            </p:cNvCxnSpPr>
+            <p:nvPr/>
+          </p:nvCxnSpPr>
+          <p:spPr>
+            <a:xfrm>
+              <a:off x="4805701" y="82916"/>
+              <a:ext cx="0" cy="1800000"/>
+            </a:xfrm>
+            <a:prstGeom prst="line">
+              <a:avLst/>
+            </a:prstGeom>
+            <a:ln>
+              <a:solidFill>
+                <a:schemeClr val="tx1"/>
+              </a:solidFill>
+            </a:ln>
+          </p:spPr>
+          <p:style>
+            <a:lnRef idx="1">
+              <a:schemeClr val="accent1"/>
+            </a:lnRef>
+            <a:fillRef idx="0">
+              <a:schemeClr val="accent1"/>
+            </a:fillRef>
+            <a:effectRef idx="0">
+              <a:schemeClr val="accent1"/>
+            </a:effectRef>
+            <a:fontRef idx="minor">
+              <a:schemeClr val="tx1"/>
+            </a:fontRef>
+          </p:style>
+        </p:cxnSp>
+      </p:grpSp>
+      <p:cxnSp>
+        <p:nvCxnSpPr>
+          <p:cNvPr id="66" name="Straight Connector 65">
+            <a:extLst>
+              <a:ext uri="{FF2B5EF4-FFF2-40B4-BE49-F238E27FC236}">
+                <a16:creationId xmlns:a16="http://schemas.microsoft.com/office/drawing/2014/main" id="{215AA72B-146B-E3C3-C6C7-C919E0B9AA0B}"/>
+              </a:ext>
+            </a:extLst>
+          </p:cNvPr>
+          <p:cNvCxnSpPr>
+            <a:cxnSpLocks/>
+          </p:cNvCxnSpPr>
+          <p:nvPr/>
+        </p:nvCxnSpPr>
+        <p:spPr>
+          <a:xfrm>
+            <a:off x="3705280" y="2078999"/>
+            <a:ext cx="1800000" cy="1800000"/>
+          </a:xfrm>
+          <a:prstGeom prst="line">
+            <a:avLst/>
+          </a:prstGeom>
+          <a:ln>
+            <a:solidFill>
+              <a:schemeClr val="tx1"/>
+            </a:solidFill>
+          </a:ln>
+        </p:spPr>
+        <p:style>
+          <a:lnRef idx="1">
+            <a:schemeClr val="accent1"/>
+          </a:lnRef>
+          <a:fillRef idx="0">
+            <a:schemeClr val="accent1"/>
+          </a:fillRef>
+          <a:effectRef idx="0">
+            <a:schemeClr val="accent1"/>
+          </a:effectRef>
+          <a:fontRef idx="minor">
+            <a:schemeClr val="tx1"/>
+          </a:fontRef>
+        </p:style>
+      </p:cxnSp>
+      <p:cxnSp>
+        <p:nvCxnSpPr>
+          <p:cNvPr id="70" name="Straight Connector 69">
+            <a:extLst>
+              <a:ext uri="{FF2B5EF4-FFF2-40B4-BE49-F238E27FC236}">
+                <a16:creationId xmlns:a16="http://schemas.microsoft.com/office/drawing/2014/main" id="{4DE4FCC9-AFF8-4802-254C-F5F495C40EB7}"/>
+              </a:ext>
+            </a:extLst>
+          </p:cNvPr>
+          <p:cNvCxnSpPr>
+            <a:cxnSpLocks/>
+          </p:cNvCxnSpPr>
+          <p:nvPr/>
+        </p:nvCxnSpPr>
+        <p:spPr>
+          <a:xfrm>
+            <a:off x="3695868" y="4075082"/>
+            <a:ext cx="1800000" cy="1800000"/>
+          </a:xfrm>
+          <a:prstGeom prst="line">
+            <a:avLst/>
+          </a:prstGeom>
+          <a:ln>
+            <a:solidFill>
+              <a:schemeClr val="tx1"/>
+            </a:solidFill>
+          </a:ln>
+        </p:spPr>
+        <p:style>
+          <a:lnRef idx="1">
+            <a:schemeClr val="accent1"/>
+          </a:lnRef>
+          <a:fillRef idx="0">
+            <a:schemeClr val="accent1"/>
+          </a:fillRef>
+          <a:effectRef idx="0">
+            <a:schemeClr val="accent1"/>
+          </a:effectRef>
+          <a:fontRef idx="minor">
+            <a:schemeClr val="tx1"/>
+          </a:fontRef>
+        </p:style>
+      </p:cxnSp>
+      <p:cxnSp>
+        <p:nvCxnSpPr>
+          <p:cNvPr id="73" name="Straight Connector 72">
+            <a:extLst>
+              <a:ext uri="{FF2B5EF4-FFF2-40B4-BE49-F238E27FC236}">
+                <a16:creationId xmlns:a16="http://schemas.microsoft.com/office/drawing/2014/main" id="{864FD41A-CDA3-03A2-253E-E9088F27FBD6}"/>
+              </a:ext>
+            </a:extLst>
+          </p:cNvPr>
+          <p:cNvCxnSpPr>
+            <a:cxnSpLocks/>
+          </p:cNvCxnSpPr>
+          <p:nvPr/>
+        </p:nvCxnSpPr>
+        <p:spPr>
+          <a:xfrm>
+            <a:off x="5710407" y="4075082"/>
+            <a:ext cx="1800000" cy="1800000"/>
+          </a:xfrm>
+          <a:prstGeom prst="line">
+            <a:avLst/>
+          </a:prstGeom>
+          <a:ln>
+            <a:solidFill>
+              <a:schemeClr val="tx1"/>
+            </a:solidFill>
+          </a:ln>
+        </p:spPr>
+        <p:style>
+          <a:lnRef idx="1">
+            <a:schemeClr val="accent1"/>
+          </a:lnRef>
+          <a:fillRef idx="0">
+            <a:schemeClr val="accent1"/>
+          </a:fillRef>
+          <a:effectRef idx="0">
+            <a:schemeClr val="accent1"/>
+          </a:effectRef>
+          <a:fontRef idx="minor">
+            <a:schemeClr val="tx1"/>
+          </a:fontRef>
+        </p:style>
+      </p:cxnSp>
+    </p:spTree>
+    <p:extLst>
+      <p:ext uri="{BB962C8B-B14F-4D97-AF65-F5344CB8AC3E}">
+        <p14:creationId xmlns:p14="http://schemas.microsoft.com/office/powerpoint/2010/main" val="1008355435"/>
+      </p:ext>
+    </p:extLst>
+  </p:cSld>
+  <p:clrMapOvr>
+    <a:masterClrMapping/>
+  </p:clrMapOvr>
+</p:sld>
+</file>
+
 <file path=ppt/slides/slide2.xml><?xml version="1.0" encoding="utf-8"?>
 <p:sld xmlns:a="http://schemas.openxmlformats.org/drawingml/2006/main" xmlns:r="http://schemas.openxmlformats.org/officeDocument/2006/relationships" xmlns:p="http://schemas.openxmlformats.org/presentationml/2006/main">
   <p:cSld>
@@ -17833,6 +19767,3763 @@
         </p:cxnSp>
       </p:grpSp>
     </p:spTree>
+  </p:cSld>
+  <p:clrMapOvr>
+    <a:masterClrMapping/>
+  </p:clrMapOvr>
+</p:sld>
+</file>
+
+<file path=ppt/slides/slide5.xml><?xml version="1.0" encoding="utf-8"?>
+<p:sld xmlns:a="http://schemas.openxmlformats.org/drawingml/2006/main" xmlns:r="http://schemas.openxmlformats.org/officeDocument/2006/relationships" xmlns:p="http://schemas.openxmlformats.org/presentationml/2006/main">
+  <p:cSld>
+    <p:spTree>
+      <p:nvGrpSpPr>
+        <p:cNvPr id="1" name="">
+          <a:extLst>
+            <a:ext uri="{FF2B5EF4-FFF2-40B4-BE49-F238E27FC236}">
+              <a16:creationId xmlns:a16="http://schemas.microsoft.com/office/drawing/2014/main" id="{3A02FC00-FA3E-78AF-CCF9-7A96CC3D6263}"/>
+            </a:ext>
+          </a:extLst>
+        </p:cNvPr>
+        <p:cNvGrpSpPr/>
+        <p:nvPr/>
+      </p:nvGrpSpPr>
+      <p:grpSpPr>
+        <a:xfrm>
+          <a:off x="0" y="0"/>
+          <a:ext cx="0" cy="0"/>
+          <a:chOff x="0" y="0"/>
+          <a:chExt cx="0" cy="0"/>
+        </a:xfrm>
+      </p:grpSpPr>
+      <p:grpSp>
+        <p:nvGrpSpPr>
+          <p:cNvPr id="199" name="Group 1">
+            <a:extLst>
+              <a:ext uri="{FF2B5EF4-FFF2-40B4-BE49-F238E27FC236}">
+                <a16:creationId xmlns:a16="http://schemas.microsoft.com/office/drawing/2014/main" id="{EEB62930-EA2F-FC68-12E8-B4D3ED49EAEF}"/>
+              </a:ext>
+            </a:extLst>
+          </p:cNvPr>
+          <p:cNvGrpSpPr>
+            <a:grpSpLocks noChangeAspect="1"/>
+          </p:cNvGrpSpPr>
+          <p:nvPr/>
+        </p:nvGrpSpPr>
+        <p:grpSpPr>
+          <a:xfrm>
+            <a:off x="2803883" y="189000"/>
+            <a:ext cx="6584233" cy="6480000"/>
+            <a:chOff x="877320" y="583200"/>
+            <a:chExt cx="3911040" cy="3849120"/>
+          </a:xfrm>
+        </p:grpSpPr>
+        <p:sp>
+          <p:nvSpPr>
+            <p:cNvPr id="200" name="Rectangle 3">
+              <a:extLst>
+                <a:ext uri="{FF2B5EF4-FFF2-40B4-BE49-F238E27FC236}">
+                  <a16:creationId xmlns:a16="http://schemas.microsoft.com/office/drawing/2014/main" id="{372BE01C-6257-FEE4-6B6E-2486B16C73DB}"/>
+                </a:ext>
+              </a:extLst>
+            </p:cNvPr>
+            <p:cNvSpPr/>
+            <p:nvPr/>
+          </p:nvSpPr>
+          <p:spPr>
+            <a:xfrm>
+              <a:off x="877320" y="3279960"/>
+              <a:ext cx="1151280" cy="1151280"/>
+            </a:xfrm>
+            <a:prstGeom prst="rect">
+              <a:avLst/>
+            </a:prstGeom>
+            <a:solidFill>
+              <a:schemeClr val="bg1"/>
+            </a:solidFill>
+            <a:ln w="57150">
+              <a:solidFill>
+                <a:srgbClr val="000000"/>
+              </a:solidFill>
+            </a:ln>
+          </p:spPr>
+          <p:style>
+            <a:lnRef idx="2">
+              <a:schemeClr val="accent1">
+                <a:shade val="50000"/>
+              </a:schemeClr>
+            </a:lnRef>
+            <a:fillRef idx="1">
+              <a:schemeClr val="accent1"/>
+            </a:fillRef>
+            <a:effectRef idx="0">
+              <a:schemeClr val="accent1"/>
+            </a:effectRef>
+            <a:fontRef idx="minor"/>
+          </p:style>
+          <p:txBody>
+            <a:bodyPr horzOverflow="overflow" lIns="90000" tIns="45000" rIns="90000" bIns="45000" numCol="1" spcCol="0" anchor="ctr">
+              <a:noAutofit/>
+            </a:bodyPr>
+            <a:lstStyle/>
+            <a:p>
+              <a:pPr algn="ctr" defTabSz="914400">
+                <a:lnSpc>
+                  <a:spcPct val="100000"/>
+                </a:lnSpc>
+              </a:pPr>
+              <a:r>
+                <a:rPr lang="en-US" sz="7200" spc="-1" dirty="0">
+                  <a:solidFill>
+                    <a:schemeClr val="dk1"/>
+                  </a:solidFill>
+                  <a:latin typeface="Times New Roman"/>
+                </a:rPr>
+                <a:t>Y</a:t>
+              </a:r>
+              <a:r>
+                <a:rPr lang="en-US" sz="7200" spc="-1" baseline="-25000" dirty="0">
+                  <a:solidFill>
+                    <a:schemeClr val="dk1"/>
+                  </a:solidFill>
+                  <a:latin typeface="Times New Roman"/>
+                </a:rPr>
+                <a:t>1</a:t>
+              </a:r>
+              <a:endParaRPr lang="en-DK" sz="7200" b="0" strike="noStrike" spc="-1" dirty="0">
+                <a:solidFill>
+                  <a:srgbClr val="000000"/>
+                </a:solidFill>
+                <a:latin typeface="Arial"/>
+              </a:endParaRPr>
+            </a:p>
+          </p:txBody>
+        </p:sp>
+        <p:sp>
+          <p:nvSpPr>
+            <p:cNvPr id="201" name="Rectangle 4">
+              <a:extLst>
+                <a:ext uri="{FF2B5EF4-FFF2-40B4-BE49-F238E27FC236}">
+                  <a16:creationId xmlns:a16="http://schemas.microsoft.com/office/drawing/2014/main" id="{53E15E2B-762B-415F-F75F-BCAABDB6C071}"/>
+                </a:ext>
+              </a:extLst>
+            </p:cNvPr>
+            <p:cNvSpPr/>
+            <p:nvPr/>
+          </p:nvSpPr>
+          <p:spPr>
+            <a:xfrm>
+              <a:off x="2257200" y="3281040"/>
+              <a:ext cx="1151280" cy="1151280"/>
+            </a:xfrm>
+            <a:prstGeom prst="rect">
+              <a:avLst/>
+            </a:prstGeom>
+            <a:solidFill>
+              <a:schemeClr val="bg1"/>
+            </a:solidFill>
+            <a:ln w="57150">
+              <a:solidFill>
+                <a:srgbClr val="000000"/>
+              </a:solidFill>
+            </a:ln>
+          </p:spPr>
+          <p:style>
+            <a:lnRef idx="2">
+              <a:schemeClr val="accent1">
+                <a:shade val="50000"/>
+              </a:schemeClr>
+            </a:lnRef>
+            <a:fillRef idx="1">
+              <a:schemeClr val="accent1"/>
+            </a:fillRef>
+            <a:effectRef idx="0">
+              <a:schemeClr val="accent1"/>
+            </a:effectRef>
+            <a:fontRef idx="minor"/>
+          </p:style>
+          <p:txBody>
+            <a:bodyPr horzOverflow="overflow" lIns="90000" tIns="45000" rIns="90000" bIns="45000" numCol="1" spcCol="0" anchor="ctr">
+              <a:noAutofit/>
+            </a:bodyPr>
+            <a:lstStyle/>
+            <a:p>
+              <a:pPr algn="ctr" defTabSz="914400">
+                <a:lnSpc>
+                  <a:spcPct val="100000"/>
+                </a:lnSpc>
+              </a:pPr>
+              <a:r>
+                <a:rPr lang="en-US" sz="7200" spc="-1" dirty="0">
+                  <a:solidFill>
+                    <a:schemeClr val="dk1"/>
+                  </a:solidFill>
+                  <a:latin typeface="Times New Roman"/>
+                </a:rPr>
+                <a:t>Y</a:t>
+              </a:r>
+              <a:r>
+                <a:rPr lang="en-US" sz="7200" spc="-1" baseline="-25000" dirty="0">
+                  <a:solidFill>
+                    <a:schemeClr val="dk1"/>
+                  </a:solidFill>
+                  <a:latin typeface="Times New Roman"/>
+                </a:rPr>
+                <a:t>2</a:t>
+              </a:r>
+              <a:endParaRPr lang="en-DK" sz="7200" b="0" strike="noStrike" spc="-1" dirty="0">
+                <a:solidFill>
+                  <a:srgbClr val="000000"/>
+                </a:solidFill>
+                <a:latin typeface="Arial"/>
+              </a:endParaRPr>
+            </a:p>
+          </p:txBody>
+        </p:sp>
+        <p:sp>
+          <p:nvSpPr>
+            <p:cNvPr id="202" name="Rectangle 5">
+              <a:extLst>
+                <a:ext uri="{FF2B5EF4-FFF2-40B4-BE49-F238E27FC236}">
+                  <a16:creationId xmlns:a16="http://schemas.microsoft.com/office/drawing/2014/main" id="{2A4BF9D1-F220-8580-2860-2CC99EF6E386}"/>
+                </a:ext>
+              </a:extLst>
+            </p:cNvPr>
+            <p:cNvSpPr/>
+            <p:nvPr/>
+          </p:nvSpPr>
+          <p:spPr>
+            <a:xfrm>
+              <a:off x="3637080" y="3279960"/>
+              <a:ext cx="1151280" cy="1151280"/>
+            </a:xfrm>
+            <a:prstGeom prst="rect">
+              <a:avLst/>
+            </a:prstGeom>
+            <a:solidFill>
+              <a:schemeClr val="bg1"/>
+            </a:solidFill>
+            <a:ln w="57150">
+              <a:solidFill>
+                <a:srgbClr val="000000"/>
+              </a:solidFill>
+            </a:ln>
+          </p:spPr>
+          <p:style>
+            <a:lnRef idx="2">
+              <a:schemeClr val="accent1">
+                <a:shade val="50000"/>
+              </a:schemeClr>
+            </a:lnRef>
+            <a:fillRef idx="1">
+              <a:schemeClr val="accent1"/>
+            </a:fillRef>
+            <a:effectRef idx="0">
+              <a:schemeClr val="accent1"/>
+            </a:effectRef>
+            <a:fontRef idx="minor"/>
+          </p:style>
+          <p:txBody>
+            <a:bodyPr horzOverflow="overflow" lIns="90000" tIns="45000" rIns="90000" bIns="45000" numCol="1" spcCol="0" anchor="ctr">
+              <a:noAutofit/>
+            </a:bodyPr>
+            <a:lstStyle/>
+            <a:p>
+              <a:pPr algn="ctr" defTabSz="914400">
+                <a:lnSpc>
+                  <a:spcPct val="100000"/>
+                </a:lnSpc>
+              </a:pPr>
+              <a:r>
+                <a:rPr lang="en-US" sz="7200" spc="-1" dirty="0">
+                  <a:solidFill>
+                    <a:schemeClr val="dk1"/>
+                  </a:solidFill>
+                  <a:latin typeface="Times New Roman"/>
+                </a:rPr>
+                <a:t>Y</a:t>
+              </a:r>
+              <a:r>
+                <a:rPr lang="en-US" sz="7200" b="0" strike="noStrike" spc="-1" baseline="-25000" dirty="0">
+                  <a:solidFill>
+                    <a:schemeClr val="dk1"/>
+                  </a:solidFill>
+                  <a:latin typeface="Times New Roman"/>
+                </a:rPr>
+                <a:t>3</a:t>
+              </a:r>
+              <a:endParaRPr lang="en-DK" sz="7200" b="0" strike="noStrike" spc="-1" dirty="0">
+                <a:solidFill>
+                  <a:srgbClr val="000000"/>
+                </a:solidFill>
+                <a:latin typeface="Arial"/>
+              </a:endParaRPr>
+            </a:p>
+          </p:txBody>
+        </p:sp>
+        <p:sp>
+          <p:nvSpPr>
+            <p:cNvPr id="203" name="Oval 6">
+              <a:extLst>
+                <a:ext uri="{FF2B5EF4-FFF2-40B4-BE49-F238E27FC236}">
+                  <a16:creationId xmlns:a16="http://schemas.microsoft.com/office/drawing/2014/main" id="{91DE5339-8E69-107B-2D4B-83C133006A84}"/>
+                </a:ext>
+              </a:extLst>
+            </p:cNvPr>
+            <p:cNvSpPr/>
+            <p:nvPr/>
+          </p:nvSpPr>
+          <p:spPr>
+            <a:xfrm>
+              <a:off x="2067840" y="583200"/>
+              <a:ext cx="1535400" cy="1535400"/>
+            </a:xfrm>
+            <a:prstGeom prst="ellipse">
+              <a:avLst/>
+            </a:prstGeom>
+            <a:solidFill>
+              <a:schemeClr val="bg2">
+                <a:lumMod val="50000"/>
+              </a:schemeClr>
+            </a:solidFill>
+            <a:ln w="57150">
+              <a:solidFill>
+                <a:srgbClr val="000000"/>
+              </a:solidFill>
+            </a:ln>
+          </p:spPr>
+          <p:style>
+            <a:lnRef idx="2">
+              <a:schemeClr val="accent1">
+                <a:shade val="50000"/>
+              </a:schemeClr>
+            </a:lnRef>
+            <a:fillRef idx="1">
+              <a:schemeClr val="accent1"/>
+            </a:fillRef>
+            <a:effectRef idx="0">
+              <a:schemeClr val="accent1"/>
+            </a:effectRef>
+            <a:fontRef idx="minor"/>
+          </p:style>
+          <p:txBody>
+            <a:bodyPr lIns="90000" tIns="45000" rIns="90000" bIns="45000" anchor="ctr">
+              <a:noAutofit/>
+            </a:bodyPr>
+            <a:lstStyle/>
+            <a:p>
+              <a:pPr algn="ctr" defTabSz="914400">
+                <a:lnSpc>
+                  <a:spcPct val="100000"/>
+                </a:lnSpc>
+              </a:pPr>
+              <a:endParaRPr lang="en-DK" sz="11500" b="0" strike="noStrike" spc="-1" dirty="0">
+                <a:solidFill>
+                  <a:srgbClr val="000000"/>
+                </a:solidFill>
+                <a:latin typeface="Arial"/>
+              </a:endParaRPr>
+            </a:p>
+          </p:txBody>
+        </p:sp>
+        <p:cxnSp>
+          <p:nvCxnSpPr>
+            <p:cNvPr id="204" name="Straight Arrow Connector 7">
+              <a:extLst>
+                <a:ext uri="{FF2B5EF4-FFF2-40B4-BE49-F238E27FC236}">
+                  <a16:creationId xmlns:a16="http://schemas.microsoft.com/office/drawing/2014/main" id="{159F9887-B6C3-5157-92C3-8CCF92B07E04}"/>
+                </a:ext>
+              </a:extLst>
+            </p:cNvPr>
+            <p:cNvCxnSpPr/>
+            <p:nvPr/>
+          </p:nvCxnSpPr>
+          <p:spPr>
+            <a:xfrm flipH="1">
+              <a:off x="1453320" y="2119320"/>
+              <a:ext cx="1383120" cy="1161360"/>
+            </a:xfrm>
+            <a:prstGeom prst="straightConnector1">
+              <a:avLst/>
+            </a:prstGeom>
+            <a:ln w="57150">
+              <a:solidFill>
+                <a:srgbClr val="000000"/>
+              </a:solidFill>
+              <a:round/>
+              <a:headEnd type="none" w="med" len="med"/>
+              <a:tailEnd type="arrow" w="med" len="med"/>
+            </a:ln>
+          </p:spPr>
+        </p:cxnSp>
+        <p:cxnSp>
+          <p:nvCxnSpPr>
+            <p:cNvPr id="205" name="Straight Arrow Connector 13">
+              <a:extLst>
+                <a:ext uri="{FF2B5EF4-FFF2-40B4-BE49-F238E27FC236}">
+                  <a16:creationId xmlns:a16="http://schemas.microsoft.com/office/drawing/2014/main" id="{119E7FA4-BF4E-F20B-4298-34543E5AEBAC}"/>
+                </a:ext>
+              </a:extLst>
+            </p:cNvPr>
+            <p:cNvCxnSpPr/>
+            <p:nvPr/>
+          </p:nvCxnSpPr>
+          <p:spPr>
+            <a:xfrm flipH="1">
+              <a:off x="2833200" y="2119320"/>
+              <a:ext cx="3240" cy="1162440"/>
+            </a:xfrm>
+            <a:prstGeom prst="straightConnector1">
+              <a:avLst/>
+            </a:prstGeom>
+            <a:ln w="57150">
+              <a:solidFill>
+                <a:srgbClr val="000000"/>
+              </a:solidFill>
+              <a:round/>
+              <a:headEnd type="none" w="med" len="med"/>
+              <a:tailEnd type="arrow" w="med" len="med"/>
+            </a:ln>
+          </p:spPr>
+        </p:cxnSp>
+        <p:cxnSp>
+          <p:nvCxnSpPr>
+            <p:cNvPr id="206" name="Straight Arrow Connector 14">
+              <a:extLst>
+                <a:ext uri="{FF2B5EF4-FFF2-40B4-BE49-F238E27FC236}">
+                  <a16:creationId xmlns:a16="http://schemas.microsoft.com/office/drawing/2014/main" id="{2D5AD472-1D7C-666D-26F5-AB1D59F44C7B}"/>
+                </a:ext>
+              </a:extLst>
+            </p:cNvPr>
+            <p:cNvCxnSpPr/>
+            <p:nvPr/>
+          </p:nvCxnSpPr>
+          <p:spPr>
+            <a:xfrm>
+              <a:off x="2835720" y="2119320"/>
+              <a:ext cx="1377720" cy="1161360"/>
+            </a:xfrm>
+            <a:prstGeom prst="straightConnector1">
+              <a:avLst/>
+            </a:prstGeom>
+            <a:ln w="57150">
+              <a:solidFill>
+                <a:srgbClr val="000000"/>
+              </a:solidFill>
+              <a:round/>
+              <a:headEnd type="none" w="med" len="med"/>
+              <a:tailEnd type="arrow" w="med" len="med"/>
+            </a:ln>
+          </p:spPr>
+        </p:cxnSp>
+      </p:grpSp>
+      <p:sp>
+        <p:nvSpPr>
+          <p:cNvPr id="2" name="TextBox 1">
+            <a:extLst>
+              <a:ext uri="{FF2B5EF4-FFF2-40B4-BE49-F238E27FC236}">
+                <a16:creationId xmlns:a16="http://schemas.microsoft.com/office/drawing/2014/main" id="{66656623-3357-5C1F-EBA9-601E67DEBE27}"/>
+              </a:ext>
+            </a:extLst>
+          </p:cNvPr>
+          <p:cNvSpPr txBox="1"/>
+          <p:nvPr/>
+        </p:nvSpPr>
+        <p:spPr>
+          <a:xfrm>
+            <a:off x="5650762" y="419661"/>
+            <a:ext cx="890473" cy="1569660"/>
+          </a:xfrm>
+          <a:prstGeom prst="rect">
+            <a:avLst/>
+          </a:prstGeom>
+          <a:noFill/>
+        </p:spPr>
+        <p:txBody>
+          <a:bodyPr wrap="square" rtlCol="0" anchor="ctr">
+            <a:spAutoFit/>
+          </a:bodyPr>
+          <a:lstStyle/>
+          <a:p>
+            <a:pPr algn="ctr"/>
+            <a:r>
+              <a:rPr lang="el-GR" sz="9600" dirty="0">
+                <a:solidFill>
+                  <a:schemeClr val="bg1"/>
+                </a:solidFill>
+                <a:latin typeface="Times New Roman" panose="02020603050405020304" pitchFamily="18" charset="0"/>
+                <a:cs typeface="Times New Roman" panose="02020603050405020304" pitchFamily="18" charset="0"/>
+              </a:rPr>
+              <a:t>η</a:t>
+            </a:r>
+            <a:endParaRPr lang="nl-NL" sz="9600" dirty="0">
+              <a:solidFill>
+                <a:schemeClr val="bg1"/>
+              </a:solidFill>
+              <a:latin typeface="Times New Roman" panose="02020603050405020304" pitchFamily="18" charset="0"/>
+              <a:cs typeface="Times New Roman" panose="02020603050405020304" pitchFamily="18" charset="0"/>
+            </a:endParaRPr>
+          </a:p>
+        </p:txBody>
+      </p:sp>
+    </p:spTree>
+    <p:extLst>
+      <p:ext uri="{BB962C8B-B14F-4D97-AF65-F5344CB8AC3E}">
+        <p14:creationId xmlns:p14="http://schemas.microsoft.com/office/powerpoint/2010/main" val="2550235225"/>
+      </p:ext>
+    </p:extLst>
+  </p:cSld>
+  <p:clrMapOvr>
+    <a:masterClrMapping/>
+  </p:clrMapOvr>
+</p:sld>
+</file>
+
+<file path=ppt/slides/slide6.xml><?xml version="1.0" encoding="utf-8"?>
+<p:sld xmlns:a="http://schemas.openxmlformats.org/drawingml/2006/main" xmlns:r="http://schemas.openxmlformats.org/officeDocument/2006/relationships" xmlns:p="http://schemas.openxmlformats.org/presentationml/2006/main">
+  <p:cSld>
+    <p:spTree>
+      <p:nvGrpSpPr>
+        <p:cNvPr id="1" name="">
+          <a:extLst>
+            <a:ext uri="{FF2B5EF4-FFF2-40B4-BE49-F238E27FC236}">
+              <a16:creationId xmlns:a16="http://schemas.microsoft.com/office/drawing/2014/main" id="{C4D7DD5B-1899-3184-0B9E-C507F428F062}"/>
+            </a:ext>
+          </a:extLst>
+        </p:cNvPr>
+        <p:cNvGrpSpPr/>
+        <p:nvPr/>
+      </p:nvGrpSpPr>
+      <p:grpSpPr>
+        <a:xfrm>
+          <a:off x="0" y="0"/>
+          <a:ext cx="0" cy="0"/>
+          <a:chOff x="0" y="0"/>
+          <a:chExt cx="0" cy="0"/>
+        </a:xfrm>
+      </p:grpSpPr>
+      <p:grpSp>
+        <p:nvGrpSpPr>
+          <p:cNvPr id="199" name="Group 1">
+            <a:extLst>
+              <a:ext uri="{FF2B5EF4-FFF2-40B4-BE49-F238E27FC236}">
+                <a16:creationId xmlns:a16="http://schemas.microsoft.com/office/drawing/2014/main" id="{3FDA1779-B2D9-115D-DE88-197540704BE4}"/>
+              </a:ext>
+            </a:extLst>
+          </p:cNvPr>
+          <p:cNvGrpSpPr>
+            <a:grpSpLocks noChangeAspect="1"/>
+          </p:cNvGrpSpPr>
+          <p:nvPr/>
+        </p:nvGrpSpPr>
+        <p:grpSpPr>
+          <a:xfrm>
+            <a:off x="3504000" y="164046"/>
+            <a:ext cx="5184000" cy="5101937"/>
+            <a:chOff x="877320" y="583200"/>
+            <a:chExt cx="3911040" cy="3849120"/>
+          </a:xfrm>
+        </p:grpSpPr>
+        <p:sp>
+          <p:nvSpPr>
+            <p:cNvPr id="200" name="Rectangle 3">
+              <a:extLst>
+                <a:ext uri="{FF2B5EF4-FFF2-40B4-BE49-F238E27FC236}">
+                  <a16:creationId xmlns:a16="http://schemas.microsoft.com/office/drawing/2014/main" id="{40DE9E9A-7D49-5B1F-D1BF-D5D0DDBC09D8}"/>
+                </a:ext>
+              </a:extLst>
+            </p:cNvPr>
+            <p:cNvSpPr/>
+            <p:nvPr/>
+          </p:nvSpPr>
+          <p:spPr>
+            <a:xfrm>
+              <a:off x="877320" y="3279960"/>
+              <a:ext cx="1151280" cy="1151280"/>
+            </a:xfrm>
+            <a:prstGeom prst="rect">
+              <a:avLst/>
+            </a:prstGeom>
+            <a:solidFill>
+              <a:schemeClr val="bg1"/>
+            </a:solidFill>
+            <a:ln w="38100">
+              <a:solidFill>
+                <a:srgbClr val="000000"/>
+              </a:solidFill>
+            </a:ln>
+          </p:spPr>
+          <p:style>
+            <a:lnRef idx="2">
+              <a:schemeClr val="accent1">
+                <a:shade val="50000"/>
+              </a:schemeClr>
+            </a:lnRef>
+            <a:fillRef idx="1">
+              <a:schemeClr val="accent1"/>
+            </a:fillRef>
+            <a:effectRef idx="0">
+              <a:schemeClr val="accent1"/>
+            </a:effectRef>
+            <a:fontRef idx="minor"/>
+          </p:style>
+          <p:txBody>
+            <a:bodyPr horzOverflow="overflow" lIns="90000" tIns="45000" rIns="90000" bIns="45000" numCol="1" spcCol="0" anchor="ctr">
+              <a:noAutofit/>
+            </a:bodyPr>
+            <a:lstStyle/>
+            <a:p>
+              <a:pPr algn="ctr" defTabSz="914400">
+                <a:lnSpc>
+                  <a:spcPct val="100000"/>
+                </a:lnSpc>
+              </a:pPr>
+              <a:r>
+                <a:rPr lang="en-US" sz="6000" spc="-1" dirty="0">
+                  <a:solidFill>
+                    <a:schemeClr val="dk1"/>
+                  </a:solidFill>
+                  <a:latin typeface="Times New Roman"/>
+                </a:rPr>
+                <a:t>Y</a:t>
+              </a:r>
+              <a:r>
+                <a:rPr lang="en-US" sz="6000" spc="-1" baseline="-25000" dirty="0">
+                  <a:solidFill>
+                    <a:schemeClr val="dk1"/>
+                  </a:solidFill>
+                  <a:latin typeface="Times New Roman"/>
+                </a:rPr>
+                <a:t>1</a:t>
+              </a:r>
+              <a:endParaRPr lang="en-DK" sz="6000" b="0" strike="noStrike" spc="-1" dirty="0">
+                <a:solidFill>
+                  <a:srgbClr val="000000"/>
+                </a:solidFill>
+                <a:latin typeface="Arial"/>
+              </a:endParaRPr>
+            </a:p>
+          </p:txBody>
+        </p:sp>
+        <p:sp>
+          <p:nvSpPr>
+            <p:cNvPr id="201" name="Rectangle 4">
+              <a:extLst>
+                <a:ext uri="{FF2B5EF4-FFF2-40B4-BE49-F238E27FC236}">
+                  <a16:creationId xmlns:a16="http://schemas.microsoft.com/office/drawing/2014/main" id="{727A9C83-DB8B-F40E-8D7D-DD6ABE678472}"/>
+                </a:ext>
+              </a:extLst>
+            </p:cNvPr>
+            <p:cNvSpPr/>
+            <p:nvPr/>
+          </p:nvSpPr>
+          <p:spPr>
+            <a:xfrm>
+              <a:off x="2257200" y="3281040"/>
+              <a:ext cx="1151280" cy="1151280"/>
+            </a:xfrm>
+            <a:prstGeom prst="rect">
+              <a:avLst/>
+            </a:prstGeom>
+            <a:solidFill>
+              <a:schemeClr val="bg1"/>
+            </a:solidFill>
+            <a:ln w="38100">
+              <a:solidFill>
+                <a:srgbClr val="000000"/>
+              </a:solidFill>
+            </a:ln>
+          </p:spPr>
+          <p:style>
+            <a:lnRef idx="2">
+              <a:schemeClr val="accent1">
+                <a:shade val="50000"/>
+              </a:schemeClr>
+            </a:lnRef>
+            <a:fillRef idx="1">
+              <a:schemeClr val="accent1"/>
+            </a:fillRef>
+            <a:effectRef idx="0">
+              <a:schemeClr val="accent1"/>
+            </a:effectRef>
+            <a:fontRef idx="minor"/>
+          </p:style>
+          <p:txBody>
+            <a:bodyPr horzOverflow="overflow" lIns="90000" tIns="45000" rIns="90000" bIns="45000" numCol="1" spcCol="0" anchor="ctr">
+              <a:noAutofit/>
+            </a:bodyPr>
+            <a:lstStyle/>
+            <a:p>
+              <a:pPr algn="ctr" defTabSz="914400">
+                <a:lnSpc>
+                  <a:spcPct val="100000"/>
+                </a:lnSpc>
+              </a:pPr>
+              <a:r>
+                <a:rPr lang="en-US" sz="6000" spc="-1" dirty="0">
+                  <a:solidFill>
+                    <a:schemeClr val="dk1"/>
+                  </a:solidFill>
+                  <a:latin typeface="Times New Roman"/>
+                </a:rPr>
+                <a:t>Y</a:t>
+              </a:r>
+              <a:r>
+                <a:rPr lang="en-US" sz="6000" spc="-1" baseline="-25000" dirty="0">
+                  <a:solidFill>
+                    <a:schemeClr val="dk1"/>
+                  </a:solidFill>
+                  <a:latin typeface="Times New Roman"/>
+                </a:rPr>
+                <a:t>2</a:t>
+              </a:r>
+              <a:endParaRPr lang="en-DK" sz="6000" b="0" strike="noStrike" spc="-1" dirty="0">
+                <a:solidFill>
+                  <a:srgbClr val="000000"/>
+                </a:solidFill>
+                <a:latin typeface="Arial"/>
+              </a:endParaRPr>
+            </a:p>
+          </p:txBody>
+        </p:sp>
+        <p:sp>
+          <p:nvSpPr>
+            <p:cNvPr id="202" name="Rectangle 5">
+              <a:extLst>
+                <a:ext uri="{FF2B5EF4-FFF2-40B4-BE49-F238E27FC236}">
+                  <a16:creationId xmlns:a16="http://schemas.microsoft.com/office/drawing/2014/main" id="{E2F04D82-23DD-7A30-6FBE-BAF663695AF6}"/>
+                </a:ext>
+              </a:extLst>
+            </p:cNvPr>
+            <p:cNvSpPr/>
+            <p:nvPr/>
+          </p:nvSpPr>
+          <p:spPr>
+            <a:xfrm>
+              <a:off x="3637080" y="3279960"/>
+              <a:ext cx="1151280" cy="1151280"/>
+            </a:xfrm>
+            <a:prstGeom prst="rect">
+              <a:avLst/>
+            </a:prstGeom>
+            <a:solidFill>
+              <a:schemeClr val="bg1"/>
+            </a:solidFill>
+            <a:ln w="38100">
+              <a:solidFill>
+                <a:srgbClr val="000000"/>
+              </a:solidFill>
+            </a:ln>
+          </p:spPr>
+          <p:style>
+            <a:lnRef idx="2">
+              <a:schemeClr val="accent1">
+                <a:shade val="50000"/>
+              </a:schemeClr>
+            </a:lnRef>
+            <a:fillRef idx="1">
+              <a:schemeClr val="accent1"/>
+            </a:fillRef>
+            <a:effectRef idx="0">
+              <a:schemeClr val="accent1"/>
+            </a:effectRef>
+            <a:fontRef idx="minor"/>
+          </p:style>
+          <p:txBody>
+            <a:bodyPr horzOverflow="overflow" lIns="90000" tIns="45000" rIns="90000" bIns="45000" numCol="1" spcCol="0" anchor="ctr">
+              <a:noAutofit/>
+            </a:bodyPr>
+            <a:lstStyle/>
+            <a:p>
+              <a:pPr algn="ctr" defTabSz="914400">
+                <a:lnSpc>
+                  <a:spcPct val="100000"/>
+                </a:lnSpc>
+              </a:pPr>
+              <a:r>
+                <a:rPr lang="en-US" sz="6000" spc="-1" dirty="0">
+                  <a:solidFill>
+                    <a:schemeClr val="dk1"/>
+                  </a:solidFill>
+                  <a:latin typeface="Times New Roman"/>
+                </a:rPr>
+                <a:t>Y</a:t>
+              </a:r>
+              <a:r>
+                <a:rPr lang="en-US" sz="6000" b="0" strike="noStrike" spc="-1" baseline="-25000" dirty="0">
+                  <a:solidFill>
+                    <a:schemeClr val="dk1"/>
+                  </a:solidFill>
+                  <a:latin typeface="Times New Roman"/>
+                </a:rPr>
+                <a:t>3</a:t>
+              </a:r>
+              <a:endParaRPr lang="en-DK" sz="6000" b="0" strike="noStrike" spc="-1" dirty="0">
+                <a:solidFill>
+                  <a:srgbClr val="000000"/>
+                </a:solidFill>
+                <a:latin typeface="Arial"/>
+              </a:endParaRPr>
+            </a:p>
+          </p:txBody>
+        </p:sp>
+        <p:sp>
+          <p:nvSpPr>
+            <p:cNvPr id="203" name="Oval 6">
+              <a:extLst>
+                <a:ext uri="{FF2B5EF4-FFF2-40B4-BE49-F238E27FC236}">
+                  <a16:creationId xmlns:a16="http://schemas.microsoft.com/office/drawing/2014/main" id="{04AFC090-6CAF-C4A7-A90D-9E5103034599}"/>
+                </a:ext>
+              </a:extLst>
+            </p:cNvPr>
+            <p:cNvSpPr/>
+            <p:nvPr/>
+          </p:nvSpPr>
+          <p:spPr>
+            <a:xfrm>
+              <a:off x="2067840" y="583200"/>
+              <a:ext cx="1535400" cy="1535400"/>
+            </a:xfrm>
+            <a:prstGeom prst="ellipse">
+              <a:avLst/>
+            </a:prstGeom>
+            <a:solidFill>
+              <a:schemeClr val="bg2">
+                <a:lumMod val="50000"/>
+              </a:schemeClr>
+            </a:solidFill>
+            <a:ln w="38100">
+              <a:solidFill>
+                <a:srgbClr val="000000"/>
+              </a:solidFill>
+            </a:ln>
+          </p:spPr>
+          <p:style>
+            <a:lnRef idx="2">
+              <a:schemeClr val="accent1">
+                <a:shade val="50000"/>
+              </a:schemeClr>
+            </a:lnRef>
+            <a:fillRef idx="1">
+              <a:schemeClr val="accent1"/>
+            </a:fillRef>
+            <a:effectRef idx="0">
+              <a:schemeClr val="accent1"/>
+            </a:effectRef>
+            <a:fontRef idx="minor"/>
+          </p:style>
+          <p:txBody>
+            <a:bodyPr lIns="90000" tIns="45000" rIns="90000" bIns="45000" anchor="ctr">
+              <a:noAutofit/>
+            </a:bodyPr>
+            <a:lstStyle/>
+            <a:p>
+              <a:pPr algn="ctr" defTabSz="914400">
+                <a:lnSpc>
+                  <a:spcPct val="100000"/>
+                </a:lnSpc>
+              </a:pPr>
+              <a:endParaRPr lang="en-DK" sz="8800" b="0" strike="noStrike" spc="-1" dirty="0">
+                <a:ln>
+                  <a:solidFill>
+                    <a:schemeClr val="bg1"/>
+                  </a:solidFill>
+                </a:ln>
+                <a:solidFill>
+                  <a:schemeClr val="bg1"/>
+                </a:solidFill>
+                <a:latin typeface="Arial"/>
+              </a:endParaRPr>
+            </a:p>
+          </p:txBody>
+        </p:sp>
+        <p:cxnSp>
+          <p:nvCxnSpPr>
+            <p:cNvPr id="204" name="Straight Arrow Connector 7">
+              <a:extLst>
+                <a:ext uri="{FF2B5EF4-FFF2-40B4-BE49-F238E27FC236}">
+                  <a16:creationId xmlns:a16="http://schemas.microsoft.com/office/drawing/2014/main" id="{B449277D-FCF4-BBE2-D868-E6BD97F60D48}"/>
+                </a:ext>
+              </a:extLst>
+            </p:cNvPr>
+            <p:cNvCxnSpPr/>
+            <p:nvPr/>
+          </p:nvCxnSpPr>
+          <p:spPr>
+            <a:xfrm flipH="1">
+              <a:off x="1453320" y="2119320"/>
+              <a:ext cx="1383120" cy="1161360"/>
+            </a:xfrm>
+            <a:prstGeom prst="straightConnector1">
+              <a:avLst/>
+            </a:prstGeom>
+            <a:ln w="38100">
+              <a:solidFill>
+                <a:srgbClr val="000000"/>
+              </a:solidFill>
+              <a:round/>
+              <a:headEnd type="none" w="med" len="med"/>
+              <a:tailEnd type="arrow" w="med" len="med"/>
+            </a:ln>
+          </p:spPr>
+        </p:cxnSp>
+        <p:cxnSp>
+          <p:nvCxnSpPr>
+            <p:cNvPr id="205" name="Straight Arrow Connector 13">
+              <a:extLst>
+                <a:ext uri="{FF2B5EF4-FFF2-40B4-BE49-F238E27FC236}">
+                  <a16:creationId xmlns:a16="http://schemas.microsoft.com/office/drawing/2014/main" id="{56C1C1B9-E786-8ABF-24F9-62B19A1FB0D4}"/>
+                </a:ext>
+              </a:extLst>
+            </p:cNvPr>
+            <p:cNvCxnSpPr/>
+            <p:nvPr/>
+          </p:nvCxnSpPr>
+          <p:spPr>
+            <a:xfrm flipH="1">
+              <a:off x="2833200" y="2119320"/>
+              <a:ext cx="3240" cy="1162440"/>
+            </a:xfrm>
+            <a:prstGeom prst="straightConnector1">
+              <a:avLst/>
+            </a:prstGeom>
+            <a:ln w="38100">
+              <a:solidFill>
+                <a:srgbClr val="000000"/>
+              </a:solidFill>
+              <a:round/>
+              <a:headEnd type="none" w="med" len="med"/>
+              <a:tailEnd type="arrow" w="med" len="med"/>
+            </a:ln>
+          </p:spPr>
+        </p:cxnSp>
+        <p:cxnSp>
+          <p:nvCxnSpPr>
+            <p:cNvPr id="206" name="Straight Arrow Connector 14">
+              <a:extLst>
+                <a:ext uri="{FF2B5EF4-FFF2-40B4-BE49-F238E27FC236}">
+                  <a16:creationId xmlns:a16="http://schemas.microsoft.com/office/drawing/2014/main" id="{D0016CFE-C764-3888-8EED-7813E234CB4C}"/>
+                </a:ext>
+              </a:extLst>
+            </p:cNvPr>
+            <p:cNvCxnSpPr/>
+            <p:nvPr/>
+          </p:nvCxnSpPr>
+          <p:spPr>
+            <a:xfrm>
+              <a:off x="2835720" y="2119320"/>
+              <a:ext cx="1377720" cy="1161360"/>
+            </a:xfrm>
+            <a:prstGeom prst="straightConnector1">
+              <a:avLst/>
+            </a:prstGeom>
+            <a:ln w="38100">
+              <a:solidFill>
+                <a:srgbClr val="000000"/>
+              </a:solidFill>
+              <a:round/>
+              <a:headEnd type="none" w="med" len="med"/>
+              <a:tailEnd type="arrow" w="med" len="med"/>
+            </a:ln>
+          </p:spPr>
+        </p:cxnSp>
+      </p:grpSp>
+      <p:sp>
+        <p:nvSpPr>
+          <p:cNvPr id="2" name="TextBox 1">
+            <a:extLst>
+              <a:ext uri="{FF2B5EF4-FFF2-40B4-BE49-F238E27FC236}">
+                <a16:creationId xmlns:a16="http://schemas.microsoft.com/office/drawing/2014/main" id="{C92E2FF0-498E-65DC-D335-A271DE1A93B6}"/>
+              </a:ext>
+            </a:extLst>
+          </p:cNvPr>
+          <p:cNvSpPr txBox="1"/>
+          <p:nvPr/>
+        </p:nvSpPr>
+        <p:spPr>
+          <a:xfrm>
+            <a:off x="5745449" y="301859"/>
+            <a:ext cx="701101" cy="1323439"/>
+          </a:xfrm>
+          <a:prstGeom prst="rect">
+            <a:avLst/>
+          </a:prstGeom>
+          <a:noFill/>
+          <a:ln w="38100">
+            <a:noFill/>
+          </a:ln>
+        </p:spPr>
+        <p:txBody>
+          <a:bodyPr wrap="square" rtlCol="0" anchor="ctr">
+            <a:spAutoFit/>
+          </a:bodyPr>
+          <a:lstStyle/>
+          <a:p>
+            <a:pPr algn="ctr"/>
+            <a:r>
+              <a:rPr lang="el-GR" sz="8000" dirty="0">
+                <a:ln>
+                  <a:solidFill>
+                    <a:schemeClr val="bg1"/>
+                  </a:solidFill>
+                </a:ln>
+                <a:solidFill>
+                  <a:schemeClr val="bg1"/>
+                </a:solidFill>
+                <a:latin typeface="Times New Roman" panose="02020603050405020304" pitchFamily="18" charset="0"/>
+                <a:cs typeface="Times New Roman" panose="02020603050405020304" pitchFamily="18" charset="0"/>
+              </a:rPr>
+              <a:t>η</a:t>
+            </a:r>
+            <a:endParaRPr lang="nl-NL" sz="8000" dirty="0">
+              <a:ln>
+                <a:solidFill>
+                  <a:schemeClr val="bg1"/>
+                </a:solidFill>
+              </a:ln>
+              <a:solidFill>
+                <a:schemeClr val="bg1"/>
+              </a:solidFill>
+              <a:latin typeface="Times New Roman" panose="02020603050405020304" pitchFamily="18" charset="0"/>
+              <a:cs typeface="Times New Roman" panose="02020603050405020304" pitchFamily="18" charset="0"/>
+            </a:endParaRPr>
+          </a:p>
+        </p:txBody>
+      </p:sp>
+      <p:grpSp>
+        <p:nvGrpSpPr>
+          <p:cNvPr id="51" name="Group 50">
+            <a:extLst>
+              <a:ext uri="{FF2B5EF4-FFF2-40B4-BE49-F238E27FC236}">
+                <a16:creationId xmlns:a16="http://schemas.microsoft.com/office/drawing/2014/main" id="{14D8E10E-943F-B340-659E-D53D1AB1F7E8}"/>
+              </a:ext>
+            </a:extLst>
+          </p:cNvPr>
+          <p:cNvGrpSpPr/>
+          <p:nvPr/>
+        </p:nvGrpSpPr>
+        <p:grpSpPr>
+          <a:xfrm>
+            <a:off x="3810864" y="5264551"/>
+            <a:ext cx="899996" cy="1429403"/>
+            <a:chOff x="3810864" y="5264551"/>
+            <a:chExt cx="899996" cy="1429403"/>
+          </a:xfrm>
+        </p:grpSpPr>
+        <p:cxnSp>
+          <p:nvCxnSpPr>
+            <p:cNvPr id="23" name="Straight Arrow Connector 14">
+              <a:extLst>
+                <a:ext uri="{FF2B5EF4-FFF2-40B4-BE49-F238E27FC236}">
+                  <a16:creationId xmlns:a16="http://schemas.microsoft.com/office/drawing/2014/main" id="{CCE0BC44-B075-ABF7-388F-F6D1C4A20CF8}"/>
+                </a:ext>
+              </a:extLst>
+            </p:cNvPr>
+            <p:cNvCxnSpPr>
+              <a:cxnSpLocks/>
+              <a:stCxn id="24" idx="0"/>
+            </p:cNvCxnSpPr>
+            <p:nvPr/>
+          </p:nvCxnSpPr>
+          <p:spPr>
+            <a:xfrm flipV="1">
+              <a:off x="4260862" y="5264551"/>
+              <a:ext cx="1" cy="529403"/>
+            </a:xfrm>
+            <a:prstGeom prst="straightConnector1">
+              <a:avLst/>
+            </a:prstGeom>
+            <a:ln w="38100">
+              <a:solidFill>
+                <a:srgbClr val="000000"/>
+              </a:solidFill>
+              <a:round/>
+              <a:headEnd type="none" w="med" len="med"/>
+              <a:tailEnd type="arrow" w="med" len="med"/>
+            </a:ln>
+          </p:spPr>
+        </p:cxnSp>
+        <p:sp>
+          <p:nvSpPr>
+            <p:cNvPr id="24" name="Oval 6">
+              <a:extLst>
+                <a:ext uri="{FF2B5EF4-FFF2-40B4-BE49-F238E27FC236}">
+                  <a16:creationId xmlns:a16="http://schemas.microsoft.com/office/drawing/2014/main" id="{7925BA52-1217-C846-38E7-C700463C5659}"/>
+                </a:ext>
+              </a:extLst>
+            </p:cNvPr>
+            <p:cNvSpPr>
+              <a:spLocks noChangeAspect="1"/>
+            </p:cNvSpPr>
+            <p:nvPr/>
+          </p:nvSpPr>
+          <p:spPr>
+            <a:xfrm>
+              <a:off x="3810864" y="5793954"/>
+              <a:ext cx="899996" cy="900000"/>
+            </a:xfrm>
+            <a:prstGeom prst="ellipse">
+              <a:avLst/>
+            </a:prstGeom>
+            <a:solidFill>
+              <a:schemeClr val="bg1"/>
+            </a:solidFill>
+            <a:ln w="38100">
+              <a:solidFill>
+                <a:srgbClr val="000000"/>
+              </a:solidFill>
+            </a:ln>
+          </p:spPr>
+          <p:style>
+            <a:lnRef idx="2">
+              <a:schemeClr val="accent1">
+                <a:shade val="50000"/>
+              </a:schemeClr>
+            </a:lnRef>
+            <a:fillRef idx="1">
+              <a:schemeClr val="accent1"/>
+            </a:fillRef>
+            <a:effectRef idx="0">
+              <a:schemeClr val="accent1"/>
+            </a:effectRef>
+            <a:fontRef idx="minor"/>
+          </p:style>
+          <p:txBody>
+            <a:bodyPr lIns="90000" tIns="45000" rIns="90000" bIns="45000" anchor="ctr">
+              <a:noAutofit/>
+            </a:bodyPr>
+            <a:lstStyle/>
+            <a:p>
+              <a:pPr algn="ctr" defTabSz="914400">
+                <a:lnSpc>
+                  <a:spcPct val="100000"/>
+                </a:lnSpc>
+              </a:pPr>
+              <a:endParaRPr lang="en-DK" sz="8800" b="0" strike="noStrike" spc="-1" dirty="0">
+                <a:solidFill>
+                  <a:srgbClr val="000000"/>
+                </a:solidFill>
+                <a:latin typeface="Arial"/>
+              </a:endParaRPr>
+            </a:p>
+          </p:txBody>
+        </p:sp>
+        <p:cxnSp>
+          <p:nvCxnSpPr>
+            <p:cNvPr id="37" name="Straight Connector 36">
+              <a:extLst>
+                <a:ext uri="{FF2B5EF4-FFF2-40B4-BE49-F238E27FC236}">
+                  <a16:creationId xmlns:a16="http://schemas.microsoft.com/office/drawing/2014/main" id="{70539E26-4D35-F69D-8240-BAD9422FEE78}"/>
+                </a:ext>
+              </a:extLst>
+            </p:cNvPr>
+            <p:cNvCxnSpPr>
+              <a:cxnSpLocks/>
+              <a:stCxn id="24" idx="0"/>
+            </p:cNvCxnSpPr>
+            <p:nvPr/>
+          </p:nvCxnSpPr>
+          <p:spPr>
+            <a:xfrm>
+              <a:off x="4260862" y="5793954"/>
+              <a:ext cx="0" cy="450000"/>
+            </a:xfrm>
+            <a:prstGeom prst="line">
+              <a:avLst/>
+            </a:prstGeom>
+            <a:ln>
+              <a:solidFill>
+                <a:schemeClr val="tx1"/>
+              </a:solidFill>
+            </a:ln>
+          </p:spPr>
+          <p:style>
+            <a:lnRef idx="1">
+              <a:schemeClr val="accent1"/>
+            </a:lnRef>
+            <a:fillRef idx="0">
+              <a:schemeClr val="accent1"/>
+            </a:fillRef>
+            <a:effectRef idx="0">
+              <a:schemeClr val="accent1"/>
+            </a:effectRef>
+            <a:fontRef idx="minor">
+              <a:schemeClr val="tx1"/>
+            </a:fontRef>
+          </p:style>
+        </p:cxnSp>
+        <p:cxnSp>
+          <p:nvCxnSpPr>
+            <p:cNvPr id="40" name="Straight Connector 39">
+              <a:extLst>
+                <a:ext uri="{FF2B5EF4-FFF2-40B4-BE49-F238E27FC236}">
+                  <a16:creationId xmlns:a16="http://schemas.microsoft.com/office/drawing/2014/main" id="{6E99E1DA-3350-B8F5-C361-7522C15B41DA}"/>
+                </a:ext>
+              </a:extLst>
+            </p:cNvPr>
+            <p:cNvCxnSpPr>
+              <a:cxnSpLocks/>
+            </p:cNvCxnSpPr>
+            <p:nvPr/>
+          </p:nvCxnSpPr>
+          <p:spPr>
+            <a:xfrm flipH="1" flipV="1">
+              <a:off x="4260862" y="6243954"/>
+              <a:ext cx="377400" cy="245086"/>
+            </a:xfrm>
+            <a:prstGeom prst="line">
+              <a:avLst/>
+            </a:prstGeom>
+            <a:ln>
+              <a:solidFill>
+                <a:schemeClr val="tx1"/>
+              </a:solidFill>
+            </a:ln>
+          </p:spPr>
+          <p:style>
+            <a:lnRef idx="1">
+              <a:schemeClr val="accent1"/>
+            </a:lnRef>
+            <a:fillRef idx="0">
+              <a:schemeClr val="accent1"/>
+            </a:fillRef>
+            <a:effectRef idx="0">
+              <a:schemeClr val="accent1"/>
+            </a:effectRef>
+            <a:fontRef idx="minor">
+              <a:schemeClr val="tx1"/>
+            </a:fontRef>
+          </p:style>
+        </p:cxnSp>
+        <p:cxnSp>
+          <p:nvCxnSpPr>
+            <p:cNvPr id="45" name="Straight Connector 44">
+              <a:extLst>
+                <a:ext uri="{FF2B5EF4-FFF2-40B4-BE49-F238E27FC236}">
+                  <a16:creationId xmlns:a16="http://schemas.microsoft.com/office/drawing/2014/main" id="{91266497-6C1C-5F1D-9008-6FEEB4F3E803}"/>
+                </a:ext>
+              </a:extLst>
+            </p:cNvPr>
+            <p:cNvCxnSpPr>
+              <a:cxnSpLocks/>
+            </p:cNvCxnSpPr>
+            <p:nvPr/>
+          </p:nvCxnSpPr>
+          <p:spPr>
+            <a:xfrm flipH="1">
+              <a:off x="3883462" y="6243954"/>
+              <a:ext cx="377400" cy="245086"/>
+            </a:xfrm>
+            <a:prstGeom prst="line">
+              <a:avLst/>
+            </a:prstGeom>
+            <a:ln>
+              <a:solidFill>
+                <a:schemeClr val="tx1"/>
+              </a:solidFill>
+            </a:ln>
+          </p:spPr>
+          <p:style>
+            <a:lnRef idx="1">
+              <a:schemeClr val="accent1"/>
+            </a:lnRef>
+            <a:fillRef idx="0">
+              <a:schemeClr val="accent1"/>
+            </a:fillRef>
+            <a:effectRef idx="0">
+              <a:schemeClr val="accent1"/>
+            </a:effectRef>
+            <a:fontRef idx="minor">
+              <a:schemeClr val="tx1"/>
+            </a:fontRef>
+          </p:style>
+        </p:cxnSp>
+      </p:grpSp>
+      <p:grpSp>
+        <p:nvGrpSpPr>
+          <p:cNvPr id="52" name="Group 51">
+            <a:extLst>
+              <a:ext uri="{FF2B5EF4-FFF2-40B4-BE49-F238E27FC236}">
+                <a16:creationId xmlns:a16="http://schemas.microsoft.com/office/drawing/2014/main" id="{B949518C-424B-978B-9E93-B77831F923E1}"/>
+              </a:ext>
+            </a:extLst>
+          </p:cNvPr>
+          <p:cNvGrpSpPr/>
+          <p:nvPr/>
+        </p:nvGrpSpPr>
+        <p:grpSpPr>
+          <a:xfrm>
+            <a:off x="5648626" y="5264551"/>
+            <a:ext cx="899996" cy="1429403"/>
+            <a:chOff x="3810864" y="5264551"/>
+            <a:chExt cx="899996" cy="1429403"/>
+          </a:xfrm>
+        </p:grpSpPr>
+        <p:cxnSp>
+          <p:nvCxnSpPr>
+            <p:cNvPr id="53" name="Straight Arrow Connector 14">
+              <a:extLst>
+                <a:ext uri="{FF2B5EF4-FFF2-40B4-BE49-F238E27FC236}">
+                  <a16:creationId xmlns:a16="http://schemas.microsoft.com/office/drawing/2014/main" id="{AE295C25-C5FC-8CD0-FE8A-E5EA3515684A}"/>
+                </a:ext>
+              </a:extLst>
+            </p:cNvPr>
+            <p:cNvCxnSpPr>
+              <a:cxnSpLocks/>
+              <a:stCxn id="54" idx="0"/>
+            </p:cNvCxnSpPr>
+            <p:nvPr/>
+          </p:nvCxnSpPr>
+          <p:spPr>
+            <a:xfrm flipV="1">
+              <a:off x="4260862" y="5264551"/>
+              <a:ext cx="1" cy="529403"/>
+            </a:xfrm>
+            <a:prstGeom prst="straightConnector1">
+              <a:avLst/>
+            </a:prstGeom>
+            <a:ln w="38100">
+              <a:solidFill>
+                <a:srgbClr val="000000"/>
+              </a:solidFill>
+              <a:round/>
+              <a:headEnd type="none" w="med" len="med"/>
+              <a:tailEnd type="arrow" w="med" len="med"/>
+            </a:ln>
+          </p:spPr>
+        </p:cxnSp>
+        <p:sp>
+          <p:nvSpPr>
+            <p:cNvPr id="54" name="Oval 6">
+              <a:extLst>
+                <a:ext uri="{FF2B5EF4-FFF2-40B4-BE49-F238E27FC236}">
+                  <a16:creationId xmlns:a16="http://schemas.microsoft.com/office/drawing/2014/main" id="{7105D727-E05A-60ED-07B6-C40CB7246DB7}"/>
+                </a:ext>
+              </a:extLst>
+            </p:cNvPr>
+            <p:cNvSpPr>
+              <a:spLocks noChangeAspect="1"/>
+            </p:cNvSpPr>
+            <p:nvPr/>
+          </p:nvSpPr>
+          <p:spPr>
+            <a:xfrm>
+              <a:off x="3810864" y="5793954"/>
+              <a:ext cx="899996" cy="900000"/>
+            </a:xfrm>
+            <a:prstGeom prst="ellipse">
+              <a:avLst/>
+            </a:prstGeom>
+            <a:solidFill>
+              <a:schemeClr val="bg1"/>
+            </a:solidFill>
+            <a:ln w="38100">
+              <a:solidFill>
+                <a:srgbClr val="000000"/>
+              </a:solidFill>
+            </a:ln>
+          </p:spPr>
+          <p:style>
+            <a:lnRef idx="2">
+              <a:schemeClr val="accent1">
+                <a:shade val="50000"/>
+              </a:schemeClr>
+            </a:lnRef>
+            <a:fillRef idx="1">
+              <a:schemeClr val="accent1"/>
+            </a:fillRef>
+            <a:effectRef idx="0">
+              <a:schemeClr val="accent1"/>
+            </a:effectRef>
+            <a:fontRef idx="minor"/>
+          </p:style>
+          <p:txBody>
+            <a:bodyPr lIns="90000" tIns="45000" rIns="90000" bIns="45000" anchor="ctr">
+              <a:noAutofit/>
+            </a:bodyPr>
+            <a:lstStyle/>
+            <a:p>
+              <a:pPr algn="ctr" defTabSz="914400">
+                <a:lnSpc>
+                  <a:spcPct val="100000"/>
+                </a:lnSpc>
+              </a:pPr>
+              <a:endParaRPr lang="en-DK" sz="8800" b="0" strike="noStrike" spc="-1" dirty="0">
+                <a:solidFill>
+                  <a:srgbClr val="000000"/>
+                </a:solidFill>
+                <a:latin typeface="Arial"/>
+              </a:endParaRPr>
+            </a:p>
+          </p:txBody>
+        </p:sp>
+        <p:cxnSp>
+          <p:nvCxnSpPr>
+            <p:cNvPr id="55" name="Straight Connector 54">
+              <a:extLst>
+                <a:ext uri="{FF2B5EF4-FFF2-40B4-BE49-F238E27FC236}">
+                  <a16:creationId xmlns:a16="http://schemas.microsoft.com/office/drawing/2014/main" id="{243E2B61-9CF1-10B3-C975-563A27382CC4}"/>
+                </a:ext>
+              </a:extLst>
+            </p:cNvPr>
+            <p:cNvCxnSpPr>
+              <a:cxnSpLocks/>
+              <a:stCxn id="54" idx="0"/>
+            </p:cNvCxnSpPr>
+            <p:nvPr/>
+          </p:nvCxnSpPr>
+          <p:spPr>
+            <a:xfrm>
+              <a:off x="4260862" y="5793954"/>
+              <a:ext cx="0" cy="450000"/>
+            </a:xfrm>
+            <a:prstGeom prst="line">
+              <a:avLst/>
+            </a:prstGeom>
+            <a:ln>
+              <a:solidFill>
+                <a:schemeClr val="tx1"/>
+              </a:solidFill>
+            </a:ln>
+          </p:spPr>
+          <p:style>
+            <a:lnRef idx="1">
+              <a:schemeClr val="accent1"/>
+            </a:lnRef>
+            <a:fillRef idx="0">
+              <a:schemeClr val="accent1"/>
+            </a:fillRef>
+            <a:effectRef idx="0">
+              <a:schemeClr val="accent1"/>
+            </a:effectRef>
+            <a:fontRef idx="minor">
+              <a:schemeClr val="tx1"/>
+            </a:fontRef>
+          </p:style>
+        </p:cxnSp>
+        <p:cxnSp>
+          <p:nvCxnSpPr>
+            <p:cNvPr id="56" name="Straight Connector 55">
+              <a:extLst>
+                <a:ext uri="{FF2B5EF4-FFF2-40B4-BE49-F238E27FC236}">
+                  <a16:creationId xmlns:a16="http://schemas.microsoft.com/office/drawing/2014/main" id="{6BFF1DE0-C0FA-0F06-BA54-A8B5D385026F}"/>
+                </a:ext>
+              </a:extLst>
+            </p:cNvPr>
+            <p:cNvCxnSpPr>
+              <a:cxnSpLocks/>
+            </p:cNvCxnSpPr>
+            <p:nvPr/>
+          </p:nvCxnSpPr>
+          <p:spPr>
+            <a:xfrm flipH="1" flipV="1">
+              <a:off x="4260862" y="6243954"/>
+              <a:ext cx="377400" cy="245086"/>
+            </a:xfrm>
+            <a:prstGeom prst="line">
+              <a:avLst/>
+            </a:prstGeom>
+            <a:ln>
+              <a:solidFill>
+                <a:schemeClr val="tx1"/>
+              </a:solidFill>
+            </a:ln>
+          </p:spPr>
+          <p:style>
+            <a:lnRef idx="1">
+              <a:schemeClr val="accent1"/>
+            </a:lnRef>
+            <a:fillRef idx="0">
+              <a:schemeClr val="accent1"/>
+            </a:fillRef>
+            <a:effectRef idx="0">
+              <a:schemeClr val="accent1"/>
+            </a:effectRef>
+            <a:fontRef idx="minor">
+              <a:schemeClr val="tx1"/>
+            </a:fontRef>
+          </p:style>
+        </p:cxnSp>
+        <p:cxnSp>
+          <p:nvCxnSpPr>
+            <p:cNvPr id="57" name="Straight Connector 56">
+              <a:extLst>
+                <a:ext uri="{FF2B5EF4-FFF2-40B4-BE49-F238E27FC236}">
+                  <a16:creationId xmlns:a16="http://schemas.microsoft.com/office/drawing/2014/main" id="{AE31B3BA-CD3B-F74C-9D23-E2EDFAFD39D5}"/>
+                </a:ext>
+              </a:extLst>
+            </p:cNvPr>
+            <p:cNvCxnSpPr>
+              <a:cxnSpLocks/>
+            </p:cNvCxnSpPr>
+            <p:nvPr/>
+          </p:nvCxnSpPr>
+          <p:spPr>
+            <a:xfrm flipH="1">
+              <a:off x="3883462" y="6243954"/>
+              <a:ext cx="377400" cy="245086"/>
+            </a:xfrm>
+            <a:prstGeom prst="line">
+              <a:avLst/>
+            </a:prstGeom>
+            <a:ln>
+              <a:solidFill>
+                <a:schemeClr val="tx1"/>
+              </a:solidFill>
+            </a:ln>
+          </p:spPr>
+          <p:style>
+            <a:lnRef idx="1">
+              <a:schemeClr val="accent1"/>
+            </a:lnRef>
+            <a:fillRef idx="0">
+              <a:schemeClr val="accent1"/>
+            </a:fillRef>
+            <a:effectRef idx="0">
+              <a:schemeClr val="accent1"/>
+            </a:effectRef>
+            <a:fontRef idx="minor">
+              <a:schemeClr val="tx1"/>
+            </a:fontRef>
+          </p:style>
+        </p:cxnSp>
+      </p:grpSp>
+      <p:grpSp>
+        <p:nvGrpSpPr>
+          <p:cNvPr id="58" name="Group 57">
+            <a:extLst>
+              <a:ext uri="{FF2B5EF4-FFF2-40B4-BE49-F238E27FC236}">
+                <a16:creationId xmlns:a16="http://schemas.microsoft.com/office/drawing/2014/main" id="{2EA293DE-90F6-9F2F-A1FB-C13E8F0B5699}"/>
+              </a:ext>
+            </a:extLst>
+          </p:cNvPr>
+          <p:cNvGrpSpPr/>
+          <p:nvPr/>
+        </p:nvGrpSpPr>
+        <p:grpSpPr>
+          <a:xfrm>
+            <a:off x="7486388" y="5264551"/>
+            <a:ext cx="899996" cy="1429403"/>
+            <a:chOff x="3810864" y="5264551"/>
+            <a:chExt cx="899996" cy="1429403"/>
+          </a:xfrm>
+        </p:grpSpPr>
+        <p:cxnSp>
+          <p:nvCxnSpPr>
+            <p:cNvPr id="59" name="Straight Arrow Connector 14">
+              <a:extLst>
+                <a:ext uri="{FF2B5EF4-FFF2-40B4-BE49-F238E27FC236}">
+                  <a16:creationId xmlns:a16="http://schemas.microsoft.com/office/drawing/2014/main" id="{066240DB-4A3E-4AB1-08C1-11331CA641ED}"/>
+                </a:ext>
+              </a:extLst>
+            </p:cNvPr>
+            <p:cNvCxnSpPr>
+              <a:cxnSpLocks/>
+              <a:stCxn id="60" idx="0"/>
+            </p:cNvCxnSpPr>
+            <p:nvPr/>
+          </p:nvCxnSpPr>
+          <p:spPr>
+            <a:xfrm flipV="1">
+              <a:off x="4260862" y="5264551"/>
+              <a:ext cx="1" cy="529403"/>
+            </a:xfrm>
+            <a:prstGeom prst="straightConnector1">
+              <a:avLst/>
+            </a:prstGeom>
+            <a:ln w="38100">
+              <a:solidFill>
+                <a:srgbClr val="000000"/>
+              </a:solidFill>
+              <a:round/>
+              <a:headEnd type="none" w="med" len="med"/>
+              <a:tailEnd type="arrow" w="med" len="med"/>
+            </a:ln>
+          </p:spPr>
+        </p:cxnSp>
+        <p:sp>
+          <p:nvSpPr>
+            <p:cNvPr id="60" name="Oval 6">
+              <a:extLst>
+                <a:ext uri="{FF2B5EF4-FFF2-40B4-BE49-F238E27FC236}">
+                  <a16:creationId xmlns:a16="http://schemas.microsoft.com/office/drawing/2014/main" id="{348AD665-9C38-F963-5289-EBE0412197C2}"/>
+                </a:ext>
+              </a:extLst>
+            </p:cNvPr>
+            <p:cNvSpPr>
+              <a:spLocks noChangeAspect="1"/>
+            </p:cNvSpPr>
+            <p:nvPr/>
+          </p:nvSpPr>
+          <p:spPr>
+            <a:xfrm>
+              <a:off x="3810864" y="5793954"/>
+              <a:ext cx="899996" cy="900000"/>
+            </a:xfrm>
+            <a:prstGeom prst="ellipse">
+              <a:avLst/>
+            </a:prstGeom>
+            <a:solidFill>
+              <a:schemeClr val="bg1"/>
+            </a:solidFill>
+            <a:ln w="38100">
+              <a:solidFill>
+                <a:srgbClr val="000000"/>
+              </a:solidFill>
+            </a:ln>
+          </p:spPr>
+          <p:style>
+            <a:lnRef idx="2">
+              <a:schemeClr val="accent1">
+                <a:shade val="50000"/>
+              </a:schemeClr>
+            </a:lnRef>
+            <a:fillRef idx="1">
+              <a:schemeClr val="accent1"/>
+            </a:fillRef>
+            <a:effectRef idx="0">
+              <a:schemeClr val="accent1"/>
+            </a:effectRef>
+            <a:fontRef idx="minor"/>
+          </p:style>
+          <p:txBody>
+            <a:bodyPr lIns="90000" tIns="45000" rIns="90000" bIns="45000" anchor="ctr">
+              <a:noAutofit/>
+            </a:bodyPr>
+            <a:lstStyle/>
+            <a:p>
+              <a:pPr algn="ctr" defTabSz="914400">
+                <a:lnSpc>
+                  <a:spcPct val="100000"/>
+                </a:lnSpc>
+              </a:pPr>
+              <a:endParaRPr lang="en-DK" sz="8800" b="0" strike="noStrike" spc="-1" dirty="0">
+                <a:solidFill>
+                  <a:srgbClr val="000000"/>
+                </a:solidFill>
+                <a:latin typeface="Arial"/>
+              </a:endParaRPr>
+            </a:p>
+          </p:txBody>
+        </p:sp>
+        <p:cxnSp>
+          <p:nvCxnSpPr>
+            <p:cNvPr id="61" name="Straight Connector 60">
+              <a:extLst>
+                <a:ext uri="{FF2B5EF4-FFF2-40B4-BE49-F238E27FC236}">
+                  <a16:creationId xmlns:a16="http://schemas.microsoft.com/office/drawing/2014/main" id="{AD892DA9-1190-9CD5-F3E7-7FE4CE862F2A}"/>
+                </a:ext>
+              </a:extLst>
+            </p:cNvPr>
+            <p:cNvCxnSpPr>
+              <a:cxnSpLocks/>
+              <a:stCxn id="60" idx="0"/>
+            </p:cNvCxnSpPr>
+            <p:nvPr/>
+          </p:nvCxnSpPr>
+          <p:spPr>
+            <a:xfrm>
+              <a:off x="4260862" y="5793954"/>
+              <a:ext cx="0" cy="450000"/>
+            </a:xfrm>
+            <a:prstGeom prst="line">
+              <a:avLst/>
+            </a:prstGeom>
+            <a:ln>
+              <a:solidFill>
+                <a:schemeClr val="tx1"/>
+              </a:solidFill>
+            </a:ln>
+          </p:spPr>
+          <p:style>
+            <a:lnRef idx="1">
+              <a:schemeClr val="accent1"/>
+            </a:lnRef>
+            <a:fillRef idx="0">
+              <a:schemeClr val="accent1"/>
+            </a:fillRef>
+            <a:effectRef idx="0">
+              <a:schemeClr val="accent1"/>
+            </a:effectRef>
+            <a:fontRef idx="minor">
+              <a:schemeClr val="tx1"/>
+            </a:fontRef>
+          </p:style>
+        </p:cxnSp>
+        <p:cxnSp>
+          <p:nvCxnSpPr>
+            <p:cNvPr id="62" name="Straight Connector 61">
+              <a:extLst>
+                <a:ext uri="{FF2B5EF4-FFF2-40B4-BE49-F238E27FC236}">
+                  <a16:creationId xmlns:a16="http://schemas.microsoft.com/office/drawing/2014/main" id="{7E5F9934-2215-FF9E-D7CD-D3BC66171495}"/>
+                </a:ext>
+              </a:extLst>
+            </p:cNvPr>
+            <p:cNvCxnSpPr>
+              <a:cxnSpLocks/>
+            </p:cNvCxnSpPr>
+            <p:nvPr/>
+          </p:nvCxnSpPr>
+          <p:spPr>
+            <a:xfrm flipH="1" flipV="1">
+              <a:off x="4260862" y="6243954"/>
+              <a:ext cx="377400" cy="245086"/>
+            </a:xfrm>
+            <a:prstGeom prst="line">
+              <a:avLst/>
+            </a:prstGeom>
+            <a:ln>
+              <a:solidFill>
+                <a:schemeClr val="tx1"/>
+              </a:solidFill>
+            </a:ln>
+          </p:spPr>
+          <p:style>
+            <a:lnRef idx="1">
+              <a:schemeClr val="accent1"/>
+            </a:lnRef>
+            <a:fillRef idx="0">
+              <a:schemeClr val="accent1"/>
+            </a:fillRef>
+            <a:effectRef idx="0">
+              <a:schemeClr val="accent1"/>
+            </a:effectRef>
+            <a:fontRef idx="minor">
+              <a:schemeClr val="tx1"/>
+            </a:fontRef>
+          </p:style>
+        </p:cxnSp>
+        <p:cxnSp>
+          <p:nvCxnSpPr>
+            <p:cNvPr id="63" name="Straight Connector 62">
+              <a:extLst>
+                <a:ext uri="{FF2B5EF4-FFF2-40B4-BE49-F238E27FC236}">
+                  <a16:creationId xmlns:a16="http://schemas.microsoft.com/office/drawing/2014/main" id="{36BEDC44-E1D9-5052-09BB-7675C8CCB708}"/>
+                </a:ext>
+              </a:extLst>
+            </p:cNvPr>
+            <p:cNvCxnSpPr>
+              <a:cxnSpLocks/>
+            </p:cNvCxnSpPr>
+            <p:nvPr/>
+          </p:nvCxnSpPr>
+          <p:spPr>
+            <a:xfrm flipH="1">
+              <a:off x="3883462" y="6243954"/>
+              <a:ext cx="377400" cy="245086"/>
+            </a:xfrm>
+            <a:prstGeom prst="line">
+              <a:avLst/>
+            </a:prstGeom>
+            <a:ln>
+              <a:solidFill>
+                <a:schemeClr val="tx1"/>
+              </a:solidFill>
+            </a:ln>
+          </p:spPr>
+          <p:style>
+            <a:lnRef idx="1">
+              <a:schemeClr val="accent1"/>
+            </a:lnRef>
+            <a:fillRef idx="0">
+              <a:schemeClr val="accent1"/>
+            </a:fillRef>
+            <a:effectRef idx="0">
+              <a:schemeClr val="accent1"/>
+            </a:effectRef>
+            <a:fontRef idx="minor">
+              <a:schemeClr val="tx1"/>
+            </a:fontRef>
+          </p:style>
+        </p:cxnSp>
+      </p:grpSp>
+    </p:spTree>
+    <p:extLst>
+      <p:ext uri="{BB962C8B-B14F-4D97-AF65-F5344CB8AC3E}">
+        <p14:creationId xmlns:p14="http://schemas.microsoft.com/office/powerpoint/2010/main" val="60281204"/>
+      </p:ext>
+    </p:extLst>
+  </p:cSld>
+  <p:clrMapOvr>
+    <a:masterClrMapping/>
+  </p:clrMapOvr>
+</p:sld>
+</file>
+
+<file path=ppt/slides/slide7.xml><?xml version="1.0" encoding="utf-8"?>
+<p:sld xmlns:a="http://schemas.openxmlformats.org/drawingml/2006/main" xmlns:r="http://schemas.openxmlformats.org/officeDocument/2006/relationships" xmlns:p="http://schemas.openxmlformats.org/presentationml/2006/main">
+  <p:cSld>
+    <p:spTree>
+      <p:nvGrpSpPr>
+        <p:cNvPr id="1" name="">
+          <a:extLst>
+            <a:ext uri="{FF2B5EF4-FFF2-40B4-BE49-F238E27FC236}">
+              <a16:creationId xmlns:a16="http://schemas.microsoft.com/office/drawing/2014/main" id="{62CFA00A-AAAD-99B1-2379-F72A00E9ABC9}"/>
+            </a:ext>
+          </a:extLst>
+        </p:cNvPr>
+        <p:cNvGrpSpPr/>
+        <p:nvPr/>
+      </p:nvGrpSpPr>
+      <p:grpSpPr>
+        <a:xfrm>
+          <a:off x="0" y="0"/>
+          <a:ext cx="0" cy="0"/>
+          <a:chOff x="0" y="0"/>
+          <a:chExt cx="0" cy="0"/>
+        </a:xfrm>
+      </p:grpSpPr>
+      <p:grpSp>
+        <p:nvGrpSpPr>
+          <p:cNvPr id="199" name="Group 1">
+            <a:extLst>
+              <a:ext uri="{FF2B5EF4-FFF2-40B4-BE49-F238E27FC236}">
+                <a16:creationId xmlns:a16="http://schemas.microsoft.com/office/drawing/2014/main" id="{FD41E3C6-7822-B9EB-88EA-738548108144}"/>
+              </a:ext>
+            </a:extLst>
+          </p:cNvPr>
+          <p:cNvGrpSpPr>
+            <a:grpSpLocks noChangeAspect="1"/>
+          </p:cNvGrpSpPr>
+          <p:nvPr/>
+        </p:nvGrpSpPr>
+        <p:grpSpPr>
+          <a:xfrm>
+            <a:off x="3504000" y="164046"/>
+            <a:ext cx="5184000" cy="5101937"/>
+            <a:chOff x="877320" y="583200"/>
+            <a:chExt cx="3911040" cy="3849120"/>
+          </a:xfrm>
+        </p:grpSpPr>
+        <p:sp>
+          <p:nvSpPr>
+            <p:cNvPr id="200" name="Rectangle 3">
+              <a:extLst>
+                <a:ext uri="{FF2B5EF4-FFF2-40B4-BE49-F238E27FC236}">
+                  <a16:creationId xmlns:a16="http://schemas.microsoft.com/office/drawing/2014/main" id="{123BFEF9-0680-9CF5-D77D-DDF8263A5EAF}"/>
+                </a:ext>
+              </a:extLst>
+            </p:cNvPr>
+            <p:cNvSpPr/>
+            <p:nvPr/>
+          </p:nvSpPr>
+          <p:spPr>
+            <a:xfrm>
+              <a:off x="877320" y="3279960"/>
+              <a:ext cx="1151280" cy="1151280"/>
+            </a:xfrm>
+            <a:prstGeom prst="rect">
+              <a:avLst/>
+            </a:prstGeom>
+            <a:solidFill>
+              <a:schemeClr val="bg1"/>
+            </a:solidFill>
+            <a:ln w="38100">
+              <a:solidFill>
+                <a:srgbClr val="000000"/>
+              </a:solidFill>
+            </a:ln>
+          </p:spPr>
+          <p:style>
+            <a:lnRef idx="2">
+              <a:schemeClr val="accent1">
+                <a:shade val="50000"/>
+              </a:schemeClr>
+            </a:lnRef>
+            <a:fillRef idx="1">
+              <a:schemeClr val="accent1"/>
+            </a:fillRef>
+            <a:effectRef idx="0">
+              <a:schemeClr val="accent1"/>
+            </a:effectRef>
+            <a:fontRef idx="minor"/>
+          </p:style>
+          <p:txBody>
+            <a:bodyPr horzOverflow="overflow" lIns="90000" tIns="45000" rIns="90000" bIns="45000" numCol="1" spcCol="0" anchor="ctr">
+              <a:noAutofit/>
+            </a:bodyPr>
+            <a:lstStyle/>
+            <a:p>
+              <a:pPr algn="ctr" defTabSz="914400">
+                <a:lnSpc>
+                  <a:spcPct val="100000"/>
+                </a:lnSpc>
+              </a:pPr>
+              <a:r>
+                <a:rPr lang="en-US" sz="6000" spc="-1" dirty="0">
+                  <a:solidFill>
+                    <a:schemeClr val="dk1"/>
+                  </a:solidFill>
+                  <a:latin typeface="Times New Roman"/>
+                </a:rPr>
+                <a:t>Y</a:t>
+              </a:r>
+              <a:r>
+                <a:rPr lang="en-US" sz="6000" spc="-1" baseline="-25000" dirty="0">
+                  <a:solidFill>
+                    <a:schemeClr val="dk1"/>
+                  </a:solidFill>
+                  <a:latin typeface="Times New Roman"/>
+                </a:rPr>
+                <a:t>1</a:t>
+              </a:r>
+              <a:endParaRPr lang="en-DK" sz="6000" b="0" strike="noStrike" spc="-1" dirty="0">
+                <a:solidFill>
+                  <a:srgbClr val="000000"/>
+                </a:solidFill>
+                <a:latin typeface="Arial"/>
+              </a:endParaRPr>
+            </a:p>
+          </p:txBody>
+        </p:sp>
+        <p:sp>
+          <p:nvSpPr>
+            <p:cNvPr id="201" name="Rectangle 4">
+              <a:extLst>
+                <a:ext uri="{FF2B5EF4-FFF2-40B4-BE49-F238E27FC236}">
+                  <a16:creationId xmlns:a16="http://schemas.microsoft.com/office/drawing/2014/main" id="{F902FBFE-72F8-1574-1383-67E2A231F127}"/>
+                </a:ext>
+              </a:extLst>
+            </p:cNvPr>
+            <p:cNvSpPr/>
+            <p:nvPr/>
+          </p:nvSpPr>
+          <p:spPr>
+            <a:xfrm>
+              <a:off x="2257200" y="3281040"/>
+              <a:ext cx="1151280" cy="1151280"/>
+            </a:xfrm>
+            <a:prstGeom prst="rect">
+              <a:avLst/>
+            </a:prstGeom>
+            <a:solidFill>
+              <a:schemeClr val="bg1"/>
+            </a:solidFill>
+            <a:ln w="38100">
+              <a:solidFill>
+                <a:srgbClr val="000000"/>
+              </a:solidFill>
+            </a:ln>
+          </p:spPr>
+          <p:style>
+            <a:lnRef idx="2">
+              <a:schemeClr val="accent1">
+                <a:shade val="50000"/>
+              </a:schemeClr>
+            </a:lnRef>
+            <a:fillRef idx="1">
+              <a:schemeClr val="accent1"/>
+            </a:fillRef>
+            <a:effectRef idx="0">
+              <a:schemeClr val="accent1"/>
+            </a:effectRef>
+            <a:fontRef idx="minor"/>
+          </p:style>
+          <p:txBody>
+            <a:bodyPr horzOverflow="overflow" lIns="90000" tIns="45000" rIns="90000" bIns="45000" numCol="1" spcCol="0" anchor="ctr">
+              <a:noAutofit/>
+            </a:bodyPr>
+            <a:lstStyle/>
+            <a:p>
+              <a:pPr algn="ctr" defTabSz="914400">
+                <a:lnSpc>
+                  <a:spcPct val="100000"/>
+                </a:lnSpc>
+              </a:pPr>
+              <a:r>
+                <a:rPr lang="en-US" sz="6000" spc="-1" dirty="0">
+                  <a:solidFill>
+                    <a:schemeClr val="dk1"/>
+                  </a:solidFill>
+                  <a:latin typeface="Times New Roman"/>
+                </a:rPr>
+                <a:t>Y</a:t>
+              </a:r>
+              <a:r>
+                <a:rPr lang="en-US" sz="6000" spc="-1" baseline="-25000" dirty="0">
+                  <a:solidFill>
+                    <a:schemeClr val="dk1"/>
+                  </a:solidFill>
+                  <a:latin typeface="Times New Roman"/>
+                </a:rPr>
+                <a:t>2</a:t>
+              </a:r>
+              <a:endParaRPr lang="en-DK" sz="6000" b="0" strike="noStrike" spc="-1" dirty="0">
+                <a:solidFill>
+                  <a:srgbClr val="000000"/>
+                </a:solidFill>
+                <a:latin typeface="Arial"/>
+              </a:endParaRPr>
+            </a:p>
+          </p:txBody>
+        </p:sp>
+        <p:sp>
+          <p:nvSpPr>
+            <p:cNvPr id="202" name="Rectangle 5">
+              <a:extLst>
+                <a:ext uri="{FF2B5EF4-FFF2-40B4-BE49-F238E27FC236}">
+                  <a16:creationId xmlns:a16="http://schemas.microsoft.com/office/drawing/2014/main" id="{1D66EC56-8A83-3086-C2BF-076005A7B017}"/>
+                </a:ext>
+              </a:extLst>
+            </p:cNvPr>
+            <p:cNvSpPr/>
+            <p:nvPr/>
+          </p:nvSpPr>
+          <p:spPr>
+            <a:xfrm>
+              <a:off x="3637080" y="3279960"/>
+              <a:ext cx="1151280" cy="1151280"/>
+            </a:xfrm>
+            <a:prstGeom prst="rect">
+              <a:avLst/>
+            </a:prstGeom>
+            <a:solidFill>
+              <a:schemeClr val="bg1"/>
+            </a:solidFill>
+            <a:ln w="38100">
+              <a:solidFill>
+                <a:srgbClr val="000000"/>
+              </a:solidFill>
+            </a:ln>
+          </p:spPr>
+          <p:style>
+            <a:lnRef idx="2">
+              <a:schemeClr val="accent1">
+                <a:shade val="50000"/>
+              </a:schemeClr>
+            </a:lnRef>
+            <a:fillRef idx="1">
+              <a:schemeClr val="accent1"/>
+            </a:fillRef>
+            <a:effectRef idx="0">
+              <a:schemeClr val="accent1"/>
+            </a:effectRef>
+            <a:fontRef idx="minor"/>
+          </p:style>
+          <p:txBody>
+            <a:bodyPr horzOverflow="overflow" lIns="90000" tIns="45000" rIns="90000" bIns="45000" numCol="1" spcCol="0" anchor="ctr">
+              <a:noAutofit/>
+            </a:bodyPr>
+            <a:lstStyle/>
+            <a:p>
+              <a:pPr algn="ctr" defTabSz="914400">
+                <a:lnSpc>
+                  <a:spcPct val="100000"/>
+                </a:lnSpc>
+              </a:pPr>
+              <a:r>
+                <a:rPr lang="en-US" sz="6000" spc="-1" dirty="0">
+                  <a:solidFill>
+                    <a:schemeClr val="dk1"/>
+                  </a:solidFill>
+                  <a:latin typeface="Times New Roman"/>
+                </a:rPr>
+                <a:t>Y</a:t>
+              </a:r>
+              <a:r>
+                <a:rPr lang="en-US" sz="6000" b="0" strike="noStrike" spc="-1" baseline="-25000" dirty="0">
+                  <a:solidFill>
+                    <a:schemeClr val="dk1"/>
+                  </a:solidFill>
+                  <a:latin typeface="Times New Roman"/>
+                </a:rPr>
+                <a:t>3</a:t>
+              </a:r>
+              <a:endParaRPr lang="en-DK" sz="6000" b="0" strike="noStrike" spc="-1" dirty="0">
+                <a:solidFill>
+                  <a:srgbClr val="000000"/>
+                </a:solidFill>
+                <a:latin typeface="Arial"/>
+              </a:endParaRPr>
+            </a:p>
+          </p:txBody>
+        </p:sp>
+        <p:sp>
+          <p:nvSpPr>
+            <p:cNvPr id="203" name="Oval 6">
+              <a:extLst>
+                <a:ext uri="{FF2B5EF4-FFF2-40B4-BE49-F238E27FC236}">
+                  <a16:creationId xmlns:a16="http://schemas.microsoft.com/office/drawing/2014/main" id="{DCF291C3-5069-B922-B453-C39AF46BF7DB}"/>
+                </a:ext>
+              </a:extLst>
+            </p:cNvPr>
+            <p:cNvSpPr/>
+            <p:nvPr/>
+          </p:nvSpPr>
+          <p:spPr>
+            <a:xfrm>
+              <a:off x="2067840" y="583200"/>
+              <a:ext cx="1535400" cy="1535400"/>
+            </a:xfrm>
+            <a:prstGeom prst="ellipse">
+              <a:avLst/>
+            </a:prstGeom>
+            <a:noFill/>
+            <a:ln w="38100">
+              <a:solidFill>
+                <a:srgbClr val="000000"/>
+              </a:solidFill>
+            </a:ln>
+          </p:spPr>
+          <p:style>
+            <a:lnRef idx="2">
+              <a:schemeClr val="accent1">
+                <a:shade val="50000"/>
+              </a:schemeClr>
+            </a:lnRef>
+            <a:fillRef idx="1">
+              <a:schemeClr val="accent1"/>
+            </a:fillRef>
+            <a:effectRef idx="0">
+              <a:schemeClr val="accent1"/>
+            </a:effectRef>
+            <a:fontRef idx="minor"/>
+          </p:style>
+          <p:txBody>
+            <a:bodyPr lIns="90000" tIns="45000" rIns="90000" bIns="45000" anchor="ctr">
+              <a:noAutofit/>
+            </a:bodyPr>
+            <a:lstStyle/>
+            <a:p>
+              <a:pPr algn="ctr" defTabSz="914400">
+                <a:lnSpc>
+                  <a:spcPct val="100000"/>
+                </a:lnSpc>
+              </a:pPr>
+              <a:endParaRPr lang="en-DK" sz="8800" b="0" strike="noStrike" spc="-1" dirty="0">
+                <a:ln>
+                  <a:solidFill>
+                    <a:schemeClr val="bg1"/>
+                  </a:solidFill>
+                </a:ln>
+                <a:solidFill>
+                  <a:schemeClr val="bg1"/>
+                </a:solidFill>
+                <a:latin typeface="Arial"/>
+              </a:endParaRPr>
+            </a:p>
+          </p:txBody>
+        </p:sp>
+        <p:cxnSp>
+          <p:nvCxnSpPr>
+            <p:cNvPr id="204" name="Straight Arrow Connector 7">
+              <a:extLst>
+                <a:ext uri="{FF2B5EF4-FFF2-40B4-BE49-F238E27FC236}">
+                  <a16:creationId xmlns:a16="http://schemas.microsoft.com/office/drawing/2014/main" id="{F16359F6-E609-03F3-7A47-27DF9D22FE8D}"/>
+                </a:ext>
+              </a:extLst>
+            </p:cNvPr>
+            <p:cNvCxnSpPr/>
+            <p:nvPr/>
+          </p:nvCxnSpPr>
+          <p:spPr>
+            <a:xfrm flipH="1">
+              <a:off x="1453320" y="2119320"/>
+              <a:ext cx="1383120" cy="1161360"/>
+            </a:xfrm>
+            <a:prstGeom prst="straightConnector1">
+              <a:avLst/>
+            </a:prstGeom>
+            <a:ln w="38100">
+              <a:solidFill>
+                <a:srgbClr val="000000"/>
+              </a:solidFill>
+              <a:round/>
+              <a:headEnd type="none" w="med" len="med"/>
+              <a:tailEnd type="arrow" w="med" len="med"/>
+            </a:ln>
+          </p:spPr>
+        </p:cxnSp>
+        <p:cxnSp>
+          <p:nvCxnSpPr>
+            <p:cNvPr id="205" name="Straight Arrow Connector 13">
+              <a:extLst>
+                <a:ext uri="{FF2B5EF4-FFF2-40B4-BE49-F238E27FC236}">
+                  <a16:creationId xmlns:a16="http://schemas.microsoft.com/office/drawing/2014/main" id="{C9045CAF-133D-1EFC-37F9-894A427C0E6F}"/>
+                </a:ext>
+              </a:extLst>
+            </p:cNvPr>
+            <p:cNvCxnSpPr/>
+            <p:nvPr/>
+          </p:nvCxnSpPr>
+          <p:spPr>
+            <a:xfrm flipH="1">
+              <a:off x="2833200" y="2119320"/>
+              <a:ext cx="3240" cy="1162440"/>
+            </a:xfrm>
+            <a:prstGeom prst="straightConnector1">
+              <a:avLst/>
+            </a:prstGeom>
+            <a:ln w="38100">
+              <a:solidFill>
+                <a:srgbClr val="000000"/>
+              </a:solidFill>
+              <a:round/>
+              <a:headEnd type="none" w="med" len="med"/>
+              <a:tailEnd type="arrow" w="med" len="med"/>
+            </a:ln>
+          </p:spPr>
+        </p:cxnSp>
+        <p:cxnSp>
+          <p:nvCxnSpPr>
+            <p:cNvPr id="206" name="Straight Arrow Connector 14">
+              <a:extLst>
+                <a:ext uri="{FF2B5EF4-FFF2-40B4-BE49-F238E27FC236}">
+                  <a16:creationId xmlns:a16="http://schemas.microsoft.com/office/drawing/2014/main" id="{5C3E84FF-C0AA-1B2D-E0C5-E661E1BE3F53}"/>
+                </a:ext>
+              </a:extLst>
+            </p:cNvPr>
+            <p:cNvCxnSpPr/>
+            <p:nvPr/>
+          </p:nvCxnSpPr>
+          <p:spPr>
+            <a:xfrm>
+              <a:off x="2835720" y="2119320"/>
+              <a:ext cx="1377720" cy="1161360"/>
+            </a:xfrm>
+            <a:prstGeom prst="straightConnector1">
+              <a:avLst/>
+            </a:prstGeom>
+            <a:ln w="38100">
+              <a:solidFill>
+                <a:srgbClr val="000000"/>
+              </a:solidFill>
+              <a:round/>
+              <a:headEnd type="none" w="med" len="med"/>
+              <a:tailEnd type="arrow" w="med" len="med"/>
+            </a:ln>
+          </p:spPr>
+        </p:cxnSp>
+      </p:grpSp>
+      <p:sp>
+        <p:nvSpPr>
+          <p:cNvPr id="2" name="TextBox 1">
+            <a:extLst>
+              <a:ext uri="{FF2B5EF4-FFF2-40B4-BE49-F238E27FC236}">
+                <a16:creationId xmlns:a16="http://schemas.microsoft.com/office/drawing/2014/main" id="{A30EED2F-C634-BB23-3714-BA62342B061A}"/>
+              </a:ext>
+            </a:extLst>
+          </p:cNvPr>
+          <p:cNvSpPr txBox="1"/>
+          <p:nvPr/>
+        </p:nvSpPr>
+        <p:spPr>
+          <a:xfrm>
+            <a:off x="5745449" y="301859"/>
+            <a:ext cx="701101" cy="1323439"/>
+          </a:xfrm>
+          <a:prstGeom prst="rect">
+            <a:avLst/>
+          </a:prstGeom>
+          <a:noFill/>
+          <a:ln w="38100">
+            <a:noFill/>
+          </a:ln>
+        </p:spPr>
+        <p:txBody>
+          <a:bodyPr wrap="square" rtlCol="0" anchor="ctr">
+            <a:spAutoFit/>
+          </a:bodyPr>
+          <a:lstStyle/>
+          <a:p>
+            <a:pPr algn="ctr"/>
+            <a:r>
+              <a:rPr lang="el-GR" sz="8000" dirty="0">
+                <a:ln>
+                  <a:solidFill>
+                    <a:schemeClr val="tx1"/>
+                  </a:solidFill>
+                </a:ln>
+                <a:latin typeface="Times New Roman" panose="02020603050405020304" pitchFamily="18" charset="0"/>
+                <a:cs typeface="Times New Roman" panose="02020603050405020304" pitchFamily="18" charset="0"/>
+              </a:rPr>
+              <a:t>η</a:t>
+            </a:r>
+            <a:endParaRPr lang="nl-NL" sz="8000" dirty="0">
+              <a:ln>
+                <a:solidFill>
+                  <a:schemeClr val="tx1"/>
+                </a:solidFill>
+              </a:ln>
+              <a:latin typeface="Times New Roman" panose="02020603050405020304" pitchFamily="18" charset="0"/>
+              <a:cs typeface="Times New Roman" panose="02020603050405020304" pitchFamily="18" charset="0"/>
+            </a:endParaRPr>
+          </a:p>
+        </p:txBody>
+      </p:sp>
+      <p:cxnSp>
+        <p:nvCxnSpPr>
+          <p:cNvPr id="23" name="Straight Arrow Connector 14">
+            <a:extLst>
+              <a:ext uri="{FF2B5EF4-FFF2-40B4-BE49-F238E27FC236}">
+                <a16:creationId xmlns:a16="http://schemas.microsoft.com/office/drawing/2014/main" id="{607E8731-AADD-CC22-D0AB-9DB06D867DC8}"/>
+              </a:ext>
+            </a:extLst>
+          </p:cNvPr>
+          <p:cNvCxnSpPr>
+            <a:cxnSpLocks/>
+            <a:stCxn id="24" idx="0"/>
+          </p:cNvCxnSpPr>
+          <p:nvPr/>
+        </p:nvCxnSpPr>
+        <p:spPr>
+          <a:xfrm flipV="1">
+            <a:off x="4260862" y="5264551"/>
+            <a:ext cx="1" cy="529403"/>
+          </a:xfrm>
+          <a:prstGeom prst="straightConnector1">
+            <a:avLst/>
+          </a:prstGeom>
+          <a:ln w="38100">
+            <a:solidFill>
+              <a:srgbClr val="000000"/>
+            </a:solidFill>
+            <a:round/>
+            <a:headEnd type="none" w="med" len="med"/>
+            <a:tailEnd type="arrow" w="med" len="med"/>
+          </a:ln>
+        </p:spPr>
+      </p:cxnSp>
+      <p:sp>
+        <p:nvSpPr>
+          <p:cNvPr id="24" name="Oval 6">
+            <a:extLst>
+              <a:ext uri="{FF2B5EF4-FFF2-40B4-BE49-F238E27FC236}">
+                <a16:creationId xmlns:a16="http://schemas.microsoft.com/office/drawing/2014/main" id="{7B123960-87D8-F61A-03B6-D54CA58A3808}"/>
+              </a:ext>
+            </a:extLst>
+          </p:cNvPr>
+          <p:cNvSpPr>
+            <a:spLocks noChangeAspect="1"/>
+          </p:cNvSpPr>
+          <p:nvPr/>
+        </p:nvSpPr>
+        <p:spPr>
+          <a:xfrm>
+            <a:off x="3810864" y="5793954"/>
+            <a:ext cx="899996" cy="900000"/>
+          </a:xfrm>
+          <a:prstGeom prst="ellipse">
+            <a:avLst/>
+          </a:prstGeom>
+          <a:solidFill>
+            <a:schemeClr val="bg1"/>
+          </a:solidFill>
+          <a:ln w="38100">
+            <a:solidFill>
+              <a:srgbClr val="000000"/>
+            </a:solidFill>
+          </a:ln>
+        </p:spPr>
+        <p:style>
+          <a:lnRef idx="2">
+            <a:schemeClr val="accent1">
+              <a:shade val="50000"/>
+            </a:schemeClr>
+          </a:lnRef>
+          <a:fillRef idx="1">
+            <a:schemeClr val="accent1"/>
+          </a:fillRef>
+          <a:effectRef idx="0">
+            <a:schemeClr val="accent1"/>
+          </a:effectRef>
+          <a:fontRef idx="minor"/>
+        </p:style>
+        <p:txBody>
+          <a:bodyPr lIns="90000" tIns="45000" rIns="90000" bIns="45000" anchor="ctr">
+            <a:noAutofit/>
+          </a:bodyPr>
+          <a:lstStyle/>
+          <a:p>
+            <a:pPr algn="ctr" defTabSz="914400">
+              <a:lnSpc>
+                <a:spcPct val="100000"/>
+              </a:lnSpc>
+            </a:pPr>
+            <a:r>
+              <a:rPr lang="en-US" sz="3600" spc="-1" dirty="0">
+                <a:solidFill>
+                  <a:srgbClr val="000000"/>
+                </a:solidFill>
+                <a:latin typeface="Times New Roman" panose="02020603050405020304" pitchFamily="18" charset="0"/>
+                <a:cs typeface="Times New Roman" panose="02020603050405020304" pitchFamily="18" charset="0"/>
+              </a:rPr>
+              <a:t>u</a:t>
+            </a:r>
+            <a:r>
+              <a:rPr lang="en-US" sz="3600" spc="-1" baseline="-25000" dirty="0">
+                <a:solidFill>
+                  <a:srgbClr val="000000"/>
+                </a:solidFill>
+                <a:latin typeface="Times New Roman" panose="02020603050405020304" pitchFamily="18" charset="0"/>
+                <a:cs typeface="Times New Roman" panose="02020603050405020304" pitchFamily="18" charset="0"/>
+              </a:rPr>
+              <a:t>1</a:t>
+            </a:r>
+            <a:endParaRPr lang="en-DK" sz="3600" b="0" strike="noStrike" spc="-1" dirty="0">
+              <a:solidFill>
+                <a:srgbClr val="000000"/>
+              </a:solidFill>
+              <a:latin typeface="Times New Roman" panose="02020603050405020304" pitchFamily="18" charset="0"/>
+              <a:cs typeface="Times New Roman" panose="02020603050405020304" pitchFamily="18" charset="0"/>
+            </a:endParaRPr>
+          </a:p>
+        </p:txBody>
+      </p:sp>
+      <p:grpSp>
+        <p:nvGrpSpPr>
+          <p:cNvPr id="52" name="Group 51">
+            <a:extLst>
+              <a:ext uri="{FF2B5EF4-FFF2-40B4-BE49-F238E27FC236}">
+                <a16:creationId xmlns:a16="http://schemas.microsoft.com/office/drawing/2014/main" id="{B4ACCA18-921D-A1C7-C2BB-9FFCA15D909B}"/>
+              </a:ext>
+            </a:extLst>
+          </p:cNvPr>
+          <p:cNvGrpSpPr/>
+          <p:nvPr/>
+        </p:nvGrpSpPr>
+        <p:grpSpPr>
+          <a:xfrm>
+            <a:off x="5648626" y="5264551"/>
+            <a:ext cx="899996" cy="1429403"/>
+            <a:chOff x="3810864" y="5264551"/>
+            <a:chExt cx="899996" cy="1429403"/>
+          </a:xfrm>
+        </p:grpSpPr>
+        <p:cxnSp>
+          <p:nvCxnSpPr>
+            <p:cNvPr id="53" name="Straight Arrow Connector 14">
+              <a:extLst>
+                <a:ext uri="{FF2B5EF4-FFF2-40B4-BE49-F238E27FC236}">
+                  <a16:creationId xmlns:a16="http://schemas.microsoft.com/office/drawing/2014/main" id="{5997B55F-DC1E-58D1-EC1F-CCF0747BD42B}"/>
+                </a:ext>
+              </a:extLst>
+            </p:cNvPr>
+            <p:cNvCxnSpPr>
+              <a:cxnSpLocks/>
+              <a:stCxn id="54" idx="0"/>
+            </p:cNvCxnSpPr>
+            <p:nvPr/>
+          </p:nvCxnSpPr>
+          <p:spPr>
+            <a:xfrm flipV="1">
+              <a:off x="4260862" y="5264551"/>
+              <a:ext cx="1" cy="529403"/>
+            </a:xfrm>
+            <a:prstGeom prst="straightConnector1">
+              <a:avLst/>
+            </a:prstGeom>
+            <a:ln w="38100">
+              <a:solidFill>
+                <a:srgbClr val="000000"/>
+              </a:solidFill>
+              <a:round/>
+              <a:headEnd type="none" w="med" len="med"/>
+              <a:tailEnd type="arrow" w="med" len="med"/>
+            </a:ln>
+          </p:spPr>
+        </p:cxnSp>
+        <p:sp>
+          <p:nvSpPr>
+            <p:cNvPr id="54" name="Oval 6">
+              <a:extLst>
+                <a:ext uri="{FF2B5EF4-FFF2-40B4-BE49-F238E27FC236}">
+                  <a16:creationId xmlns:a16="http://schemas.microsoft.com/office/drawing/2014/main" id="{C9B4697B-EB99-AB62-04E8-35F61EEB9E23}"/>
+                </a:ext>
+              </a:extLst>
+            </p:cNvPr>
+            <p:cNvSpPr>
+              <a:spLocks noChangeAspect="1"/>
+            </p:cNvSpPr>
+            <p:nvPr/>
+          </p:nvSpPr>
+          <p:spPr>
+            <a:xfrm>
+              <a:off x="3810864" y="5793954"/>
+              <a:ext cx="899996" cy="900000"/>
+            </a:xfrm>
+            <a:prstGeom prst="ellipse">
+              <a:avLst/>
+            </a:prstGeom>
+            <a:solidFill>
+              <a:schemeClr val="bg1"/>
+            </a:solidFill>
+            <a:ln w="38100">
+              <a:solidFill>
+                <a:srgbClr val="000000"/>
+              </a:solidFill>
+            </a:ln>
+          </p:spPr>
+          <p:style>
+            <a:lnRef idx="2">
+              <a:schemeClr val="accent1">
+                <a:shade val="50000"/>
+              </a:schemeClr>
+            </a:lnRef>
+            <a:fillRef idx="1">
+              <a:schemeClr val="accent1"/>
+            </a:fillRef>
+            <a:effectRef idx="0">
+              <a:schemeClr val="accent1"/>
+            </a:effectRef>
+            <a:fontRef idx="minor"/>
+          </p:style>
+          <p:txBody>
+            <a:bodyPr lIns="90000" tIns="45000" rIns="90000" bIns="45000" anchor="ctr">
+              <a:noAutofit/>
+            </a:bodyPr>
+            <a:lstStyle/>
+            <a:p>
+              <a:pPr algn="ctr"/>
+              <a:r>
+                <a:rPr lang="en-US" sz="3600" spc="-1" dirty="0">
+                  <a:solidFill>
+                    <a:srgbClr val="000000"/>
+                  </a:solidFill>
+                  <a:latin typeface="Times New Roman" panose="02020603050405020304" pitchFamily="18" charset="0"/>
+                  <a:cs typeface="Times New Roman" panose="02020603050405020304" pitchFamily="18" charset="0"/>
+                </a:rPr>
+                <a:t>u</a:t>
+              </a:r>
+              <a:r>
+                <a:rPr lang="en-US" sz="3600" spc="-1" baseline="-25000" dirty="0">
+                  <a:solidFill>
+                    <a:srgbClr val="000000"/>
+                  </a:solidFill>
+                  <a:latin typeface="Times New Roman" panose="02020603050405020304" pitchFamily="18" charset="0"/>
+                  <a:cs typeface="Times New Roman" panose="02020603050405020304" pitchFamily="18" charset="0"/>
+                </a:rPr>
+                <a:t>2</a:t>
+              </a:r>
+              <a:endParaRPr lang="en-DK" sz="3600" b="0" strike="noStrike" spc="-1" dirty="0">
+                <a:solidFill>
+                  <a:srgbClr val="000000"/>
+                </a:solidFill>
+                <a:latin typeface="Arial"/>
+              </a:endParaRPr>
+            </a:p>
+          </p:txBody>
+        </p:sp>
+      </p:grpSp>
+      <p:grpSp>
+        <p:nvGrpSpPr>
+          <p:cNvPr id="58" name="Group 57">
+            <a:extLst>
+              <a:ext uri="{FF2B5EF4-FFF2-40B4-BE49-F238E27FC236}">
+                <a16:creationId xmlns:a16="http://schemas.microsoft.com/office/drawing/2014/main" id="{A6484C52-CEC8-C2EF-7540-EABAE25A7414}"/>
+              </a:ext>
+            </a:extLst>
+          </p:cNvPr>
+          <p:cNvGrpSpPr/>
+          <p:nvPr/>
+        </p:nvGrpSpPr>
+        <p:grpSpPr>
+          <a:xfrm>
+            <a:off x="7486388" y="5264551"/>
+            <a:ext cx="899996" cy="1429403"/>
+            <a:chOff x="3810864" y="5264551"/>
+            <a:chExt cx="899996" cy="1429403"/>
+          </a:xfrm>
+        </p:grpSpPr>
+        <p:cxnSp>
+          <p:nvCxnSpPr>
+            <p:cNvPr id="59" name="Straight Arrow Connector 14">
+              <a:extLst>
+                <a:ext uri="{FF2B5EF4-FFF2-40B4-BE49-F238E27FC236}">
+                  <a16:creationId xmlns:a16="http://schemas.microsoft.com/office/drawing/2014/main" id="{A03C9900-64EB-60C2-CB3C-669F16A4CD8D}"/>
+                </a:ext>
+              </a:extLst>
+            </p:cNvPr>
+            <p:cNvCxnSpPr>
+              <a:cxnSpLocks/>
+              <a:stCxn id="60" idx="0"/>
+            </p:cNvCxnSpPr>
+            <p:nvPr/>
+          </p:nvCxnSpPr>
+          <p:spPr>
+            <a:xfrm flipV="1">
+              <a:off x="4260862" y="5264551"/>
+              <a:ext cx="1" cy="529403"/>
+            </a:xfrm>
+            <a:prstGeom prst="straightConnector1">
+              <a:avLst/>
+            </a:prstGeom>
+            <a:ln w="38100">
+              <a:solidFill>
+                <a:srgbClr val="000000"/>
+              </a:solidFill>
+              <a:round/>
+              <a:headEnd type="none" w="med" len="med"/>
+              <a:tailEnd type="arrow" w="med" len="med"/>
+            </a:ln>
+          </p:spPr>
+        </p:cxnSp>
+        <p:sp>
+          <p:nvSpPr>
+            <p:cNvPr id="60" name="Oval 6">
+              <a:extLst>
+                <a:ext uri="{FF2B5EF4-FFF2-40B4-BE49-F238E27FC236}">
+                  <a16:creationId xmlns:a16="http://schemas.microsoft.com/office/drawing/2014/main" id="{73FA4775-008F-6916-3150-95AB47D739F8}"/>
+                </a:ext>
+              </a:extLst>
+            </p:cNvPr>
+            <p:cNvSpPr>
+              <a:spLocks noChangeAspect="1"/>
+            </p:cNvSpPr>
+            <p:nvPr/>
+          </p:nvSpPr>
+          <p:spPr>
+            <a:xfrm>
+              <a:off x="3810864" y="5793954"/>
+              <a:ext cx="899996" cy="900000"/>
+            </a:xfrm>
+            <a:prstGeom prst="ellipse">
+              <a:avLst/>
+            </a:prstGeom>
+            <a:solidFill>
+              <a:schemeClr val="bg1"/>
+            </a:solidFill>
+            <a:ln w="38100">
+              <a:solidFill>
+                <a:srgbClr val="000000"/>
+              </a:solidFill>
+            </a:ln>
+          </p:spPr>
+          <p:style>
+            <a:lnRef idx="2">
+              <a:schemeClr val="accent1">
+                <a:shade val="50000"/>
+              </a:schemeClr>
+            </a:lnRef>
+            <a:fillRef idx="1">
+              <a:schemeClr val="accent1"/>
+            </a:fillRef>
+            <a:effectRef idx="0">
+              <a:schemeClr val="accent1"/>
+            </a:effectRef>
+            <a:fontRef idx="minor"/>
+          </p:style>
+          <p:txBody>
+            <a:bodyPr lIns="90000" tIns="45000" rIns="90000" bIns="45000" anchor="ctr">
+              <a:noAutofit/>
+            </a:bodyPr>
+            <a:lstStyle/>
+            <a:p>
+              <a:pPr algn="ctr"/>
+              <a:r>
+                <a:rPr lang="en-US" sz="3600" spc="-1" dirty="0">
+                  <a:solidFill>
+                    <a:srgbClr val="000000"/>
+                  </a:solidFill>
+                  <a:latin typeface="Times New Roman" panose="02020603050405020304" pitchFamily="18" charset="0"/>
+                  <a:cs typeface="Times New Roman" panose="02020603050405020304" pitchFamily="18" charset="0"/>
+                </a:rPr>
+                <a:t>u</a:t>
+              </a:r>
+              <a:r>
+                <a:rPr lang="en-US" sz="3600" spc="-1" baseline="-25000" dirty="0">
+                  <a:solidFill>
+                    <a:srgbClr val="000000"/>
+                  </a:solidFill>
+                  <a:latin typeface="Times New Roman" panose="02020603050405020304" pitchFamily="18" charset="0"/>
+                  <a:cs typeface="Times New Roman" panose="02020603050405020304" pitchFamily="18" charset="0"/>
+                </a:rPr>
+                <a:t>3</a:t>
+              </a:r>
+              <a:endParaRPr lang="en-DK" sz="3600" b="0" strike="noStrike" spc="-1" dirty="0">
+                <a:solidFill>
+                  <a:srgbClr val="000000"/>
+                </a:solidFill>
+                <a:latin typeface="Arial"/>
+              </a:endParaRPr>
+            </a:p>
+          </p:txBody>
+        </p:sp>
+      </p:grpSp>
+    </p:spTree>
+    <p:extLst>
+      <p:ext uri="{BB962C8B-B14F-4D97-AF65-F5344CB8AC3E}">
+        <p14:creationId xmlns:p14="http://schemas.microsoft.com/office/powerpoint/2010/main" val="3221630922"/>
+      </p:ext>
+    </p:extLst>
+  </p:cSld>
+  <p:clrMapOvr>
+    <a:masterClrMapping/>
+  </p:clrMapOvr>
+</p:sld>
+</file>
+
+<file path=ppt/slides/slide8.xml><?xml version="1.0" encoding="utf-8"?>
+<p:sld xmlns:a="http://schemas.openxmlformats.org/drawingml/2006/main" xmlns:r="http://schemas.openxmlformats.org/officeDocument/2006/relationships" xmlns:p="http://schemas.openxmlformats.org/presentationml/2006/main">
+  <p:cSld>
+    <p:spTree>
+      <p:nvGrpSpPr>
+        <p:cNvPr id="1" name=""/>
+        <p:cNvGrpSpPr/>
+        <p:nvPr/>
+      </p:nvGrpSpPr>
+      <p:grpSpPr>
+        <a:xfrm>
+          <a:off x="0" y="0"/>
+          <a:ext cx="0" cy="0"/>
+          <a:chOff x="0" y="0"/>
+          <a:chExt cx="0" cy="0"/>
+        </a:xfrm>
+      </p:grpSpPr>
+      <mc:AlternateContent xmlns:mc="http://schemas.openxmlformats.org/markup-compatibility/2006">
+        <mc:Choice xmlns:p14="http://schemas.microsoft.com/office/powerpoint/2010/main" xmlns:aink="http://schemas.microsoft.com/office/drawing/2016/ink" Requires="p14 aink">
+          <p:contentPart p14:bwMode="auto" r:id="rId2">
+            <p14:nvContentPartPr>
+              <p14:cNvPr id="7" name="Ink 6">
+                <a:extLst>
+                  <a:ext uri="{FF2B5EF4-FFF2-40B4-BE49-F238E27FC236}">
+                    <a16:creationId xmlns:a16="http://schemas.microsoft.com/office/drawing/2014/main" id="{E1C2F3AB-61EC-6EE0-FC51-7189665119F5}"/>
+                  </a:ext>
+                </a:extLst>
+              </p14:cNvPr>
+              <p14:cNvContentPartPr/>
+              <p14:nvPr/>
+            </p14:nvContentPartPr>
+            <p14:xfrm>
+              <a:off x="848893" y="2768207"/>
+              <a:ext cx="30600" cy="7560"/>
+            </p14:xfrm>
+          </p:contentPart>
+        </mc:Choice>
+        <mc:Fallback>
+          <p:pic>
+            <p:nvPicPr>
+              <p:cNvPr id="7" name="Ink 6">
+                <a:extLst>
+                  <a:ext uri="{FF2B5EF4-FFF2-40B4-BE49-F238E27FC236}">
+                    <a16:creationId xmlns:a16="http://schemas.microsoft.com/office/drawing/2014/main" id="{E1C2F3AB-61EC-6EE0-FC51-7189665119F5}"/>
+                  </a:ext>
+                </a:extLst>
+              </p:cNvPr>
+              <p:cNvPicPr/>
+              <p:nvPr/>
+            </p:nvPicPr>
+            <p:blipFill>
+              <a:blip r:embed="rId3"/>
+              <a:stretch>
+                <a:fillRect/>
+              </a:stretch>
+            </p:blipFill>
+            <p:spPr>
+              <a:xfrm>
+                <a:off x="831253" y="2660567"/>
+                <a:ext cx="66240" cy="223200"/>
+              </a:xfrm>
+              <a:prstGeom prst="rect">
+                <a:avLst/>
+              </a:prstGeom>
+            </p:spPr>
+          </p:pic>
+        </mc:Fallback>
+      </mc:AlternateContent>
+      <mc:AlternateContent xmlns:mc="http://schemas.openxmlformats.org/markup-compatibility/2006">
+        <mc:Choice xmlns:p14="http://schemas.microsoft.com/office/powerpoint/2010/main" xmlns:aink="http://schemas.microsoft.com/office/drawing/2016/ink" Requires="p14 aink">
+          <p:contentPart p14:bwMode="auto" r:id="rId4">
+            <p14:nvContentPartPr>
+              <p14:cNvPr id="9" name="Ink 8">
+                <a:extLst>
+                  <a:ext uri="{FF2B5EF4-FFF2-40B4-BE49-F238E27FC236}">
+                    <a16:creationId xmlns:a16="http://schemas.microsoft.com/office/drawing/2014/main" id="{C74073CB-EC30-D2FE-85D5-386615377E70}"/>
+                  </a:ext>
+                </a:extLst>
+              </p14:cNvPr>
+              <p14:cNvContentPartPr/>
+              <p14:nvPr/>
+            </p14:nvContentPartPr>
+            <p14:xfrm>
+              <a:off x="4612770" y="596057"/>
+              <a:ext cx="360" cy="360"/>
+            </p14:xfrm>
+          </p:contentPart>
+        </mc:Choice>
+        <mc:Fallback>
+          <p:pic>
+            <p:nvPicPr>
+              <p:cNvPr id="9" name="Ink 8">
+                <a:extLst>
+                  <a:ext uri="{FF2B5EF4-FFF2-40B4-BE49-F238E27FC236}">
+                    <a16:creationId xmlns:a16="http://schemas.microsoft.com/office/drawing/2014/main" id="{C74073CB-EC30-D2FE-85D5-386615377E70}"/>
+                  </a:ext>
+                </a:extLst>
+              </p:cNvPr>
+              <p:cNvPicPr/>
+              <p:nvPr/>
+            </p:nvPicPr>
+            <p:blipFill>
+              <a:blip r:embed="rId5"/>
+              <a:stretch>
+                <a:fillRect/>
+              </a:stretch>
+            </p:blipFill>
+            <p:spPr>
+              <a:xfrm>
+                <a:off x="4594770" y="488057"/>
+                <a:ext cx="36000" cy="216000"/>
+              </a:xfrm>
+              <a:prstGeom prst="rect">
+                <a:avLst/>
+              </a:prstGeom>
+            </p:spPr>
+          </p:pic>
+        </mc:Fallback>
+      </mc:AlternateContent>
+      <p:grpSp>
+        <p:nvGrpSpPr>
+          <p:cNvPr id="11" name="Group 10">
+            <a:extLst>
+              <a:ext uri="{FF2B5EF4-FFF2-40B4-BE49-F238E27FC236}">
+                <a16:creationId xmlns:a16="http://schemas.microsoft.com/office/drawing/2014/main" id="{DB003518-83D3-6F66-D984-7A38AB5C04CC}"/>
+              </a:ext>
+            </a:extLst>
+          </p:cNvPr>
+          <p:cNvGrpSpPr/>
+          <p:nvPr/>
+        </p:nvGrpSpPr>
+        <p:grpSpPr>
+          <a:xfrm>
+            <a:off x="3396000" y="732101"/>
+            <a:ext cx="5400000" cy="5393797"/>
+            <a:chOff x="3018965" y="1114650"/>
+            <a:chExt cx="5400000" cy="5393797"/>
+          </a:xfrm>
+        </p:grpSpPr>
+        <p:sp>
+          <p:nvSpPr>
+            <p:cNvPr id="10" name="Oval 9">
+              <a:extLst>
+                <a:ext uri="{FF2B5EF4-FFF2-40B4-BE49-F238E27FC236}">
+                  <a16:creationId xmlns:a16="http://schemas.microsoft.com/office/drawing/2014/main" id="{62AA2105-86C8-A888-8C44-323F8585C1B3}"/>
+                </a:ext>
+              </a:extLst>
+            </p:cNvPr>
+            <p:cNvSpPr/>
+            <p:nvPr/>
+          </p:nvSpPr>
+          <p:spPr>
+            <a:xfrm>
+              <a:off x="3918965" y="2908447"/>
+              <a:ext cx="3600000" cy="3600000"/>
+            </a:xfrm>
+            <a:prstGeom prst="ellipse">
+              <a:avLst/>
+            </a:prstGeom>
+            <a:noFill/>
+            <a:ln w="38100">
+              <a:solidFill>
+                <a:schemeClr val="tx1"/>
+              </a:solidFill>
+            </a:ln>
+          </p:spPr>
+          <p:style>
+            <a:lnRef idx="2">
+              <a:schemeClr val="accent1">
+                <a:shade val="15000"/>
+              </a:schemeClr>
+            </a:lnRef>
+            <a:fillRef idx="1">
+              <a:schemeClr val="accent1"/>
+            </a:fillRef>
+            <a:effectRef idx="0">
+              <a:schemeClr val="accent1"/>
+            </a:effectRef>
+            <a:fontRef idx="minor">
+              <a:schemeClr val="lt1"/>
+            </a:fontRef>
+          </p:style>
+          <p:txBody>
+            <a:bodyPr rtlCol="0" anchor="ctr"/>
+            <a:lstStyle/>
+            <a:p>
+              <a:pPr algn="ctr"/>
+              <a:endParaRPr lang="nl-NL"/>
+            </a:p>
+          </p:txBody>
+        </p:sp>
+        <p:sp>
+          <p:nvSpPr>
+            <p:cNvPr id="4" name="Oval 3">
+              <a:extLst>
+                <a:ext uri="{FF2B5EF4-FFF2-40B4-BE49-F238E27FC236}">
+                  <a16:creationId xmlns:a16="http://schemas.microsoft.com/office/drawing/2014/main" id="{EE2B7B0B-EC0F-F066-EAD3-ED86310A554E}"/>
+                </a:ext>
+              </a:extLst>
+            </p:cNvPr>
+            <p:cNvSpPr/>
+            <p:nvPr/>
+          </p:nvSpPr>
+          <p:spPr>
+            <a:xfrm>
+              <a:off x="3018965" y="1114650"/>
+              <a:ext cx="3600000" cy="3600000"/>
+            </a:xfrm>
+            <a:prstGeom prst="ellipse">
+              <a:avLst/>
+            </a:prstGeom>
+            <a:noFill/>
+            <a:ln w="38100">
+              <a:solidFill>
+                <a:schemeClr val="tx1"/>
+              </a:solidFill>
+            </a:ln>
+          </p:spPr>
+          <p:style>
+            <a:lnRef idx="2">
+              <a:schemeClr val="accent1">
+                <a:shade val="15000"/>
+              </a:schemeClr>
+            </a:lnRef>
+            <a:fillRef idx="1">
+              <a:schemeClr val="accent1"/>
+            </a:fillRef>
+            <a:effectRef idx="0">
+              <a:schemeClr val="accent1"/>
+            </a:effectRef>
+            <a:fontRef idx="minor">
+              <a:schemeClr val="lt1"/>
+            </a:fontRef>
+          </p:style>
+          <p:txBody>
+            <a:bodyPr rtlCol="0" anchor="ctr"/>
+            <a:lstStyle/>
+            <a:p>
+              <a:pPr algn="ctr"/>
+              <a:endParaRPr lang="nl-NL" dirty="0"/>
+            </a:p>
+          </p:txBody>
+        </p:sp>
+        <p:sp>
+          <p:nvSpPr>
+            <p:cNvPr id="6" name="Oval 5">
+              <a:extLst>
+                <a:ext uri="{FF2B5EF4-FFF2-40B4-BE49-F238E27FC236}">
+                  <a16:creationId xmlns:a16="http://schemas.microsoft.com/office/drawing/2014/main" id="{41AA391E-8F21-0C46-270B-78228518C706}"/>
+                </a:ext>
+              </a:extLst>
+            </p:cNvPr>
+            <p:cNvSpPr/>
+            <p:nvPr/>
+          </p:nvSpPr>
+          <p:spPr>
+            <a:xfrm>
+              <a:off x="4818965" y="1126697"/>
+              <a:ext cx="3600000" cy="3600000"/>
+            </a:xfrm>
+            <a:prstGeom prst="ellipse">
+              <a:avLst/>
+            </a:prstGeom>
+            <a:noFill/>
+            <a:ln w="38100">
+              <a:solidFill>
+                <a:schemeClr val="tx1"/>
+              </a:solidFill>
+            </a:ln>
+          </p:spPr>
+          <p:style>
+            <a:lnRef idx="2">
+              <a:schemeClr val="accent1">
+                <a:shade val="15000"/>
+              </a:schemeClr>
+            </a:lnRef>
+            <a:fillRef idx="1">
+              <a:schemeClr val="accent1"/>
+            </a:fillRef>
+            <a:effectRef idx="0">
+              <a:schemeClr val="accent1"/>
+            </a:effectRef>
+            <a:fontRef idx="minor">
+              <a:schemeClr val="lt1"/>
+            </a:fontRef>
+          </p:style>
+          <p:txBody>
+            <a:bodyPr rtlCol="0" anchor="ctr"/>
+            <a:lstStyle/>
+            <a:p>
+              <a:pPr algn="ctr"/>
+              <a:endParaRPr lang="nl-NL"/>
+            </a:p>
+          </p:txBody>
+        </p:sp>
+        <mc:AlternateContent xmlns:mc="http://schemas.openxmlformats.org/markup-compatibility/2006">
+          <mc:Choice xmlns:p14="http://schemas.microsoft.com/office/powerpoint/2010/main" xmlns:aink="http://schemas.microsoft.com/office/drawing/2016/ink" Requires="p14 aink">
+            <p:contentPart p14:bwMode="auto" r:id="rId6">
+              <p14:nvContentPartPr>
+                <p14:cNvPr id="8" name="Ink 7">
+                  <a:extLst>
+                    <a:ext uri="{FF2B5EF4-FFF2-40B4-BE49-F238E27FC236}">
+                      <a16:creationId xmlns:a16="http://schemas.microsoft.com/office/drawing/2014/main" id="{C44EA5E8-6D0B-67B0-D888-8EE58E6BC70D}"/>
+                    </a:ext>
+                  </a:extLst>
+                </p14:cNvPr>
+                <p14:cNvContentPartPr/>
+                <p14:nvPr/>
+              </p14:nvContentPartPr>
+              <p14:xfrm>
+                <a:off x="4539330" y="1126697"/>
+                <a:ext cx="360" cy="360"/>
+              </p14:xfrm>
+            </p:contentPart>
+          </mc:Choice>
+          <mc:Fallback>
+            <p:pic>
+              <p:nvPicPr>
+                <p:cNvPr id="8" name="Ink 7">
+                  <a:extLst>
+                    <a:ext uri="{FF2B5EF4-FFF2-40B4-BE49-F238E27FC236}">
+                      <a16:creationId xmlns:a16="http://schemas.microsoft.com/office/drawing/2014/main" id="{C44EA5E8-6D0B-67B0-D888-8EE58E6BC70D}"/>
+                    </a:ext>
+                  </a:extLst>
+                </p:cNvPr>
+                <p:cNvPicPr/>
+                <p:nvPr/>
+              </p:nvPicPr>
+              <p:blipFill>
+                <a:blip r:embed="rId7"/>
+                <a:stretch>
+                  <a:fillRect/>
+                </a:stretch>
+              </p:blipFill>
+              <p:spPr>
+                <a:xfrm>
+                  <a:off x="4520610" y="1107617"/>
+                  <a:ext cx="38160" cy="38160"/>
+                </a:xfrm>
+                <a:prstGeom prst="rect">
+                  <a:avLst/>
+                </a:prstGeom>
+              </p:spPr>
+            </p:pic>
+          </mc:Fallback>
+        </mc:AlternateContent>
+      </p:grpSp>
+      <p:sp>
+        <p:nvSpPr>
+          <p:cNvPr id="12" name="TextBox 11">
+            <a:extLst>
+              <a:ext uri="{FF2B5EF4-FFF2-40B4-BE49-F238E27FC236}">
+                <a16:creationId xmlns:a16="http://schemas.microsoft.com/office/drawing/2014/main" id="{C24046CA-2F67-657B-CD11-BC751A4F1EC3}"/>
+              </a:ext>
+            </a:extLst>
+          </p:cNvPr>
+          <p:cNvSpPr txBox="1"/>
+          <p:nvPr/>
+        </p:nvSpPr>
+        <p:spPr>
+          <a:xfrm>
+            <a:off x="4153980" y="1498188"/>
+            <a:ext cx="1042020" cy="1015663"/>
+          </a:xfrm>
+          <a:prstGeom prst="rect">
+            <a:avLst/>
+          </a:prstGeom>
+          <a:noFill/>
+        </p:spPr>
+        <p:txBody>
+          <a:bodyPr wrap="square" rtlCol="0" anchor="ctr">
+            <a:spAutoFit/>
+          </a:bodyPr>
+          <a:lstStyle/>
+          <a:p>
+            <a:pPr algn="ctr"/>
+            <a:r>
+              <a:rPr lang="nl-NL" sz="6000" dirty="0">
+                <a:latin typeface="Times New Roman" panose="02020603050405020304" pitchFamily="18" charset="0"/>
+                <a:cs typeface="Times New Roman" panose="02020603050405020304" pitchFamily="18" charset="0"/>
+              </a:rPr>
+              <a:t>Y</a:t>
+            </a:r>
+            <a:r>
+              <a:rPr lang="nl-NL" sz="6000" baseline="-25000" dirty="0">
+                <a:latin typeface="Times New Roman" panose="02020603050405020304" pitchFamily="18" charset="0"/>
+                <a:cs typeface="Times New Roman" panose="02020603050405020304" pitchFamily="18" charset="0"/>
+              </a:rPr>
+              <a:t>1</a:t>
+            </a:r>
+            <a:endParaRPr lang="nl-NL" sz="6000" dirty="0">
+              <a:latin typeface="Times New Roman" panose="02020603050405020304" pitchFamily="18" charset="0"/>
+              <a:cs typeface="Times New Roman" panose="02020603050405020304" pitchFamily="18" charset="0"/>
+            </a:endParaRPr>
+          </a:p>
+        </p:txBody>
+      </p:sp>
+      <p:sp>
+        <p:nvSpPr>
+          <p:cNvPr id="13" name="TextBox 12">
+            <a:extLst>
+              <a:ext uri="{FF2B5EF4-FFF2-40B4-BE49-F238E27FC236}">
+                <a16:creationId xmlns:a16="http://schemas.microsoft.com/office/drawing/2014/main" id="{0B62FEBA-F5D1-F9AC-D16A-FAFF9E30D6E3}"/>
+              </a:ext>
+            </a:extLst>
+          </p:cNvPr>
+          <p:cNvSpPr txBox="1"/>
+          <p:nvPr/>
+        </p:nvSpPr>
+        <p:spPr>
+          <a:xfrm>
+            <a:off x="6996000" y="1498187"/>
+            <a:ext cx="1042020" cy="1015663"/>
+          </a:xfrm>
+          <a:prstGeom prst="rect">
+            <a:avLst/>
+          </a:prstGeom>
+          <a:noFill/>
+        </p:spPr>
+        <p:txBody>
+          <a:bodyPr wrap="square" rtlCol="0" anchor="ctr">
+            <a:spAutoFit/>
+          </a:bodyPr>
+          <a:lstStyle/>
+          <a:p>
+            <a:pPr algn="ctr"/>
+            <a:r>
+              <a:rPr lang="nl-NL" sz="6000" dirty="0">
+                <a:latin typeface="Times New Roman" panose="02020603050405020304" pitchFamily="18" charset="0"/>
+                <a:cs typeface="Times New Roman" panose="02020603050405020304" pitchFamily="18" charset="0"/>
+              </a:rPr>
+              <a:t>Y</a:t>
+            </a:r>
+            <a:r>
+              <a:rPr lang="nl-NL" sz="6000" baseline="-25000" dirty="0">
+                <a:latin typeface="Times New Roman" panose="02020603050405020304" pitchFamily="18" charset="0"/>
+                <a:cs typeface="Times New Roman" panose="02020603050405020304" pitchFamily="18" charset="0"/>
+              </a:rPr>
+              <a:t>2</a:t>
+            </a:r>
+            <a:endParaRPr lang="nl-NL" sz="6000" dirty="0">
+              <a:latin typeface="Times New Roman" panose="02020603050405020304" pitchFamily="18" charset="0"/>
+              <a:cs typeface="Times New Roman" panose="02020603050405020304" pitchFamily="18" charset="0"/>
+            </a:endParaRPr>
+          </a:p>
+        </p:txBody>
+      </p:sp>
+      <p:sp>
+        <p:nvSpPr>
+          <p:cNvPr id="14" name="TextBox 13">
+            <a:extLst>
+              <a:ext uri="{FF2B5EF4-FFF2-40B4-BE49-F238E27FC236}">
+                <a16:creationId xmlns:a16="http://schemas.microsoft.com/office/drawing/2014/main" id="{45939EDF-6166-AD55-3F9D-BA569EAAB527}"/>
+              </a:ext>
+            </a:extLst>
+          </p:cNvPr>
+          <p:cNvSpPr txBox="1"/>
+          <p:nvPr/>
+        </p:nvSpPr>
+        <p:spPr>
+          <a:xfrm>
+            <a:off x="5574990" y="4219359"/>
+            <a:ext cx="1042020" cy="1015663"/>
+          </a:xfrm>
+          <a:prstGeom prst="rect">
+            <a:avLst/>
+          </a:prstGeom>
+          <a:noFill/>
+        </p:spPr>
+        <p:txBody>
+          <a:bodyPr wrap="square" rtlCol="0" anchor="ctr">
+            <a:spAutoFit/>
+          </a:bodyPr>
+          <a:lstStyle/>
+          <a:p>
+            <a:pPr algn="ctr"/>
+            <a:r>
+              <a:rPr lang="nl-NL" sz="6000" dirty="0">
+                <a:latin typeface="Times New Roman" panose="02020603050405020304" pitchFamily="18" charset="0"/>
+                <a:cs typeface="Times New Roman" panose="02020603050405020304" pitchFamily="18" charset="0"/>
+              </a:rPr>
+              <a:t>Y</a:t>
+            </a:r>
+            <a:r>
+              <a:rPr lang="nl-NL" sz="6000" baseline="-25000" dirty="0">
+                <a:latin typeface="Times New Roman" panose="02020603050405020304" pitchFamily="18" charset="0"/>
+                <a:cs typeface="Times New Roman" panose="02020603050405020304" pitchFamily="18" charset="0"/>
+              </a:rPr>
+              <a:t>3</a:t>
+            </a:r>
+            <a:endParaRPr lang="nl-NL" sz="6000" dirty="0">
+              <a:latin typeface="Times New Roman" panose="02020603050405020304" pitchFamily="18" charset="0"/>
+              <a:cs typeface="Times New Roman" panose="02020603050405020304" pitchFamily="18" charset="0"/>
+            </a:endParaRPr>
+          </a:p>
+        </p:txBody>
+      </p:sp>
+    </p:spTree>
+    <p:extLst>
+      <p:ext uri="{BB962C8B-B14F-4D97-AF65-F5344CB8AC3E}">
+        <p14:creationId xmlns:p14="http://schemas.microsoft.com/office/powerpoint/2010/main" val="1065562648"/>
+      </p:ext>
+    </p:extLst>
+  </p:cSld>
+  <p:clrMapOvr>
+    <a:masterClrMapping/>
+  </p:clrMapOvr>
+</p:sld>
+</file>
+
+<file path=ppt/slides/slide9.xml><?xml version="1.0" encoding="utf-8"?>
+<p:sld xmlns:a="http://schemas.openxmlformats.org/drawingml/2006/main" xmlns:r="http://schemas.openxmlformats.org/officeDocument/2006/relationships" xmlns:p="http://schemas.openxmlformats.org/presentationml/2006/main">
+  <p:cSld>
+    <p:spTree>
+      <p:nvGrpSpPr>
+        <p:cNvPr id="1" name="">
+          <a:extLst>
+            <a:ext uri="{FF2B5EF4-FFF2-40B4-BE49-F238E27FC236}">
+              <a16:creationId xmlns:a16="http://schemas.microsoft.com/office/drawing/2014/main" id="{39F96EA8-59E8-3E51-3104-6D6BB4AEF0D6}"/>
+            </a:ext>
+          </a:extLst>
+        </p:cNvPr>
+        <p:cNvGrpSpPr/>
+        <p:nvPr/>
+      </p:nvGrpSpPr>
+      <p:grpSpPr>
+        <a:xfrm>
+          <a:off x="0" y="0"/>
+          <a:ext cx="0" cy="0"/>
+          <a:chOff x="0" y="0"/>
+          <a:chExt cx="0" cy="0"/>
+        </a:xfrm>
+      </p:grpSpPr>
+      <mc:AlternateContent xmlns:mc="http://schemas.openxmlformats.org/markup-compatibility/2006">
+        <mc:Choice xmlns:p14="http://schemas.microsoft.com/office/powerpoint/2010/main" xmlns:aink="http://schemas.microsoft.com/office/drawing/2016/ink" Requires="p14 aink">
+          <p:contentPart p14:bwMode="auto" r:id="rId2">
+            <p14:nvContentPartPr>
+              <p14:cNvPr id="7" name="Ink 6">
+                <a:extLst>
+                  <a:ext uri="{FF2B5EF4-FFF2-40B4-BE49-F238E27FC236}">
+                    <a16:creationId xmlns:a16="http://schemas.microsoft.com/office/drawing/2014/main" id="{661BB795-2ACF-F5F6-0C93-F7EA986AEA72}"/>
+                  </a:ext>
+                </a:extLst>
+              </p14:cNvPr>
+              <p14:cNvContentPartPr/>
+              <p14:nvPr/>
+            </p14:nvContentPartPr>
+            <p14:xfrm>
+              <a:off x="848893" y="2768207"/>
+              <a:ext cx="30600" cy="7560"/>
+            </p14:xfrm>
+          </p:contentPart>
+        </mc:Choice>
+        <mc:Fallback>
+          <p:pic>
+            <p:nvPicPr>
+              <p:cNvPr id="7" name="Ink 6">
+                <a:extLst>
+                  <a:ext uri="{FF2B5EF4-FFF2-40B4-BE49-F238E27FC236}">
+                    <a16:creationId xmlns:a16="http://schemas.microsoft.com/office/drawing/2014/main" id="{661BB795-2ACF-F5F6-0C93-F7EA986AEA72}"/>
+                  </a:ext>
+                </a:extLst>
+              </p:cNvPr>
+              <p:cNvPicPr/>
+              <p:nvPr/>
+            </p:nvPicPr>
+            <p:blipFill>
+              <a:blip r:embed="rId3"/>
+              <a:stretch>
+                <a:fillRect/>
+              </a:stretch>
+            </p:blipFill>
+            <p:spPr>
+              <a:xfrm>
+                <a:off x="831253" y="2660567"/>
+                <a:ext cx="66240" cy="223200"/>
+              </a:xfrm>
+              <a:prstGeom prst="rect">
+                <a:avLst/>
+              </a:prstGeom>
+            </p:spPr>
+          </p:pic>
+        </mc:Fallback>
+      </mc:AlternateContent>
+      <mc:AlternateContent xmlns:mc="http://schemas.openxmlformats.org/markup-compatibility/2006">
+        <mc:Choice xmlns:p14="http://schemas.microsoft.com/office/powerpoint/2010/main" xmlns:aink="http://schemas.microsoft.com/office/drawing/2016/ink" Requires="p14 aink">
+          <p:contentPart p14:bwMode="auto" r:id="rId4">
+            <p14:nvContentPartPr>
+              <p14:cNvPr id="9" name="Ink 8">
+                <a:extLst>
+                  <a:ext uri="{FF2B5EF4-FFF2-40B4-BE49-F238E27FC236}">
+                    <a16:creationId xmlns:a16="http://schemas.microsoft.com/office/drawing/2014/main" id="{B6EF929A-7FBF-DB1A-ADFB-041DFBFACB08}"/>
+                  </a:ext>
+                </a:extLst>
+              </p14:cNvPr>
+              <p14:cNvContentPartPr/>
+              <p14:nvPr/>
+            </p14:nvContentPartPr>
+            <p14:xfrm>
+              <a:off x="4612770" y="596057"/>
+              <a:ext cx="360" cy="360"/>
+            </p14:xfrm>
+          </p:contentPart>
+        </mc:Choice>
+        <mc:Fallback>
+          <p:pic>
+            <p:nvPicPr>
+              <p:cNvPr id="9" name="Ink 8">
+                <a:extLst>
+                  <a:ext uri="{FF2B5EF4-FFF2-40B4-BE49-F238E27FC236}">
+                    <a16:creationId xmlns:a16="http://schemas.microsoft.com/office/drawing/2014/main" id="{B6EF929A-7FBF-DB1A-ADFB-041DFBFACB08}"/>
+                  </a:ext>
+                </a:extLst>
+              </p:cNvPr>
+              <p:cNvPicPr/>
+              <p:nvPr/>
+            </p:nvPicPr>
+            <p:blipFill>
+              <a:blip r:embed="rId5"/>
+              <a:stretch>
+                <a:fillRect/>
+              </a:stretch>
+            </p:blipFill>
+            <p:spPr>
+              <a:xfrm>
+                <a:off x="4594770" y="488057"/>
+                <a:ext cx="36000" cy="216000"/>
+              </a:xfrm>
+              <a:prstGeom prst="rect">
+                <a:avLst/>
+              </a:prstGeom>
+            </p:spPr>
+          </p:pic>
+        </mc:Fallback>
+      </mc:AlternateContent>
+      <p:grpSp>
+        <p:nvGrpSpPr>
+          <p:cNvPr id="11" name="Group 10">
+            <a:extLst>
+              <a:ext uri="{FF2B5EF4-FFF2-40B4-BE49-F238E27FC236}">
+                <a16:creationId xmlns:a16="http://schemas.microsoft.com/office/drawing/2014/main" id="{090ECCDB-202A-CAF1-786D-0BA665365631}"/>
+              </a:ext>
+            </a:extLst>
+          </p:cNvPr>
+          <p:cNvGrpSpPr/>
+          <p:nvPr/>
+        </p:nvGrpSpPr>
+        <p:grpSpPr>
+          <a:xfrm>
+            <a:off x="3396000" y="732101"/>
+            <a:ext cx="5400000" cy="5393797"/>
+            <a:chOff x="3018965" y="1114650"/>
+            <a:chExt cx="5400000" cy="5393797"/>
+          </a:xfrm>
+        </p:grpSpPr>
+        <p:sp>
+          <p:nvSpPr>
+            <p:cNvPr id="10" name="Oval 9">
+              <a:extLst>
+                <a:ext uri="{FF2B5EF4-FFF2-40B4-BE49-F238E27FC236}">
+                  <a16:creationId xmlns:a16="http://schemas.microsoft.com/office/drawing/2014/main" id="{7E49CEFA-7BCA-B63D-1BA4-53296A6BE27F}"/>
+                </a:ext>
+              </a:extLst>
+            </p:cNvPr>
+            <p:cNvSpPr/>
+            <p:nvPr/>
+          </p:nvSpPr>
+          <p:spPr>
+            <a:xfrm>
+              <a:off x="3918965" y="2908447"/>
+              <a:ext cx="3600000" cy="3600000"/>
+            </a:xfrm>
+            <a:prstGeom prst="ellipse">
+              <a:avLst/>
+            </a:prstGeom>
+            <a:solidFill>
+              <a:schemeClr val="bg2">
+                <a:lumMod val="50000"/>
+              </a:schemeClr>
+            </a:solidFill>
+            <a:ln w="38100">
+              <a:solidFill>
+                <a:schemeClr val="tx1"/>
+              </a:solidFill>
+            </a:ln>
+          </p:spPr>
+          <p:style>
+            <a:lnRef idx="2">
+              <a:schemeClr val="accent1">
+                <a:shade val="15000"/>
+              </a:schemeClr>
+            </a:lnRef>
+            <a:fillRef idx="1">
+              <a:schemeClr val="accent1"/>
+            </a:fillRef>
+            <a:effectRef idx="0">
+              <a:schemeClr val="accent1"/>
+            </a:effectRef>
+            <a:fontRef idx="minor">
+              <a:schemeClr val="lt1"/>
+            </a:fontRef>
+          </p:style>
+          <p:txBody>
+            <a:bodyPr rtlCol="0" anchor="ctr"/>
+            <a:lstStyle/>
+            <a:p>
+              <a:pPr algn="ctr"/>
+              <a:endParaRPr lang="nl-NL"/>
+            </a:p>
+          </p:txBody>
+        </p:sp>
+        <p:sp>
+          <p:nvSpPr>
+            <p:cNvPr id="4" name="Oval 3">
+              <a:extLst>
+                <a:ext uri="{FF2B5EF4-FFF2-40B4-BE49-F238E27FC236}">
+                  <a16:creationId xmlns:a16="http://schemas.microsoft.com/office/drawing/2014/main" id="{C3FDAB8A-9128-0160-E9B9-9AEF27C6C8B6}"/>
+                </a:ext>
+              </a:extLst>
+            </p:cNvPr>
+            <p:cNvSpPr/>
+            <p:nvPr/>
+          </p:nvSpPr>
+          <p:spPr>
+            <a:xfrm>
+              <a:off x="3018965" y="1114650"/>
+              <a:ext cx="3600000" cy="3600000"/>
+            </a:xfrm>
+            <a:prstGeom prst="ellipse">
+              <a:avLst/>
+            </a:prstGeom>
+            <a:noFill/>
+            <a:ln w="38100">
+              <a:solidFill>
+                <a:schemeClr val="tx1"/>
+              </a:solidFill>
+            </a:ln>
+          </p:spPr>
+          <p:style>
+            <a:lnRef idx="2">
+              <a:schemeClr val="accent1">
+                <a:shade val="15000"/>
+              </a:schemeClr>
+            </a:lnRef>
+            <a:fillRef idx="1">
+              <a:schemeClr val="accent1"/>
+            </a:fillRef>
+            <a:effectRef idx="0">
+              <a:schemeClr val="accent1"/>
+            </a:effectRef>
+            <a:fontRef idx="minor">
+              <a:schemeClr val="lt1"/>
+            </a:fontRef>
+          </p:style>
+          <p:txBody>
+            <a:bodyPr rtlCol="0" anchor="ctr"/>
+            <a:lstStyle/>
+            <a:p>
+              <a:pPr algn="ctr"/>
+              <a:endParaRPr lang="nl-NL" dirty="0"/>
+            </a:p>
+          </p:txBody>
+        </p:sp>
+        <p:sp>
+          <p:nvSpPr>
+            <p:cNvPr id="6" name="Oval 5">
+              <a:extLst>
+                <a:ext uri="{FF2B5EF4-FFF2-40B4-BE49-F238E27FC236}">
+                  <a16:creationId xmlns:a16="http://schemas.microsoft.com/office/drawing/2014/main" id="{B7E68732-3EE5-1FA9-3A2A-F7E2219D828D}"/>
+                </a:ext>
+              </a:extLst>
+            </p:cNvPr>
+            <p:cNvSpPr/>
+            <p:nvPr/>
+          </p:nvSpPr>
+          <p:spPr>
+            <a:xfrm>
+              <a:off x="4818965" y="1126697"/>
+              <a:ext cx="3600000" cy="3600000"/>
+            </a:xfrm>
+            <a:prstGeom prst="ellipse">
+              <a:avLst/>
+            </a:prstGeom>
+            <a:noFill/>
+            <a:ln w="38100">
+              <a:solidFill>
+                <a:schemeClr val="tx1"/>
+              </a:solidFill>
+            </a:ln>
+          </p:spPr>
+          <p:style>
+            <a:lnRef idx="2">
+              <a:schemeClr val="accent1">
+                <a:shade val="15000"/>
+              </a:schemeClr>
+            </a:lnRef>
+            <a:fillRef idx="1">
+              <a:schemeClr val="accent1"/>
+            </a:fillRef>
+            <a:effectRef idx="0">
+              <a:schemeClr val="accent1"/>
+            </a:effectRef>
+            <a:fontRef idx="minor">
+              <a:schemeClr val="lt1"/>
+            </a:fontRef>
+          </p:style>
+          <p:txBody>
+            <a:bodyPr rtlCol="0" anchor="ctr"/>
+            <a:lstStyle/>
+            <a:p>
+              <a:pPr algn="ctr"/>
+              <a:endParaRPr lang="nl-NL"/>
+            </a:p>
+          </p:txBody>
+        </p:sp>
+        <mc:AlternateContent xmlns:mc="http://schemas.openxmlformats.org/markup-compatibility/2006">
+          <mc:Choice xmlns:p14="http://schemas.microsoft.com/office/powerpoint/2010/main" xmlns:aink="http://schemas.microsoft.com/office/drawing/2016/ink" Requires="p14 aink">
+            <p:contentPart p14:bwMode="auto" r:id="rId6">
+              <p14:nvContentPartPr>
+                <p14:cNvPr id="8" name="Ink 7">
+                  <a:extLst>
+                    <a:ext uri="{FF2B5EF4-FFF2-40B4-BE49-F238E27FC236}">
+                      <a16:creationId xmlns:a16="http://schemas.microsoft.com/office/drawing/2014/main" id="{8C89F955-2A18-E003-08D0-559044273EB6}"/>
+                    </a:ext>
+                  </a:extLst>
+                </p14:cNvPr>
+                <p14:cNvContentPartPr/>
+                <p14:nvPr/>
+              </p14:nvContentPartPr>
+              <p14:xfrm>
+                <a:off x="4539330" y="1126697"/>
+                <a:ext cx="360" cy="360"/>
+              </p14:xfrm>
+            </p:contentPart>
+          </mc:Choice>
+          <mc:Fallback>
+            <p:pic>
+              <p:nvPicPr>
+                <p:cNvPr id="8" name="Ink 7">
+                  <a:extLst>
+                    <a:ext uri="{FF2B5EF4-FFF2-40B4-BE49-F238E27FC236}">
+                      <a16:creationId xmlns:a16="http://schemas.microsoft.com/office/drawing/2014/main" id="{8C89F955-2A18-E003-08D0-559044273EB6}"/>
+                    </a:ext>
+                  </a:extLst>
+                </p:cNvPr>
+                <p:cNvPicPr/>
+                <p:nvPr/>
+              </p:nvPicPr>
+              <p:blipFill>
+                <a:blip r:embed="rId7"/>
+                <a:stretch>
+                  <a:fillRect/>
+                </a:stretch>
+              </p:blipFill>
+              <p:spPr>
+                <a:xfrm>
+                  <a:off x="4520610" y="1107617"/>
+                  <a:ext cx="38160" cy="38160"/>
+                </a:xfrm>
+                <a:prstGeom prst="rect">
+                  <a:avLst/>
+                </a:prstGeom>
+              </p:spPr>
+            </p:pic>
+          </mc:Fallback>
+        </mc:AlternateContent>
+      </p:grpSp>
+      <p:sp>
+        <p:nvSpPr>
+          <p:cNvPr id="12" name="TextBox 11">
+            <a:extLst>
+              <a:ext uri="{FF2B5EF4-FFF2-40B4-BE49-F238E27FC236}">
+                <a16:creationId xmlns:a16="http://schemas.microsoft.com/office/drawing/2014/main" id="{F34B2971-A820-847A-833D-8511137AFA64}"/>
+              </a:ext>
+            </a:extLst>
+          </p:cNvPr>
+          <p:cNvSpPr txBox="1"/>
+          <p:nvPr/>
+        </p:nvSpPr>
+        <p:spPr>
+          <a:xfrm>
+            <a:off x="4153980" y="1498188"/>
+            <a:ext cx="1042020" cy="1015663"/>
+          </a:xfrm>
+          <a:prstGeom prst="rect">
+            <a:avLst/>
+          </a:prstGeom>
+          <a:noFill/>
+        </p:spPr>
+        <p:txBody>
+          <a:bodyPr wrap="square" rtlCol="0" anchor="ctr">
+            <a:spAutoFit/>
+          </a:bodyPr>
+          <a:lstStyle/>
+          <a:p>
+            <a:pPr algn="ctr"/>
+            <a:r>
+              <a:rPr lang="nl-NL" sz="6000" dirty="0">
+                <a:latin typeface="Times New Roman" panose="02020603050405020304" pitchFamily="18" charset="0"/>
+                <a:cs typeface="Times New Roman" panose="02020603050405020304" pitchFamily="18" charset="0"/>
+              </a:rPr>
+              <a:t>Y</a:t>
+            </a:r>
+            <a:r>
+              <a:rPr lang="nl-NL" sz="6000" baseline="-25000" dirty="0">
+                <a:latin typeface="Times New Roman" panose="02020603050405020304" pitchFamily="18" charset="0"/>
+                <a:cs typeface="Times New Roman" panose="02020603050405020304" pitchFamily="18" charset="0"/>
+              </a:rPr>
+              <a:t>1</a:t>
+            </a:r>
+            <a:endParaRPr lang="nl-NL" sz="6000" dirty="0">
+              <a:latin typeface="Times New Roman" panose="02020603050405020304" pitchFamily="18" charset="0"/>
+              <a:cs typeface="Times New Roman" panose="02020603050405020304" pitchFamily="18" charset="0"/>
+            </a:endParaRPr>
+          </a:p>
+        </p:txBody>
+      </p:sp>
+      <p:sp>
+        <p:nvSpPr>
+          <p:cNvPr id="13" name="TextBox 12">
+            <a:extLst>
+              <a:ext uri="{FF2B5EF4-FFF2-40B4-BE49-F238E27FC236}">
+                <a16:creationId xmlns:a16="http://schemas.microsoft.com/office/drawing/2014/main" id="{50D2FA4E-9A2A-6DED-12CB-CB49191ACC1B}"/>
+              </a:ext>
+            </a:extLst>
+          </p:cNvPr>
+          <p:cNvSpPr txBox="1"/>
+          <p:nvPr/>
+        </p:nvSpPr>
+        <p:spPr>
+          <a:xfrm>
+            <a:off x="6996000" y="1498187"/>
+            <a:ext cx="1042020" cy="1015663"/>
+          </a:xfrm>
+          <a:prstGeom prst="rect">
+            <a:avLst/>
+          </a:prstGeom>
+          <a:noFill/>
+        </p:spPr>
+        <p:txBody>
+          <a:bodyPr wrap="square" rtlCol="0" anchor="ctr">
+            <a:spAutoFit/>
+          </a:bodyPr>
+          <a:lstStyle/>
+          <a:p>
+            <a:pPr algn="ctr"/>
+            <a:r>
+              <a:rPr lang="nl-NL" sz="6000" dirty="0">
+                <a:latin typeface="Times New Roman" panose="02020603050405020304" pitchFamily="18" charset="0"/>
+                <a:cs typeface="Times New Roman" panose="02020603050405020304" pitchFamily="18" charset="0"/>
+              </a:rPr>
+              <a:t>Y</a:t>
+            </a:r>
+            <a:r>
+              <a:rPr lang="nl-NL" sz="6000" baseline="-25000" dirty="0">
+                <a:latin typeface="Times New Roman" panose="02020603050405020304" pitchFamily="18" charset="0"/>
+                <a:cs typeface="Times New Roman" panose="02020603050405020304" pitchFamily="18" charset="0"/>
+              </a:rPr>
+              <a:t>2</a:t>
+            </a:r>
+            <a:endParaRPr lang="nl-NL" sz="6000" dirty="0">
+              <a:latin typeface="Times New Roman" panose="02020603050405020304" pitchFamily="18" charset="0"/>
+              <a:cs typeface="Times New Roman" panose="02020603050405020304" pitchFamily="18" charset="0"/>
+            </a:endParaRPr>
+          </a:p>
+        </p:txBody>
+      </p:sp>
+      <p:sp>
+        <p:nvSpPr>
+          <p:cNvPr id="14" name="TextBox 13">
+            <a:extLst>
+              <a:ext uri="{FF2B5EF4-FFF2-40B4-BE49-F238E27FC236}">
+                <a16:creationId xmlns:a16="http://schemas.microsoft.com/office/drawing/2014/main" id="{EE98CA98-1C60-9416-1461-9C40C26BFB41}"/>
+              </a:ext>
+            </a:extLst>
+          </p:cNvPr>
+          <p:cNvSpPr txBox="1"/>
+          <p:nvPr/>
+        </p:nvSpPr>
+        <p:spPr>
+          <a:xfrm>
+            <a:off x="5574990" y="4219359"/>
+            <a:ext cx="1042020" cy="1015663"/>
+          </a:xfrm>
+          <a:prstGeom prst="rect">
+            <a:avLst/>
+          </a:prstGeom>
+          <a:noFill/>
+        </p:spPr>
+        <p:txBody>
+          <a:bodyPr wrap="square" rtlCol="0" anchor="ctr">
+            <a:spAutoFit/>
+          </a:bodyPr>
+          <a:lstStyle/>
+          <a:p>
+            <a:pPr algn="ctr"/>
+            <a:r>
+              <a:rPr lang="nl-NL" sz="6000" dirty="0">
+                <a:latin typeface="Times New Roman" panose="02020603050405020304" pitchFamily="18" charset="0"/>
+                <a:cs typeface="Times New Roman" panose="02020603050405020304" pitchFamily="18" charset="0"/>
+              </a:rPr>
+              <a:t>Y</a:t>
+            </a:r>
+            <a:r>
+              <a:rPr lang="nl-NL" sz="6000" baseline="-25000" dirty="0">
+                <a:latin typeface="Times New Roman" panose="02020603050405020304" pitchFamily="18" charset="0"/>
+                <a:cs typeface="Times New Roman" panose="02020603050405020304" pitchFamily="18" charset="0"/>
+              </a:rPr>
+              <a:t>3</a:t>
+            </a:r>
+            <a:endParaRPr lang="nl-NL" sz="6000" dirty="0">
+              <a:latin typeface="Times New Roman" panose="02020603050405020304" pitchFamily="18" charset="0"/>
+              <a:cs typeface="Times New Roman" panose="02020603050405020304" pitchFamily="18" charset="0"/>
+            </a:endParaRPr>
+          </a:p>
+        </p:txBody>
+      </p:sp>
+      <p:sp>
+        <p:nvSpPr>
+          <p:cNvPr id="15" name="TextBox 14">
+            <a:extLst>
+              <a:ext uri="{FF2B5EF4-FFF2-40B4-BE49-F238E27FC236}">
+                <a16:creationId xmlns:a16="http://schemas.microsoft.com/office/drawing/2014/main" id="{23FDF073-505F-2B09-4720-900E45237044}"/>
+              </a:ext>
+            </a:extLst>
+          </p:cNvPr>
+          <p:cNvSpPr txBox="1"/>
+          <p:nvPr/>
+        </p:nvSpPr>
+        <p:spPr>
+          <a:xfrm>
+            <a:off x="5574990" y="2544148"/>
+            <a:ext cx="1042020" cy="1015663"/>
+          </a:xfrm>
+          <a:prstGeom prst="rect">
+            <a:avLst/>
+          </a:prstGeom>
+          <a:noFill/>
+        </p:spPr>
+        <p:txBody>
+          <a:bodyPr wrap="square" rtlCol="0" anchor="ctr">
+            <a:spAutoFit/>
+          </a:bodyPr>
+          <a:lstStyle/>
+          <a:p>
+            <a:pPr algn="ctr"/>
+            <a:r>
+              <a:rPr lang="nl-NL" sz="6000" dirty="0">
+                <a:ln>
+                  <a:solidFill>
+                    <a:schemeClr val="bg1"/>
+                  </a:solidFill>
+                </a:ln>
+                <a:solidFill>
+                  <a:schemeClr val="bg1"/>
+                </a:solidFill>
+                <a:latin typeface="Times New Roman" panose="02020603050405020304" pitchFamily="18" charset="0"/>
+                <a:cs typeface="Times New Roman" panose="02020603050405020304" pitchFamily="18" charset="0"/>
+              </a:rPr>
+              <a:t>η</a:t>
+            </a:r>
+          </a:p>
+        </p:txBody>
+      </p:sp>
+    </p:spTree>
+    <p:extLst>
+      <p:ext uri="{BB962C8B-B14F-4D97-AF65-F5344CB8AC3E}">
+        <p14:creationId xmlns:p14="http://schemas.microsoft.com/office/powerpoint/2010/main" val="305752459"/>
+      </p:ext>
+    </p:extLst>
   </p:cSld>
   <p:clrMapOvr>
     <a:masterClrMapping/>
